--- a/docs/Verity-AI-Pitch-Deck.pptx
+++ b/docs/Verity-AI-Pitch-Deck.pptx
@@ -4,9 +4,6 @@
   <p:sldMasterIdLst>
     <p:sldMasterId id="2147483648" r:id="rId1"/>
   </p:sldMasterIdLst>
-  <p:notesMasterIdLst>
-    <p:notesMasterId r:id="rId12"/>
-  </p:notesMasterIdLst>
   <p:sldIdLst>
     <p:sldId id="256" r:id="rId2"/>
     <p:sldId id="257" r:id="rId3"/>
@@ -19,6 +16,9 @@
     <p:sldId id="264" r:id="rId10"/>
     <p:sldId id="265" r:id="rId11"/>
   </p:sldIdLst>
+  <p:notesMasterIdLst>
+    <p:notesMasterId r:id="rId12"/>
+  </p:notesMasterIdLst>
   <p:sldSz cx="12192000" cy="6858000"/>
   <p:notesSz cx="6858000" cy="12192000"/>
   <p:defaultTextStyle>
@@ -113,11 +113,6 @@
       </a:defRPr>
     </a:lvl9pPr>
   </p:defaultTextStyle>
-  <p:extLst>
-    <p:ext uri="{EFAFB233-063F-42B5-8137-9DF3F51BA10A}">
-      <p15:sldGuideLst xmlns:p15="http://schemas.microsoft.com/office/powerpoint/2012/main"/>
-    </p:ext>
-  </p:extLst>
 </p:presentation>
 </file>
 
@@ -143,10 +138,234 @@
           <a:chExt cx="0" cy="0"/>
         </a:xfrm>
       </p:grpSpPr>
+      <p:sp>
+        <p:nvSpPr>
+          <p:cNvPr id="2" name="Header Placeholder 1"/>
+          <p:cNvSpPr>
+            <a:spLocks noGrp="1"/>
+          </p:cNvSpPr>
+          <p:nvPr>
+            <p:ph type="hdr" sz="quarter"/>
+          </p:nvPr>
+        </p:nvSpPr>
+        <p:spPr>
+          <a:xfrm>
+            <a:off x="0" y="0"/>
+            <a:ext cx="2971800" cy="458788"/>
+          </a:xfrm>
+          <a:prstGeom prst="rect">
+            <a:avLst/>
+          </a:prstGeom>
+        </p:spPr>
+        <p:txBody>
+          <a:bodyPr vert="horz" lIns="91440" tIns="45720" rIns="91440" bIns="45720" rtlCol="0"/>
+          <a:lstStyle>
+            <a:lvl1pPr algn="l">
+              <a:defRPr sz="1200"/>
+            </a:lvl1pPr>
+          </a:lstStyle>
+          <a:p>
+            <a:endParaRPr lang="en-US"/>
+          </a:p>
+        </p:txBody>
+      </p:sp>
+      <p:sp>
+        <p:nvSpPr>
+          <p:cNvPr id="3" name="Date Placeholder 2"/>
+          <p:cNvSpPr>
+            <a:spLocks noGrp="1"/>
+          </p:cNvSpPr>
+          <p:nvPr>
+            <p:ph type="dt" idx="1"/>
+          </p:nvPr>
+        </p:nvSpPr>
+        <p:spPr>
+          <a:xfrm>
+            <a:off x="3884613" y="0"/>
+            <a:ext cx="2971800" cy="458788"/>
+          </a:xfrm>
+          <a:prstGeom prst="rect">
+            <a:avLst/>
+          </a:prstGeom>
+        </p:spPr>
+        <p:txBody>
+          <a:bodyPr vert="horz" lIns="91440" tIns="45720" rIns="91440" bIns="45720" rtlCol="0"/>
+          <a:lstStyle>
+            <a:lvl1pPr algn="r">
+              <a:defRPr sz="1200"/>
+            </a:lvl1pPr>
+          </a:lstStyle>
+          <a:p>
+            <a:fld id="{5282F153-3F37-0F45-9E97-73ACFA13230C}" type="datetimeFigureOut">
+              <a:rPr lang="en-US"/>
+              <a:t>7/23/19</a:t>
+            </a:fld>
+            <a:endParaRPr lang="en-US"/>
+          </a:p>
+        </p:txBody>
+      </p:sp>
+      <p:sp>
+        <p:nvSpPr>
+          <p:cNvPr id="4" name="Slide Image Placeholder 3"/>
+          <p:cNvSpPr>
+            <a:spLocks noGrp="1" noRot="1" noChangeAspect="1"/>
+          </p:cNvSpPr>
+          <p:nvPr>
+            <p:ph type="sldImg" idx="2"/>
+          </p:nvPr>
+        </p:nvSpPr>
+        <p:spPr>
+          <a:xfrm>
+            <a:off x="685800" y="1143000"/>
+            <a:ext cx="5486400" cy="3086100"/>
+          </a:xfrm>
+          <a:prstGeom prst="rect">
+            <a:avLst/>
+          </a:prstGeom>
+          <a:noFill/>
+          <a:ln w="12700">
+            <a:solidFill>
+              <a:prstClr val="black"/>
+            </a:solidFill>
+          </a:ln>
+        </p:spPr>
+        <p:txBody>
+          <a:bodyPr vert="horz" lIns="91440" tIns="45720" rIns="91440" bIns="45720" rtlCol="0" anchor="ctr"/>
+          <a:lstStyle/>
+          <a:p>
+            <a:endParaRPr lang="en-US"/>
+          </a:p>
+        </p:txBody>
+      </p:sp>
+      <p:sp>
+        <p:nvSpPr>
+          <p:cNvPr id="5" name="Notes Placeholder 4"/>
+          <p:cNvSpPr>
+            <a:spLocks noGrp="1"/>
+          </p:cNvSpPr>
+          <p:nvPr>
+            <p:ph type="body" sz="quarter" idx="3"/>
+          </p:nvPr>
+        </p:nvSpPr>
+        <p:spPr>
+          <a:xfrm>
+            <a:off x="685800" y="4400550"/>
+            <a:ext cx="5486400" cy="3600450"/>
+          </a:xfrm>
+          <a:prstGeom prst="rect">
+            <a:avLst/>
+          </a:prstGeom>
+        </p:spPr>
+        <p:txBody>
+          <a:bodyPr vert="horz" lIns="91440" tIns="45720" rIns="91440" bIns="45720" rtlCol="0"/>
+          <a:lstStyle/>
+          <a:p>
+            <a:pPr lvl="0"/>
+            <a:r>
+              <a:rPr lang="en-US"/>
+              <a:t>Click to edit Master text styles</a:t>
+            </a:r>
+          </a:p>
+          <a:p>
+            <a:pPr lvl="1"/>
+            <a:r>
+              <a:rPr lang="en-US"/>
+              <a:t>Second level</a:t>
+            </a:r>
+          </a:p>
+          <a:p>
+            <a:pPr lvl="2"/>
+            <a:r>
+              <a:rPr lang="en-US"/>
+              <a:t>Third level</a:t>
+            </a:r>
+          </a:p>
+          <a:p>
+            <a:pPr lvl="3"/>
+            <a:r>
+              <a:rPr lang="en-US"/>
+              <a:t>Fourth level</a:t>
+            </a:r>
+          </a:p>
+          <a:p>
+            <a:pPr lvl="4"/>
+            <a:r>
+              <a:rPr lang="en-US"/>
+              <a:t>Fifth level</a:t>
+            </a:r>
+          </a:p>
+        </p:txBody>
+      </p:sp>
+      <p:sp>
+        <p:nvSpPr>
+          <p:cNvPr id="6" name="Footer Placeholder 5"/>
+          <p:cNvSpPr>
+            <a:spLocks noGrp="1"/>
+          </p:cNvSpPr>
+          <p:nvPr>
+            <p:ph type="ftr" sz="quarter" idx="4"/>
+          </p:nvPr>
+        </p:nvSpPr>
+        <p:spPr>
+          <a:xfrm>
+            <a:off x="0" y="8685213"/>
+            <a:ext cx="2971800" cy="458787"/>
+          </a:xfrm>
+          <a:prstGeom prst="rect">
+            <a:avLst/>
+          </a:prstGeom>
+        </p:spPr>
+        <p:txBody>
+          <a:bodyPr vert="horz" lIns="91440" tIns="45720" rIns="91440" bIns="45720" rtlCol="0" anchor="b"/>
+          <a:lstStyle>
+            <a:lvl1pPr algn="l">
+              <a:defRPr sz="1200"/>
+            </a:lvl1pPr>
+          </a:lstStyle>
+          <a:p>
+            <a:endParaRPr lang="en-US"/>
+          </a:p>
+        </p:txBody>
+      </p:sp>
+      <p:sp>
+        <p:nvSpPr>
+          <p:cNvPr id="7" name="Slide Number Placeholder 6"/>
+          <p:cNvSpPr>
+            <a:spLocks noGrp="1"/>
+          </p:cNvSpPr>
+          <p:nvPr>
+            <p:ph type="sldNum" sz="quarter" idx="5"/>
+          </p:nvPr>
+        </p:nvSpPr>
+        <p:spPr>
+          <a:xfrm>
+            <a:off x="3884613" y="8685213"/>
+            <a:ext cx="2971800" cy="458787"/>
+          </a:xfrm>
+          <a:prstGeom prst="rect">
+            <a:avLst/>
+          </a:prstGeom>
+        </p:spPr>
+        <p:txBody>
+          <a:bodyPr vert="horz" lIns="91440" tIns="45720" rIns="91440" bIns="45720" rtlCol="0" anchor="b"/>
+          <a:lstStyle>
+            <a:lvl1pPr algn="r">
+              <a:defRPr sz="1200"/>
+            </a:lvl1pPr>
+          </a:lstStyle>
+          <a:p>
+            <a:fld id="{CE5E9CC1-C706-0F49-92D6-E571CC5EEA8F}" type="slidenum">
+              <a:rPr lang="en-US"/>
+              <a:t>‹#›</a:t>
+            </a:fld>
+            <a:endParaRPr lang="en-US"/>
+          </a:p>
+        </p:txBody>
+      </p:sp>
     </p:spTree>
     <p:extLst>
       <p:ext uri="{BB962C8B-B14F-4D97-AF65-F5344CB8AC3E}">
-        <p14:creationId xmlns:p14="http://schemas.microsoft.com/office/powerpoint/2010/main" val="2384270941"/>
+        <p14:creationId xmlns:p14="http://schemas.microsoft.com/office/powerpoint/2010/main" val="1024086991"/>
       </p:ext>
     </p:extLst>
   </p:cSld>
@@ -290,6 +509,10 @@
           <a:bodyPr/>
           <a:lstStyle/>
           <a:p>
+            <a:r>
+              <a:rPr lang="en-US" dirty="0"/>
+              <a:t/>
+            </a:r>
             <a:endParaRPr lang="en-US" dirty="0"/>
           </a:p>
         </p:txBody>
@@ -374,6 +597,10 @@
           <a:bodyPr/>
           <a:lstStyle/>
           <a:p>
+            <a:r>
+              <a:rPr lang="en-US" dirty="0"/>
+              <a:t/>
+            </a:r>
             <a:endParaRPr lang="en-US" dirty="0"/>
           </a:p>
         </p:txBody>
@@ -458,6 +685,10 @@
           <a:bodyPr/>
           <a:lstStyle/>
           <a:p>
+            <a:r>
+              <a:rPr lang="en-US" dirty="0"/>
+              <a:t/>
+            </a:r>
             <a:endParaRPr lang="en-US" dirty="0"/>
           </a:p>
         </p:txBody>
@@ -542,6 +773,10 @@
           <a:bodyPr/>
           <a:lstStyle/>
           <a:p>
+            <a:r>
+              <a:rPr lang="en-US" dirty="0"/>
+              <a:t/>
+            </a:r>
             <a:endParaRPr lang="en-US" dirty="0"/>
           </a:p>
         </p:txBody>
@@ -626,6 +861,10 @@
           <a:bodyPr/>
           <a:lstStyle/>
           <a:p>
+            <a:r>
+              <a:rPr lang="en-US" dirty="0"/>
+              <a:t/>
+            </a:r>
             <a:endParaRPr lang="en-US" dirty="0"/>
           </a:p>
         </p:txBody>
@@ -710,6 +949,10 @@
           <a:bodyPr/>
           <a:lstStyle/>
           <a:p>
+            <a:r>
+              <a:rPr lang="en-US" dirty="0"/>
+              <a:t/>
+            </a:r>
             <a:endParaRPr lang="en-US" dirty="0"/>
           </a:p>
         </p:txBody>
@@ -794,6 +1037,10 @@
           <a:bodyPr/>
           <a:lstStyle/>
           <a:p>
+            <a:r>
+              <a:rPr lang="en-US" dirty="0"/>
+              <a:t/>
+            </a:r>
             <a:endParaRPr lang="en-US" dirty="0"/>
           </a:p>
         </p:txBody>
@@ -878,6 +1125,10 @@
           <a:bodyPr/>
           <a:lstStyle/>
           <a:p>
+            <a:r>
+              <a:rPr lang="en-US" dirty="0"/>
+              <a:t/>
+            </a:r>
             <a:endParaRPr lang="en-US" dirty="0"/>
           </a:p>
         </p:txBody>
@@ -962,6 +1213,10 @@
           <a:bodyPr/>
           <a:lstStyle/>
           <a:p>
+            <a:r>
+              <a:rPr lang="en-US" dirty="0"/>
+              <a:t/>
+            </a:r>
             <a:endParaRPr lang="en-US" dirty="0"/>
           </a:p>
         </p:txBody>
@@ -1046,6 +1301,10 @@
           <a:bodyPr/>
           <a:lstStyle/>
           <a:p>
+            <a:r>
+              <a:rPr lang="en-US" dirty="0"/>
+              <a:t/>
+            </a:r>
             <a:endParaRPr lang="en-US" dirty="0"/>
           </a:p>
         </p:txBody>
@@ -1119,11 +1378,6 @@
 <file path=ppt/slideMasters/slideMaster1.xml><?xml version="1.0" encoding="utf-8"?>
 <p:sldMaster xmlns:a="http://schemas.openxmlformats.org/drawingml/2006/main" xmlns:r="http://schemas.openxmlformats.org/officeDocument/2006/relationships" xmlns:p="http://schemas.openxmlformats.org/presentationml/2006/main">
   <p:cSld>
-    <p:bg>
-      <p:bgRef idx="1001">
-        <a:schemeClr val="bg1"/>
-      </p:bgRef>
-    </p:bg>
     <p:spTree>
       <p:nvGrpSpPr>
         <p:cNvPr id="1" name=""/>
@@ -1406,7 +1660,6 @@
         <a:solidFill>
           <a:srgbClr val="0B1020"/>
         </a:solidFill>
-        <a:effectLst/>
       </p:bgPr>
     </p:bg>
     <p:spTree>
@@ -1442,24 +1695,17 @@
           </a:solidFill>
           <a:ln/>
         </p:spPr>
-        <p:txBody>
-          <a:bodyPr/>
-          <a:lstStyle/>
-          <a:p>
-            <a:endParaRPr lang="en-SG"/>
-          </a:p>
-        </p:txBody>
       </p:sp>
       <p:pic>
         <p:nvPicPr>
-          <p:cNvPr id="3" name="Image 0" descr="./icons/shield-indigo.png"/>
+          <p:cNvPr id="3" name="Image 0" descr="./icons/shield-indigo.png">    </p:cNvPr>
           <p:cNvPicPr>
             <a:picLocks noChangeAspect="1"/>
           </p:cNvPicPr>
           <p:nvPr/>
         </p:nvPicPr>
         <p:blipFill>
-          <a:blip r:embed="rId3"/>
+          <a:blip r:embed="rId1"/>
           <a:stretch>
             <a:fillRect/>
           </a:stretch>
@@ -1495,11 +1741,11 @@
           <a:bodyPr wrap="square" lIns="0" tIns="0" rIns="0" bIns="0" rtlCol="0" anchor="ctr"/>
           <a:lstStyle/>
           <a:p>
-            <a:pPr marL="0" indent="0" algn="ctr">
-              <a:buNone/>
-            </a:pPr>
-            <a:r>
-              <a:rPr lang="en-US" sz="5400" b="1" kern="0" spc="200" dirty="0">
+            <a:pPr algn="ctr" indent="0" marL="0">
+              <a:buNone/>
+            </a:pPr>
+            <a:r>
+              <a:rPr lang="en-US" sz="5400" b="1" spc="200" kern="0" dirty="0">
                 <a:solidFill>
                   <a:srgbClr val="EEF2FF"/>
                 </a:solidFill>
@@ -1534,7 +1780,7 @@
           <a:bodyPr wrap="square" lIns="0" tIns="0" rIns="0" bIns="0" rtlCol="0" anchor="ctr"/>
           <a:lstStyle/>
           <a:p>
-            <a:pPr marL="0" indent="0" algn="ctr">
+            <a:pPr algn="ctr" indent="0" marL="0">
               <a:buNone/>
             </a:pPr>
             <a:r>
@@ -1548,6 +1794,9 @@
               </a:rPr>
               <a:t>One truth: </a:t>
             </a:r>
+            <a:pPr algn="ctr" indent="0" marL="0">
+              <a:buNone/>
+            </a:pPr>
             <a:r>
               <a:rPr lang="en-US" sz="2200" b="1" dirty="0">
                 <a:solidFill>
@@ -1559,6 +1808,9 @@
               </a:rPr>
               <a:t>your teacher's material</a:t>
             </a:r>
+            <a:pPr algn="ctr" indent="0" marL="0">
+              <a:buNone/>
+            </a:pPr>
             <a:r>
               <a:rPr lang="en-US" sz="2200" dirty="0">
                 <a:solidFill>
@@ -1570,6 +1822,9 @@
               </a:rPr>
               <a:t>, in </a:t>
             </a:r>
+            <a:pPr algn="ctr" indent="0" marL="0">
+              <a:buNone/>
+            </a:pPr>
             <a:r>
               <a:rPr lang="en-US" sz="2200" b="1" dirty="0">
                 <a:solidFill>
@@ -1581,6 +1836,9 @@
               </a:rPr>
               <a:t>every student's language</a:t>
             </a:r>
+            <a:pPr algn="ctr" indent="0" marL="0">
+              <a:buNone/>
+            </a:pPr>
             <a:r>
               <a:rPr lang="en-US" sz="2200" dirty="0">
                 <a:solidFill>
@@ -1617,7 +1875,7 @@
           <a:bodyPr wrap="square" lIns="0" tIns="0" rIns="0" bIns="0" rtlCol="0" anchor="ctr"/>
           <a:lstStyle/>
           <a:p>
-            <a:pPr marL="0" indent="0" algn="ctr">
+            <a:pPr algn="ctr" indent="0" marL="0">
               <a:buNone/>
             </a:pPr>
             <a:r>
@@ -1656,7 +1914,7 @@
           <a:bodyPr wrap="square" lIns="0" tIns="0" rIns="0" bIns="0" rtlCol="0" anchor="ctr"/>
           <a:lstStyle/>
           <a:p>
-            <a:pPr marL="0" indent="0" algn="ctr">
+            <a:pPr algn="ctr" indent="0" marL="0">
               <a:buNone/>
             </a:pPr>
             <a:r>
@@ -1668,11 +1926,28 @@
                 <a:ea typeface="Calibri" pitchFamily="34" charset="-122"/>
                 <a:cs typeface="Calibri" pitchFamily="34" charset="-120"/>
               </a:rPr>
-              <a:t>Claude Code Hackathon 2026   •   </a:t>
-            </a:r>
+              <a:t>Claude Code Hackathon 2026</a:t>
+            </a:r>
+            <a:pPr algn="ctr" indent="0" marL="0">
+              <a:buNone/>
+            </a:pPr>
             <a:r>
               <a:rPr lang="en-US" sz="1200" dirty="0">
                 <a:solidFill>
+                  <a:srgbClr val="9AA6C4"/>
+                </a:solidFill>
+                <a:latin typeface="Calibri" pitchFamily="34" charset="0"/>
+                <a:ea typeface="Calibri" pitchFamily="34" charset="-122"/>
+                <a:cs typeface="Calibri" pitchFamily="34" charset="-120"/>
+              </a:rPr>
+              <a:t>   •   </a:t>
+            </a:r>
+            <a:pPr algn="ctr" indent="0" marL="0">
+              <a:buNone/>
+            </a:pPr>
+            <a:r>
+              <a:rPr lang="en-US" sz="1200" dirty="0">
+                <a:solidFill>
                   <a:srgbClr val="22D3EE"/>
                 </a:solidFill>
                 <a:latin typeface="Calibri" pitchFamily="34" charset="0"/>
@@ -1681,6 +1956,9 @@
               </a:rPr>
               <a:t>esltech.vercel.app</a:t>
             </a:r>
+            <a:pPr algn="ctr" indent="0" marL="0">
+              <a:buNone/>
+            </a:pPr>
             <a:r>
               <a:rPr lang="en-US" sz="1200" dirty="0">
                 <a:solidFill>
@@ -1692,6 +1970,9 @@
               </a:rPr>
               <a:t>   •   </a:t>
             </a:r>
+            <a:pPr algn="ctr" indent="0" marL="0">
+              <a:buNone/>
+            </a:pPr>
             <a:r>
               <a:rPr lang="en-US" sz="1200" dirty="0">
                 <a:solidFill>
@@ -1723,7 +2004,6 @@
         <a:solidFill>
           <a:srgbClr val="0B1020"/>
         </a:solidFill>
-        <a:effectLst/>
       </p:bgPr>
     </p:bg>
     <p:spTree>
@@ -1759,24 +2039,17 @@
           </a:solidFill>
           <a:ln/>
         </p:spPr>
-        <p:txBody>
-          <a:bodyPr/>
-          <a:lstStyle/>
-          <a:p>
-            <a:endParaRPr lang="en-SG"/>
-          </a:p>
-        </p:txBody>
       </p:sp>
       <p:pic>
         <p:nvPicPr>
-          <p:cNvPr id="3" name="Image 0" descr="./icons/award-pink.png"/>
+          <p:cNvPr id="3" name="Image 0" descr="./icons/award-pink.png">    </p:cNvPr>
           <p:cNvPicPr>
             <a:picLocks noChangeAspect="1"/>
           </p:cNvPicPr>
           <p:nvPr/>
         </p:nvPicPr>
         <p:blipFill>
-          <a:blip r:embed="rId3"/>
+          <a:blip r:embed="rId1"/>
           <a:stretch>
             <a:fillRect/>
           </a:stretch>
@@ -1812,7 +2085,7 @@
           <a:bodyPr wrap="square" lIns="0" tIns="0" rIns="0" bIns="0" rtlCol="0" anchor="ctr"/>
           <a:lstStyle/>
           <a:p>
-            <a:pPr marL="0" indent="0" algn="ctr">
+            <a:pPr algn="ctr" indent="0" marL="0">
               <a:lnSpc>
                 <a:spcPct val="115000"/>
               </a:lnSpc>
@@ -1832,7 +2105,7 @@
             <a:endParaRPr lang="en-US" sz="3600" dirty="0"/>
           </a:p>
           <a:p>
-            <a:pPr marL="0" indent="0" algn="ctr">
+            <a:pPr algn="ctr" indent="0" marL="0">
               <a:lnSpc>
                 <a:spcPct val="115000"/>
               </a:lnSpc>
@@ -1874,7 +2147,7 @@
           <a:bodyPr wrap="square" lIns="0" tIns="0" rIns="0" bIns="0" rtlCol="0" anchor="ctr"/>
           <a:lstStyle/>
           <a:p>
-            <a:pPr marL="0" indent="0" algn="ctr">
+            <a:pPr algn="ctr" indent="0" marL="0">
               <a:buNone/>
             </a:pPr>
             <a:r>
@@ -1913,7 +2186,7 @@
           <a:bodyPr wrap="square" lIns="0" tIns="0" rIns="0" bIns="0" rtlCol="0" anchor="ctr"/>
           <a:lstStyle/>
           <a:p>
-            <a:pPr marL="0" indent="0" algn="ctr">
+            <a:pPr algn="ctr" indent="0" marL="0">
               <a:buNone/>
             </a:pPr>
             <a:r>
@@ -1927,6 +2200,9 @@
               </a:rPr>
               <a:t>Live demo:  </a:t>
             </a:r>
+            <a:pPr algn="ctr" indent="0" marL="0">
+              <a:buNone/>
+            </a:pPr>
             <a:r>
               <a:rPr lang="en-US" sz="1500" b="1" dirty="0">
                 <a:solidFill>
@@ -1963,7 +2239,7 @@
           <a:bodyPr wrap="square" lIns="0" tIns="0" rIns="0" bIns="0" rtlCol="0" anchor="ctr"/>
           <a:lstStyle/>
           <a:p>
-            <a:pPr marL="0" indent="0" algn="ctr">
+            <a:pPr algn="ctr" indent="0" marL="0">
               <a:buNone/>
             </a:pPr>
             <a:r>
@@ -1977,6 +2253,9 @@
               </a:rPr>
               <a:t>GitHub:  </a:t>
             </a:r>
+            <a:pPr algn="ctr" indent="0" marL="0">
+              <a:buNone/>
+            </a:pPr>
             <a:r>
               <a:rPr lang="en-US" sz="1500" b="1" dirty="0">
                 <a:solidFill>
@@ -2013,7 +2292,7 @@
           <a:bodyPr wrap="square" lIns="0" tIns="0" rIns="0" bIns="0" rtlCol="0" anchor="ctr"/>
           <a:lstStyle/>
           <a:p>
-            <a:pPr marL="0" indent="0" algn="ctr">
+            <a:pPr algn="ctr" indent="0" marL="0">
               <a:buNone/>
             </a:pPr>
             <a:r>
@@ -2047,7 +2326,6 @@
         <a:solidFill>
           <a:srgbClr val="0B1020"/>
         </a:solidFill>
-        <a:effectLst/>
       </p:bgPr>
     </p:bg>
     <p:spTree>
@@ -2085,11 +2363,11 @@
           <a:bodyPr wrap="square" lIns="0" tIns="0" rIns="0" bIns="0" rtlCol="0" anchor="ctr"/>
           <a:lstStyle/>
           <a:p>
-            <a:pPr marL="0" indent="0" algn="l">
-              <a:buNone/>
-            </a:pPr>
-            <a:r>
-              <a:rPr lang="en-US" sz="1300" b="1" kern="0" spc="200" dirty="0">
+            <a:pPr algn="l" indent="0" marL="0">
+              <a:buNone/>
+            </a:pPr>
+            <a:r>
+              <a:rPr lang="en-US" sz="1300" b="1" spc="200" kern="0" dirty="0">
                 <a:solidFill>
                   <a:srgbClr val="22D3EE"/>
                 </a:solidFill>
@@ -2124,7 +2402,7 @@
           <a:bodyPr wrap="square" lIns="0" tIns="0" rIns="0" bIns="0" rtlCol="0" anchor="ctr"/>
           <a:lstStyle/>
           <a:p>
-            <a:pPr marL="0" indent="0">
+            <a:pPr indent="0" marL="0">
               <a:buNone/>
             </a:pPr>
             <a:r>
@@ -2161,17 +2439,260 @@
           </a:solidFill>
           <a:ln/>
         </p:spPr>
-        <p:txBody>
-          <a:bodyPr/>
-          <a:lstStyle/>
-          <a:p>
-            <a:endParaRPr lang="en-SG"/>
-          </a:p>
-        </p:txBody>
       </p:sp>
       <p:pic>
         <p:nvPicPr>
-          <p:cNvPr id="5" name="Image 0" descr="./icons/userx-cyan.png"/>
+          <p:cNvPr id="5" name="Image 0" descr="./icons/userx-cyan.png">    </p:cNvPr>
+          <p:cNvPicPr>
+            <a:picLocks noChangeAspect="1"/>
+          </p:cNvPicPr>
+          <p:nvPr/>
+        </p:nvPicPr>
+        <p:blipFill>
+          <a:blip r:embed="rId1"/>
+          <a:stretch>
+            <a:fillRect/>
+          </a:stretch>
+        </p:blipFill>
+        <p:spPr>
+          <a:xfrm>
+            <a:off x="741121" y="2021281"/>
+            <a:ext cx="575158" cy="575158"/>
+          </a:xfrm>
+          <a:prstGeom prst="rect">
+            <a:avLst/>
+          </a:prstGeom>
+        </p:spPr>
+      </p:pic>
+      <p:sp>
+        <p:nvSpPr>
+          <p:cNvPr id="6" name="Text 3"/>
+          <p:cNvSpPr/>
+          <p:nvPr/>
+        </p:nvSpPr>
+        <p:spPr>
+          <a:xfrm>
+            <a:off x="1691640" y="1901952"/>
+            <a:ext cx="3840480" cy="365760"/>
+          </a:xfrm>
+          <a:prstGeom prst="rect">
+            <a:avLst/>
+          </a:prstGeom>
+          <a:noFill/>
+          <a:ln/>
+        </p:spPr>
+        <p:txBody>
+          <a:bodyPr wrap="square" lIns="0" tIns="0" rIns="0" bIns="0" rtlCol="0" anchor="ctr"/>
+          <a:lstStyle/>
+          <a:p>
+            <a:pPr indent="0" marL="0">
+              <a:buNone/>
+            </a:pPr>
+            <a:r>
+              <a:rPr lang="en-US" sz="1800" b="1" dirty="0">
+                <a:solidFill>
+                  <a:srgbClr val="EEF2FF"/>
+                </a:solidFill>
+                <a:latin typeface="Calibri" pitchFamily="34" charset="0"/>
+                <a:ea typeface="Calibri" pitchFamily="34" charset="-122"/>
+                <a:cs typeface="Calibri" pitchFamily="34" charset="-120"/>
+              </a:rPr>
+              <a:t>Students</a:t>
+            </a:r>
+            <a:endParaRPr lang="en-US" sz="1800" dirty="0"/>
+          </a:p>
+        </p:txBody>
+      </p:sp>
+      <p:sp>
+        <p:nvSpPr>
+          <p:cNvPr id="7" name="Text 4"/>
+          <p:cNvSpPr/>
+          <p:nvPr/>
+        </p:nvSpPr>
+        <p:spPr>
+          <a:xfrm>
+            <a:off x="1691640" y="2267712"/>
+            <a:ext cx="9875520" cy="822960"/>
+          </a:xfrm>
+          <a:prstGeom prst="rect">
+            <a:avLst/>
+          </a:prstGeom>
+          <a:noFill/>
+          <a:ln/>
+        </p:spPr>
+        <p:txBody>
+          <a:bodyPr wrap="square" lIns="0" tIns="0" rIns="0" bIns="0" rtlCol="0" anchor="ctr"/>
+          <a:lstStyle/>
+          <a:p>
+            <a:pPr indent="0" marL="0">
+              <a:lnSpc>
+                <a:spcPct val="115000"/>
+              </a:lnSpc>
+              <a:buNone/>
+            </a:pPr>
+            <a:r>
+              <a:rPr lang="en-US" sz="1400" dirty="0">
+                <a:solidFill>
+                  <a:srgbClr val="9AA6C4"/>
+                </a:solidFill>
+                <a:latin typeface="Calibri" pitchFamily="34" charset="0"/>
+                <a:ea typeface="Calibri" pitchFamily="34" charset="-122"/>
+                <a:cs typeface="Calibri" pitchFamily="34" charset="-120"/>
+              </a:rPr>
+              <a:t>Generic AI either does the homework for them or answers in unpredictable English pulled from the open internet — sometimes contradicting exactly what the syllabus teaches.</a:t>
+            </a:r>
+            <a:endParaRPr lang="en-US" sz="1400" dirty="0"/>
+          </a:p>
+        </p:txBody>
+      </p:sp>
+      <p:sp>
+        <p:nvSpPr>
+          <p:cNvPr id="8" name="Shape 5"/>
+          <p:cNvSpPr/>
+          <p:nvPr/>
+        </p:nvSpPr>
+        <p:spPr>
+          <a:xfrm>
+            <a:off x="640080" y="3429000"/>
+            <a:ext cx="777240" cy="777240"/>
+          </a:xfrm>
+          <a:prstGeom prst="ellipse">
+            <a:avLst/>
+          </a:prstGeom>
+          <a:solidFill>
+            <a:srgbClr val="161D3F"/>
+          </a:solidFill>
+          <a:ln/>
+        </p:spPr>
+      </p:sp>
+      <p:pic>
+        <p:nvPicPr>
+          <p:cNvPr id="9" name="Image 1" descr="./icons/eyeoff-cyan.png">    </p:cNvPr>
+          <p:cNvPicPr>
+            <a:picLocks noChangeAspect="1"/>
+          </p:cNvPicPr>
+          <p:nvPr/>
+        </p:nvPicPr>
+        <p:blipFill>
+          <a:blip r:embed="rId2"/>
+          <a:stretch>
+            <a:fillRect/>
+          </a:stretch>
+        </p:blipFill>
+        <p:spPr>
+          <a:xfrm>
+            <a:off x="741121" y="3530041"/>
+            <a:ext cx="575158" cy="575158"/>
+          </a:xfrm>
+          <a:prstGeom prst="rect">
+            <a:avLst/>
+          </a:prstGeom>
+        </p:spPr>
+      </p:pic>
+      <p:sp>
+        <p:nvSpPr>
+          <p:cNvPr id="10" name="Text 6"/>
+          <p:cNvSpPr/>
+          <p:nvPr/>
+        </p:nvSpPr>
+        <p:spPr>
+          <a:xfrm>
+            <a:off x="1691640" y="3410712"/>
+            <a:ext cx="3840480" cy="365760"/>
+          </a:xfrm>
+          <a:prstGeom prst="rect">
+            <a:avLst/>
+          </a:prstGeom>
+          <a:noFill/>
+          <a:ln/>
+        </p:spPr>
+        <p:txBody>
+          <a:bodyPr wrap="square" lIns="0" tIns="0" rIns="0" bIns="0" rtlCol="0" anchor="ctr"/>
+          <a:lstStyle/>
+          <a:p>
+            <a:pPr indent="0" marL="0">
+              <a:buNone/>
+            </a:pPr>
+            <a:r>
+              <a:rPr lang="en-US" sz="1800" b="1" dirty="0">
+                <a:solidFill>
+                  <a:srgbClr val="EEF2FF"/>
+                </a:solidFill>
+                <a:latin typeface="Calibri" pitchFamily="34" charset="0"/>
+                <a:ea typeface="Calibri" pitchFamily="34" charset="-122"/>
+                <a:cs typeface="Calibri" pitchFamily="34" charset="-120"/>
+              </a:rPr>
+              <a:t>Teachers</a:t>
+            </a:r>
+            <a:endParaRPr lang="en-US" sz="1800" dirty="0"/>
+          </a:p>
+        </p:txBody>
+      </p:sp>
+      <p:sp>
+        <p:nvSpPr>
+          <p:cNvPr id="11" name="Text 7"/>
+          <p:cNvSpPr/>
+          <p:nvPr/>
+        </p:nvSpPr>
+        <p:spPr>
+          <a:xfrm>
+            <a:off x="1691640" y="3776472"/>
+            <a:ext cx="9875520" cy="822960"/>
+          </a:xfrm>
+          <a:prstGeom prst="rect">
+            <a:avLst/>
+          </a:prstGeom>
+          <a:noFill/>
+          <a:ln/>
+        </p:spPr>
+        <p:txBody>
+          <a:bodyPr wrap="square" lIns="0" tIns="0" rIns="0" bIns="0" rtlCol="0" anchor="ctr"/>
+          <a:lstStyle/>
+          <a:p>
+            <a:pPr indent="0" marL="0">
+              <a:lnSpc>
+                <a:spcPct val="115000"/>
+              </a:lnSpc>
+              <a:buNone/>
+            </a:pPr>
+            <a:r>
+              <a:rPr lang="en-US" sz="1400" dirty="0">
+                <a:solidFill>
+                  <a:srgbClr val="9AA6C4"/>
+                </a:solidFill>
+                <a:latin typeface="Calibri" pitchFamily="34" charset="0"/>
+                <a:ea typeface="Calibri" pitchFamily="34" charset="-122"/>
+                <a:cs typeface="Calibri" pitchFamily="34" charset="-120"/>
+              </a:rPr>
+              <a:t>AI use today is a binary: ban it and lose the benefit, or allow it and lose all visibility into whether students are actually learning or just copy-pasting.</a:t>
+            </a:r>
+            <a:endParaRPr lang="en-US" sz="1400" dirty="0"/>
+          </a:p>
+        </p:txBody>
+      </p:sp>
+      <p:sp>
+        <p:nvSpPr>
+          <p:cNvPr id="12" name="Shape 8"/>
+          <p:cNvSpPr/>
+          <p:nvPr/>
+        </p:nvSpPr>
+        <p:spPr>
+          <a:xfrm>
+            <a:off x="640080" y="4937760"/>
+            <a:ext cx="777240" cy="777240"/>
+          </a:xfrm>
+          <a:prstGeom prst="ellipse">
+            <a:avLst/>
+          </a:prstGeom>
+          <a:solidFill>
+            <a:srgbClr val="161D3F"/>
+          </a:solidFill>
+          <a:ln/>
+        </p:spPr>
+      </p:sp>
+      <p:pic>
+        <p:nvPicPr>
+          <p:cNvPr id="13" name="Image 2" descr="./icons/alert-cyan.png">    </p:cNvPr>
           <p:cNvPicPr>
             <a:picLocks noChangeAspect="1"/>
           </p:cNvPicPr>
@@ -2185,270 +2706,6 @@
         </p:blipFill>
         <p:spPr>
           <a:xfrm>
-            <a:off x="741121" y="2021281"/>
-            <a:ext cx="575158" cy="575158"/>
-          </a:xfrm>
-          <a:prstGeom prst="rect">
-            <a:avLst/>
-          </a:prstGeom>
-        </p:spPr>
-      </p:pic>
-      <p:sp>
-        <p:nvSpPr>
-          <p:cNvPr id="6" name="Text 3"/>
-          <p:cNvSpPr/>
-          <p:nvPr/>
-        </p:nvSpPr>
-        <p:spPr>
-          <a:xfrm>
-            <a:off x="1691640" y="1901952"/>
-            <a:ext cx="3840480" cy="365760"/>
-          </a:xfrm>
-          <a:prstGeom prst="rect">
-            <a:avLst/>
-          </a:prstGeom>
-          <a:noFill/>
-          <a:ln/>
-        </p:spPr>
-        <p:txBody>
-          <a:bodyPr wrap="square" lIns="0" tIns="0" rIns="0" bIns="0" rtlCol="0" anchor="ctr"/>
-          <a:lstStyle/>
-          <a:p>
-            <a:pPr marL="0" indent="0">
-              <a:buNone/>
-            </a:pPr>
-            <a:r>
-              <a:rPr lang="en-US" sz="1800" b="1" dirty="0">
-                <a:solidFill>
-                  <a:srgbClr val="EEF2FF"/>
-                </a:solidFill>
-                <a:latin typeface="Calibri" pitchFamily="34" charset="0"/>
-                <a:ea typeface="Calibri" pitchFamily="34" charset="-122"/>
-                <a:cs typeface="Calibri" pitchFamily="34" charset="-120"/>
-              </a:rPr>
-              <a:t>Students</a:t>
-            </a:r>
-            <a:endParaRPr lang="en-US" sz="1800" dirty="0"/>
-          </a:p>
-        </p:txBody>
-      </p:sp>
-      <p:sp>
-        <p:nvSpPr>
-          <p:cNvPr id="7" name="Text 4"/>
-          <p:cNvSpPr/>
-          <p:nvPr/>
-        </p:nvSpPr>
-        <p:spPr>
-          <a:xfrm>
-            <a:off x="1691640" y="2267712"/>
-            <a:ext cx="9875520" cy="822960"/>
-          </a:xfrm>
-          <a:prstGeom prst="rect">
-            <a:avLst/>
-          </a:prstGeom>
-          <a:noFill/>
-          <a:ln/>
-        </p:spPr>
-        <p:txBody>
-          <a:bodyPr wrap="square" lIns="0" tIns="0" rIns="0" bIns="0" rtlCol="0" anchor="ctr"/>
-          <a:lstStyle/>
-          <a:p>
-            <a:pPr marL="0" indent="0">
-              <a:lnSpc>
-                <a:spcPct val="115000"/>
-              </a:lnSpc>
-              <a:buNone/>
-            </a:pPr>
-            <a:r>
-              <a:rPr lang="en-US" sz="1400" dirty="0">
-                <a:solidFill>
-                  <a:srgbClr val="9AA6C4"/>
-                </a:solidFill>
-                <a:latin typeface="Calibri" pitchFamily="34" charset="0"/>
-                <a:ea typeface="Calibri" pitchFamily="34" charset="-122"/>
-                <a:cs typeface="Calibri" pitchFamily="34" charset="-120"/>
-              </a:rPr>
-              <a:t>Generic AI either does the homework for them or answers in unpredictable English pulled from the open internet — sometimes contradicting exactly what the syllabus teaches.</a:t>
-            </a:r>
-            <a:endParaRPr lang="en-US" sz="1400" dirty="0"/>
-          </a:p>
-        </p:txBody>
-      </p:sp>
-      <p:sp>
-        <p:nvSpPr>
-          <p:cNvPr id="8" name="Shape 5"/>
-          <p:cNvSpPr/>
-          <p:nvPr/>
-        </p:nvSpPr>
-        <p:spPr>
-          <a:xfrm>
-            <a:off x="640080" y="3429000"/>
-            <a:ext cx="777240" cy="777240"/>
-          </a:xfrm>
-          <a:prstGeom prst="ellipse">
-            <a:avLst/>
-          </a:prstGeom>
-          <a:solidFill>
-            <a:srgbClr val="161D3F"/>
-          </a:solidFill>
-          <a:ln/>
-        </p:spPr>
-        <p:txBody>
-          <a:bodyPr/>
-          <a:lstStyle/>
-          <a:p>
-            <a:endParaRPr lang="en-SG"/>
-          </a:p>
-        </p:txBody>
-      </p:sp>
-      <p:pic>
-        <p:nvPicPr>
-          <p:cNvPr id="9" name="Image 1" descr="./icons/eyeoff-cyan.png"/>
-          <p:cNvPicPr>
-            <a:picLocks noChangeAspect="1"/>
-          </p:cNvPicPr>
-          <p:nvPr/>
-        </p:nvPicPr>
-        <p:blipFill>
-          <a:blip r:embed="rId4"/>
-          <a:stretch>
-            <a:fillRect/>
-          </a:stretch>
-        </p:blipFill>
-        <p:spPr>
-          <a:xfrm>
-            <a:off x="741121" y="3530041"/>
-            <a:ext cx="575158" cy="575158"/>
-          </a:xfrm>
-          <a:prstGeom prst="rect">
-            <a:avLst/>
-          </a:prstGeom>
-        </p:spPr>
-      </p:pic>
-      <p:sp>
-        <p:nvSpPr>
-          <p:cNvPr id="10" name="Text 6"/>
-          <p:cNvSpPr/>
-          <p:nvPr/>
-        </p:nvSpPr>
-        <p:spPr>
-          <a:xfrm>
-            <a:off x="1691640" y="3410712"/>
-            <a:ext cx="3840480" cy="365760"/>
-          </a:xfrm>
-          <a:prstGeom prst="rect">
-            <a:avLst/>
-          </a:prstGeom>
-          <a:noFill/>
-          <a:ln/>
-        </p:spPr>
-        <p:txBody>
-          <a:bodyPr wrap="square" lIns="0" tIns="0" rIns="0" bIns="0" rtlCol="0" anchor="ctr"/>
-          <a:lstStyle/>
-          <a:p>
-            <a:pPr marL="0" indent="0">
-              <a:buNone/>
-            </a:pPr>
-            <a:r>
-              <a:rPr lang="en-US" sz="1800" b="1" dirty="0">
-                <a:solidFill>
-                  <a:srgbClr val="EEF2FF"/>
-                </a:solidFill>
-                <a:latin typeface="Calibri" pitchFamily="34" charset="0"/>
-                <a:ea typeface="Calibri" pitchFamily="34" charset="-122"/>
-                <a:cs typeface="Calibri" pitchFamily="34" charset="-120"/>
-              </a:rPr>
-              <a:t>Teachers</a:t>
-            </a:r>
-            <a:endParaRPr lang="en-US" sz="1800" dirty="0"/>
-          </a:p>
-        </p:txBody>
-      </p:sp>
-      <p:sp>
-        <p:nvSpPr>
-          <p:cNvPr id="11" name="Text 7"/>
-          <p:cNvSpPr/>
-          <p:nvPr/>
-        </p:nvSpPr>
-        <p:spPr>
-          <a:xfrm>
-            <a:off x="1691640" y="3776472"/>
-            <a:ext cx="9875520" cy="822960"/>
-          </a:xfrm>
-          <a:prstGeom prst="rect">
-            <a:avLst/>
-          </a:prstGeom>
-          <a:noFill/>
-          <a:ln/>
-        </p:spPr>
-        <p:txBody>
-          <a:bodyPr wrap="square" lIns="0" tIns="0" rIns="0" bIns="0" rtlCol="0" anchor="ctr"/>
-          <a:lstStyle/>
-          <a:p>
-            <a:pPr marL="0" indent="0">
-              <a:lnSpc>
-                <a:spcPct val="115000"/>
-              </a:lnSpc>
-              <a:buNone/>
-            </a:pPr>
-            <a:r>
-              <a:rPr lang="en-US" sz="1400" dirty="0">
-                <a:solidFill>
-                  <a:srgbClr val="9AA6C4"/>
-                </a:solidFill>
-                <a:latin typeface="Calibri" pitchFamily="34" charset="0"/>
-                <a:ea typeface="Calibri" pitchFamily="34" charset="-122"/>
-                <a:cs typeface="Calibri" pitchFamily="34" charset="-120"/>
-              </a:rPr>
-              <a:t>AI use today is a binary: ban it and lose the benefit, or allow it and lose all visibility into whether students are actually learning or just copy-pasting.</a:t>
-            </a:r>
-            <a:endParaRPr lang="en-US" sz="1400" dirty="0"/>
-          </a:p>
-        </p:txBody>
-      </p:sp>
-      <p:sp>
-        <p:nvSpPr>
-          <p:cNvPr id="12" name="Shape 8"/>
-          <p:cNvSpPr/>
-          <p:nvPr/>
-        </p:nvSpPr>
-        <p:spPr>
-          <a:xfrm>
-            <a:off x="640080" y="4937760"/>
-            <a:ext cx="777240" cy="777240"/>
-          </a:xfrm>
-          <a:prstGeom prst="ellipse">
-            <a:avLst/>
-          </a:prstGeom>
-          <a:solidFill>
-            <a:srgbClr val="161D3F"/>
-          </a:solidFill>
-          <a:ln/>
-        </p:spPr>
-        <p:txBody>
-          <a:bodyPr/>
-          <a:lstStyle/>
-          <a:p>
-            <a:endParaRPr lang="en-SG"/>
-          </a:p>
-        </p:txBody>
-      </p:sp>
-      <p:pic>
-        <p:nvPicPr>
-          <p:cNvPr id="13" name="Image 2" descr="./icons/alert-cyan.png"/>
-          <p:cNvPicPr>
-            <a:picLocks noChangeAspect="1"/>
-          </p:cNvPicPr>
-          <p:nvPr/>
-        </p:nvPicPr>
-        <p:blipFill>
-          <a:blip r:embed="rId5"/>
-          <a:stretch>
-            <a:fillRect/>
-          </a:stretch>
-        </p:blipFill>
-        <p:spPr>
-          <a:xfrm>
             <a:off x="741121" y="5038801"/>
             <a:ext cx="575158" cy="575158"/>
           </a:xfrm>
@@ -2478,7 +2735,7 @@
           <a:bodyPr wrap="square" lIns="0" tIns="0" rIns="0" bIns="0" rtlCol="0" anchor="ctr"/>
           <a:lstStyle/>
           <a:p>
-            <a:pPr marL="0" indent="0">
+            <a:pPr indent="0" marL="0">
               <a:buNone/>
             </a:pPr>
             <a:r>
@@ -2517,7 +2774,7 @@
           <a:bodyPr wrap="square" lIns="0" tIns="0" rIns="0" bIns="0" rtlCol="0" anchor="ctr"/>
           <a:lstStyle/>
           <a:p>
-            <a:pPr marL="0" indent="0">
+            <a:pPr indent="0" marL="0">
               <a:lnSpc>
                 <a:spcPct val="115000"/>
               </a:lnSpc>
@@ -2554,7 +2811,6 @@
         <a:solidFill>
           <a:srgbClr val="0B1020"/>
         </a:solidFill>
-        <a:effectLst/>
       </p:bgPr>
     </p:bg>
     <p:spTree>
@@ -2592,11 +2848,11 @@
           <a:bodyPr wrap="square" lIns="0" tIns="0" rIns="0" bIns="0" rtlCol="0" anchor="ctr"/>
           <a:lstStyle/>
           <a:p>
-            <a:pPr marL="0" indent="0" algn="l">
-              <a:buNone/>
-            </a:pPr>
-            <a:r>
-              <a:rPr lang="en-US" sz="1300" b="1" kern="0" spc="200" dirty="0">
+            <a:pPr algn="l" indent="0" marL="0">
+              <a:buNone/>
+            </a:pPr>
+            <a:r>
+              <a:rPr lang="en-US" sz="1300" b="1" spc="200" kern="0" dirty="0">
                 <a:solidFill>
                   <a:srgbClr val="22D3EE"/>
                 </a:solidFill>
@@ -2631,7 +2887,7 @@
           <a:bodyPr wrap="square" lIns="0" tIns="0" rIns="0" bIns="0" rtlCol="0" anchor="ctr"/>
           <a:lstStyle/>
           <a:p>
-            <a:pPr marL="0" indent="0">
+            <a:pPr indent="0" marL="0">
               <a:buNone/>
             </a:pPr>
             <a:r>
@@ -2670,20 +2926,13 @@
           </a:solidFill>
           <a:ln/>
           <a:effectLst>
-            <a:outerShdw blurRad="127000" dist="50800" dir="5400000" algn="bl" rotWithShape="0">
+            <a:outerShdw sx="100000" sy="100000" kx="0" ky="0" algn="bl" rotWithShape="0" blurRad="127000" dist="50800" dir="5400000">
               <a:srgbClr val="000000">
                 <a:alpha val="35000"/>
               </a:srgbClr>
             </a:outerShdw>
           </a:effectLst>
         </p:spPr>
-        <p:txBody>
-          <a:bodyPr/>
-          <a:lstStyle/>
-          <a:p>
-            <a:endParaRPr lang="en-SG"/>
-          </a:p>
-        </p:txBody>
       </p:sp>
       <p:sp>
         <p:nvSpPr>
@@ -2704,17 +2953,318 @@
           </a:solidFill>
           <a:ln/>
         </p:spPr>
-        <p:txBody>
-          <a:bodyPr/>
-          <a:lstStyle/>
-          <a:p>
-            <a:endParaRPr lang="en-SG"/>
-          </a:p>
-        </p:txBody>
       </p:sp>
       <p:pic>
         <p:nvPicPr>
-          <p:cNvPr id="6" name="Image 0" descr="./icons/lock-indigo.png"/>
+          <p:cNvPr id="6" name="Image 0" descr="./icons/lock-indigo.png">    </p:cNvPr>
+          <p:cNvPicPr>
+            <a:picLocks noChangeAspect="1"/>
+          </p:cNvPicPr>
+          <p:nvPr/>
+        </p:nvPicPr>
+        <p:blipFill>
+          <a:blip r:embed="rId1"/>
+          <a:stretch>
+            <a:fillRect/>
+          </a:stretch>
+        </p:blipFill>
+        <p:spPr>
+          <a:xfrm>
+            <a:off x="1027328" y="2444648"/>
+            <a:ext cx="642823" cy="642823"/>
+          </a:xfrm>
+          <a:prstGeom prst="rect">
+            <a:avLst/>
+          </a:prstGeom>
+        </p:spPr>
+      </p:pic>
+      <p:sp>
+        <p:nvSpPr>
+          <p:cNvPr id="7" name="Text 4"/>
+          <p:cNvSpPr/>
+          <p:nvPr/>
+        </p:nvSpPr>
+        <p:spPr>
+          <a:xfrm>
+            <a:off x="868680" y="3383280"/>
+            <a:ext cx="2880360" cy="548640"/>
+          </a:xfrm>
+          <a:prstGeom prst="rect">
+            <a:avLst/>
+          </a:prstGeom>
+          <a:noFill/>
+          <a:ln/>
+        </p:spPr>
+        <p:txBody>
+          <a:bodyPr wrap="square" lIns="0" tIns="0" rIns="0" bIns="0" rtlCol="0" anchor="ctr"/>
+          <a:lstStyle/>
+          <a:p>
+            <a:pPr indent="0" marL="0">
+              <a:buNone/>
+            </a:pPr>
+            <a:r>
+              <a:rPr lang="en-US" sz="1800" b="1" dirty="0">
+                <a:solidFill>
+                  <a:srgbClr val="EEF2FF"/>
+                </a:solidFill>
+                <a:latin typeface="Calibri" pitchFamily="34" charset="0"/>
+                <a:ea typeface="Calibri" pitchFamily="34" charset="-122"/>
+                <a:cs typeface="Calibri" pitchFamily="34" charset="-120"/>
+              </a:rPr>
+              <a:t>Closed-corpus, cited</a:t>
+            </a:r>
+            <a:endParaRPr lang="en-US" sz="1800" dirty="0"/>
+          </a:p>
+        </p:txBody>
+      </p:sp>
+      <p:sp>
+        <p:nvSpPr>
+          <p:cNvPr id="8" name="Text 5"/>
+          <p:cNvSpPr/>
+          <p:nvPr/>
+        </p:nvSpPr>
+        <p:spPr>
+          <a:xfrm>
+            <a:off x="868680" y="3931920"/>
+            <a:ext cx="2880360" cy="1645920"/>
+          </a:xfrm>
+          <a:prstGeom prst="rect">
+            <a:avLst/>
+          </a:prstGeom>
+          <a:noFill/>
+          <a:ln/>
+        </p:spPr>
+        <p:txBody>
+          <a:bodyPr wrap="square" lIns="0" tIns="0" rIns="0" bIns="0" rtlCol="0" anchor="ctr"/>
+          <a:lstStyle/>
+          <a:p>
+            <a:pPr indent="0" marL="0">
+              <a:lnSpc>
+                <a:spcPct val="120000"/>
+              </a:lnSpc>
+              <a:buNone/>
+            </a:pPr>
+            <a:r>
+              <a:rPr lang="en-US" sz="1350" dirty="0">
+                <a:solidFill>
+                  <a:srgbClr val="9AA6C4"/>
+                </a:solidFill>
+                <a:latin typeface="Calibri" pitchFamily="34" charset="0"/>
+                <a:ea typeface="Calibri" pitchFamily="34" charset="-122"/>
+                <a:cs typeface="Calibri" pitchFamily="34" charset="-120"/>
+              </a:rPr>
+              <a:t>Every answer comes only from the teacher's approved material — never the open internet — with an exact source citation, every time.</a:t>
+            </a:r>
+            <a:endParaRPr lang="en-US" sz="1350" dirty="0"/>
+          </a:p>
+        </p:txBody>
+      </p:sp>
+      <p:sp>
+        <p:nvSpPr>
+          <p:cNvPr id="9" name="Shape 6"/>
+          <p:cNvSpPr/>
+          <p:nvPr/>
+        </p:nvSpPr>
+        <p:spPr>
+          <a:xfrm>
+            <a:off x="4389120" y="1965960"/>
+            <a:ext cx="3520440" cy="3794760"/>
+          </a:xfrm>
+          <a:prstGeom prst="roundRect">
+            <a:avLst>
+              <a:gd name="adj" fmla="val 3117"/>
+            </a:avLst>
+          </a:prstGeom>
+          <a:solidFill>
+            <a:srgbClr val="161D3F"/>
+          </a:solidFill>
+          <a:ln/>
+          <a:effectLst>
+            <a:outerShdw sx="100000" sy="100000" kx="0" ky="0" algn="bl" rotWithShape="0" blurRad="127000" dist="50800" dir="5400000">
+              <a:srgbClr val="000000">
+                <a:alpha val="35000"/>
+              </a:srgbClr>
+            </a:outerShdw>
+          </a:effectLst>
+        </p:spPr>
+      </p:sp>
+      <p:sp>
+        <p:nvSpPr>
+          <p:cNvPr id="10" name="Shape 7"/>
+          <p:cNvSpPr/>
+          <p:nvPr/>
+        </p:nvSpPr>
+        <p:spPr>
+          <a:xfrm>
+            <a:off x="4754880" y="2331720"/>
+            <a:ext cx="868680" cy="868680"/>
+          </a:xfrm>
+          <a:prstGeom prst="ellipse">
+            <a:avLst/>
+          </a:prstGeom>
+          <a:solidFill>
+            <a:srgbClr val="1A2350"/>
+          </a:solidFill>
+          <a:ln/>
+        </p:spPr>
+      </p:sp>
+      <p:pic>
+        <p:nvPicPr>
+          <p:cNvPr id="11" name="Image 1" descr="./icons/globe-cyan.png">    </p:cNvPr>
+          <p:cNvPicPr>
+            <a:picLocks noChangeAspect="1"/>
+          </p:cNvPicPr>
+          <p:nvPr/>
+        </p:nvPicPr>
+        <p:blipFill>
+          <a:blip r:embed="rId2"/>
+          <a:stretch>
+            <a:fillRect/>
+          </a:stretch>
+        </p:blipFill>
+        <p:spPr>
+          <a:xfrm>
+            <a:off x="4867808" y="2444648"/>
+            <a:ext cx="642823" cy="642823"/>
+          </a:xfrm>
+          <a:prstGeom prst="rect">
+            <a:avLst/>
+          </a:prstGeom>
+        </p:spPr>
+      </p:pic>
+      <p:sp>
+        <p:nvSpPr>
+          <p:cNvPr id="12" name="Text 8"/>
+          <p:cNvSpPr/>
+          <p:nvPr/>
+        </p:nvSpPr>
+        <p:spPr>
+          <a:xfrm>
+            <a:off x="4709160" y="3383280"/>
+            <a:ext cx="2880360" cy="548640"/>
+          </a:xfrm>
+          <a:prstGeom prst="rect">
+            <a:avLst/>
+          </a:prstGeom>
+          <a:noFill/>
+          <a:ln/>
+        </p:spPr>
+        <p:txBody>
+          <a:bodyPr wrap="square" lIns="0" tIns="0" rIns="0" bIns="0" rtlCol="0" anchor="ctr"/>
+          <a:lstStyle/>
+          <a:p>
+            <a:pPr indent="0" marL="0">
+              <a:buNone/>
+            </a:pPr>
+            <a:r>
+              <a:rPr lang="en-US" sz="1800" b="1" dirty="0">
+                <a:solidFill>
+                  <a:srgbClr val="EEF2FF"/>
+                </a:solidFill>
+                <a:latin typeface="Calibri" pitchFamily="34" charset="0"/>
+                <a:ea typeface="Calibri" pitchFamily="34" charset="-122"/>
+                <a:cs typeface="Calibri" pitchFamily="34" charset="-120"/>
+              </a:rPr>
+              <a:t>Multilingual by design</a:t>
+            </a:r>
+            <a:endParaRPr lang="en-US" sz="1800" dirty="0"/>
+          </a:p>
+        </p:txBody>
+      </p:sp>
+      <p:sp>
+        <p:nvSpPr>
+          <p:cNvPr id="13" name="Text 9"/>
+          <p:cNvSpPr/>
+          <p:nvPr/>
+        </p:nvSpPr>
+        <p:spPr>
+          <a:xfrm>
+            <a:off x="4709160" y="3931920"/>
+            <a:ext cx="2880360" cy="1645920"/>
+          </a:xfrm>
+          <a:prstGeom prst="rect">
+            <a:avLst/>
+          </a:prstGeom>
+          <a:noFill/>
+          <a:ln/>
+        </p:spPr>
+        <p:txBody>
+          <a:bodyPr wrap="square" lIns="0" tIns="0" rIns="0" bIns="0" rtlCol="0" anchor="ctr"/>
+          <a:lstStyle/>
+          <a:p>
+            <a:pPr indent="0" marL="0">
+              <a:lnSpc>
+                <a:spcPct val="120000"/>
+              </a:lnSpc>
+              <a:buNone/>
+            </a:pPr>
+            <a:r>
+              <a:rPr lang="en-US" sz="1350" dirty="0">
+                <a:solidFill>
+                  <a:srgbClr val="9AA6C4"/>
+                </a:solidFill>
+                <a:latin typeface="Calibri" pitchFamily="34" charset="0"/>
+                <a:ea typeface="Calibri" pitchFamily="34" charset="-122"/>
+                <a:cs typeface="Calibri" pitchFamily="34" charset="-120"/>
+              </a:rPr>
+              <a:t>Explains and translates into a student's own language — Chinese (Mandarin, Simplified) live today, Korean, Malay, and Tamil next.</a:t>
+            </a:r>
+            <a:endParaRPr lang="en-US" sz="1350" dirty="0"/>
+          </a:p>
+        </p:txBody>
+      </p:sp>
+      <p:sp>
+        <p:nvSpPr>
+          <p:cNvPr id="14" name="Shape 10"/>
+          <p:cNvSpPr/>
+          <p:nvPr/>
+        </p:nvSpPr>
+        <p:spPr>
+          <a:xfrm>
+            <a:off x="8229600" y="1965960"/>
+            <a:ext cx="3520440" cy="3794760"/>
+          </a:xfrm>
+          <a:prstGeom prst="roundRect">
+            <a:avLst>
+              <a:gd name="adj" fmla="val 3117"/>
+            </a:avLst>
+          </a:prstGeom>
+          <a:solidFill>
+            <a:srgbClr val="161D3F"/>
+          </a:solidFill>
+          <a:ln/>
+          <a:effectLst>
+            <a:outerShdw sx="100000" sy="100000" kx="0" ky="0" algn="bl" rotWithShape="0" blurRad="127000" dist="50800" dir="5400000">
+              <a:srgbClr val="000000">
+                <a:alpha val="35000"/>
+              </a:srgbClr>
+            </a:outerShdw>
+          </a:effectLst>
+        </p:spPr>
+      </p:sp>
+      <p:sp>
+        <p:nvSpPr>
+          <p:cNvPr id="15" name="Shape 11"/>
+          <p:cNvSpPr/>
+          <p:nvPr/>
+        </p:nvSpPr>
+        <p:spPr>
+          <a:xfrm>
+            <a:off x="8595360" y="2331720"/>
+            <a:ext cx="868680" cy="868680"/>
+          </a:xfrm>
+          <a:prstGeom prst="ellipse">
+            <a:avLst/>
+          </a:prstGeom>
+          <a:solidFill>
+            <a:srgbClr val="1A2350"/>
+          </a:solidFill>
+          <a:ln/>
+        </p:spPr>
+      </p:sp>
+      <p:pic>
+        <p:nvPicPr>
+          <p:cNvPr id="16" name="Image 2" descr="./icons/check-pink.png">    </p:cNvPr>
           <p:cNvPicPr>
             <a:picLocks noChangeAspect="1"/>
           </p:cNvPicPr>
@@ -2728,342 +3278,6 @@
         </p:blipFill>
         <p:spPr>
           <a:xfrm>
-            <a:off x="1027328" y="2444648"/>
-            <a:ext cx="642823" cy="642823"/>
-          </a:xfrm>
-          <a:prstGeom prst="rect">
-            <a:avLst/>
-          </a:prstGeom>
-        </p:spPr>
-      </p:pic>
-      <p:sp>
-        <p:nvSpPr>
-          <p:cNvPr id="7" name="Text 4"/>
-          <p:cNvSpPr/>
-          <p:nvPr/>
-        </p:nvSpPr>
-        <p:spPr>
-          <a:xfrm>
-            <a:off x="868680" y="3383280"/>
-            <a:ext cx="2880360" cy="548640"/>
-          </a:xfrm>
-          <a:prstGeom prst="rect">
-            <a:avLst/>
-          </a:prstGeom>
-          <a:noFill/>
-          <a:ln/>
-        </p:spPr>
-        <p:txBody>
-          <a:bodyPr wrap="square" lIns="0" tIns="0" rIns="0" bIns="0" rtlCol="0" anchor="ctr"/>
-          <a:lstStyle/>
-          <a:p>
-            <a:pPr marL="0" indent="0">
-              <a:buNone/>
-            </a:pPr>
-            <a:r>
-              <a:rPr lang="en-US" sz="1800" b="1" dirty="0">
-                <a:solidFill>
-                  <a:srgbClr val="EEF2FF"/>
-                </a:solidFill>
-                <a:latin typeface="Calibri" pitchFamily="34" charset="0"/>
-                <a:ea typeface="Calibri" pitchFamily="34" charset="-122"/>
-                <a:cs typeface="Calibri" pitchFamily="34" charset="-120"/>
-              </a:rPr>
-              <a:t>Closed-corpus, cited</a:t>
-            </a:r>
-            <a:endParaRPr lang="en-US" sz="1800" dirty="0"/>
-          </a:p>
-        </p:txBody>
-      </p:sp>
-      <p:sp>
-        <p:nvSpPr>
-          <p:cNvPr id="8" name="Text 5"/>
-          <p:cNvSpPr/>
-          <p:nvPr/>
-        </p:nvSpPr>
-        <p:spPr>
-          <a:xfrm>
-            <a:off x="868680" y="3931920"/>
-            <a:ext cx="2880360" cy="1645920"/>
-          </a:xfrm>
-          <a:prstGeom prst="rect">
-            <a:avLst/>
-          </a:prstGeom>
-          <a:noFill/>
-          <a:ln/>
-        </p:spPr>
-        <p:txBody>
-          <a:bodyPr wrap="square" lIns="0" tIns="0" rIns="0" bIns="0" rtlCol="0" anchor="ctr"/>
-          <a:lstStyle/>
-          <a:p>
-            <a:pPr marL="0" indent="0">
-              <a:lnSpc>
-                <a:spcPct val="120000"/>
-              </a:lnSpc>
-              <a:buNone/>
-            </a:pPr>
-            <a:r>
-              <a:rPr lang="en-US" sz="1350" dirty="0">
-                <a:solidFill>
-                  <a:srgbClr val="9AA6C4"/>
-                </a:solidFill>
-                <a:latin typeface="Calibri" pitchFamily="34" charset="0"/>
-                <a:ea typeface="Calibri" pitchFamily="34" charset="-122"/>
-                <a:cs typeface="Calibri" pitchFamily="34" charset="-120"/>
-              </a:rPr>
-              <a:t>Every answer comes only from the teacher's approved material — never the open internet — with an exact source citation, every time.</a:t>
-            </a:r>
-            <a:endParaRPr lang="en-US" sz="1350" dirty="0"/>
-          </a:p>
-        </p:txBody>
-      </p:sp>
-      <p:sp>
-        <p:nvSpPr>
-          <p:cNvPr id="9" name="Shape 6"/>
-          <p:cNvSpPr/>
-          <p:nvPr/>
-        </p:nvSpPr>
-        <p:spPr>
-          <a:xfrm>
-            <a:off x="4389120" y="1965960"/>
-            <a:ext cx="3520440" cy="3794760"/>
-          </a:xfrm>
-          <a:prstGeom prst="roundRect">
-            <a:avLst>
-              <a:gd name="adj" fmla="val 3117"/>
-            </a:avLst>
-          </a:prstGeom>
-          <a:solidFill>
-            <a:srgbClr val="161D3F"/>
-          </a:solidFill>
-          <a:ln/>
-          <a:effectLst>
-            <a:outerShdw blurRad="127000" dist="50800" dir="5400000" algn="bl" rotWithShape="0">
-              <a:srgbClr val="000000">
-                <a:alpha val="35000"/>
-              </a:srgbClr>
-            </a:outerShdw>
-          </a:effectLst>
-        </p:spPr>
-        <p:txBody>
-          <a:bodyPr/>
-          <a:lstStyle/>
-          <a:p>
-            <a:endParaRPr lang="en-SG"/>
-          </a:p>
-        </p:txBody>
-      </p:sp>
-      <p:sp>
-        <p:nvSpPr>
-          <p:cNvPr id="10" name="Shape 7"/>
-          <p:cNvSpPr/>
-          <p:nvPr/>
-        </p:nvSpPr>
-        <p:spPr>
-          <a:xfrm>
-            <a:off x="4754880" y="2331720"/>
-            <a:ext cx="868680" cy="868680"/>
-          </a:xfrm>
-          <a:prstGeom prst="ellipse">
-            <a:avLst/>
-          </a:prstGeom>
-          <a:solidFill>
-            <a:srgbClr val="1A2350"/>
-          </a:solidFill>
-          <a:ln/>
-        </p:spPr>
-        <p:txBody>
-          <a:bodyPr/>
-          <a:lstStyle/>
-          <a:p>
-            <a:endParaRPr lang="en-SG"/>
-          </a:p>
-        </p:txBody>
-      </p:sp>
-      <p:pic>
-        <p:nvPicPr>
-          <p:cNvPr id="11" name="Image 1" descr="./icons/globe-cyan.png"/>
-          <p:cNvPicPr>
-            <a:picLocks noChangeAspect="1"/>
-          </p:cNvPicPr>
-          <p:nvPr/>
-        </p:nvPicPr>
-        <p:blipFill>
-          <a:blip r:embed="rId4"/>
-          <a:stretch>
-            <a:fillRect/>
-          </a:stretch>
-        </p:blipFill>
-        <p:spPr>
-          <a:xfrm>
-            <a:off x="4867808" y="2444648"/>
-            <a:ext cx="642823" cy="642823"/>
-          </a:xfrm>
-          <a:prstGeom prst="rect">
-            <a:avLst/>
-          </a:prstGeom>
-        </p:spPr>
-      </p:pic>
-      <p:sp>
-        <p:nvSpPr>
-          <p:cNvPr id="12" name="Text 8"/>
-          <p:cNvSpPr/>
-          <p:nvPr/>
-        </p:nvSpPr>
-        <p:spPr>
-          <a:xfrm>
-            <a:off x="4709160" y="3383280"/>
-            <a:ext cx="2880360" cy="548640"/>
-          </a:xfrm>
-          <a:prstGeom prst="rect">
-            <a:avLst/>
-          </a:prstGeom>
-          <a:noFill/>
-          <a:ln/>
-        </p:spPr>
-        <p:txBody>
-          <a:bodyPr wrap="square" lIns="0" tIns="0" rIns="0" bIns="0" rtlCol="0" anchor="ctr"/>
-          <a:lstStyle/>
-          <a:p>
-            <a:pPr marL="0" indent="0">
-              <a:buNone/>
-            </a:pPr>
-            <a:r>
-              <a:rPr lang="en-US" sz="1800" b="1" dirty="0">
-                <a:solidFill>
-                  <a:srgbClr val="EEF2FF"/>
-                </a:solidFill>
-                <a:latin typeface="Calibri" pitchFamily="34" charset="0"/>
-                <a:ea typeface="Calibri" pitchFamily="34" charset="-122"/>
-                <a:cs typeface="Calibri" pitchFamily="34" charset="-120"/>
-              </a:rPr>
-              <a:t>Multilingual by design</a:t>
-            </a:r>
-            <a:endParaRPr lang="en-US" sz="1800" dirty="0"/>
-          </a:p>
-        </p:txBody>
-      </p:sp>
-      <p:sp>
-        <p:nvSpPr>
-          <p:cNvPr id="13" name="Text 9"/>
-          <p:cNvSpPr/>
-          <p:nvPr/>
-        </p:nvSpPr>
-        <p:spPr>
-          <a:xfrm>
-            <a:off x="4709160" y="3931920"/>
-            <a:ext cx="2880360" cy="1645920"/>
-          </a:xfrm>
-          <a:prstGeom prst="rect">
-            <a:avLst/>
-          </a:prstGeom>
-          <a:noFill/>
-          <a:ln/>
-        </p:spPr>
-        <p:txBody>
-          <a:bodyPr wrap="square" lIns="0" tIns="0" rIns="0" bIns="0" rtlCol="0" anchor="ctr"/>
-          <a:lstStyle/>
-          <a:p>
-            <a:pPr marL="0" indent="0">
-              <a:lnSpc>
-                <a:spcPct val="120000"/>
-              </a:lnSpc>
-              <a:buNone/>
-            </a:pPr>
-            <a:r>
-              <a:rPr lang="en-US" sz="1350" dirty="0">
-                <a:solidFill>
-                  <a:srgbClr val="9AA6C4"/>
-                </a:solidFill>
-                <a:latin typeface="Calibri" pitchFamily="34" charset="0"/>
-                <a:ea typeface="Calibri" pitchFamily="34" charset="-122"/>
-                <a:cs typeface="Calibri" pitchFamily="34" charset="-120"/>
-              </a:rPr>
-              <a:t>Explains and translates into a student's own language — Chinese (Mandarin, Simplified) live today, Korean, Malay, and Tamil next.</a:t>
-            </a:r>
-            <a:endParaRPr lang="en-US" sz="1350" dirty="0"/>
-          </a:p>
-        </p:txBody>
-      </p:sp>
-      <p:sp>
-        <p:nvSpPr>
-          <p:cNvPr id="14" name="Shape 10"/>
-          <p:cNvSpPr/>
-          <p:nvPr/>
-        </p:nvSpPr>
-        <p:spPr>
-          <a:xfrm>
-            <a:off x="8229600" y="1965960"/>
-            <a:ext cx="3520440" cy="3794760"/>
-          </a:xfrm>
-          <a:prstGeom prst="roundRect">
-            <a:avLst>
-              <a:gd name="adj" fmla="val 3117"/>
-            </a:avLst>
-          </a:prstGeom>
-          <a:solidFill>
-            <a:srgbClr val="161D3F"/>
-          </a:solidFill>
-          <a:ln/>
-          <a:effectLst>
-            <a:outerShdw blurRad="127000" dist="50800" dir="5400000" algn="bl" rotWithShape="0">
-              <a:srgbClr val="000000">
-                <a:alpha val="35000"/>
-              </a:srgbClr>
-            </a:outerShdw>
-          </a:effectLst>
-        </p:spPr>
-        <p:txBody>
-          <a:bodyPr/>
-          <a:lstStyle/>
-          <a:p>
-            <a:endParaRPr lang="en-SG"/>
-          </a:p>
-        </p:txBody>
-      </p:sp>
-      <p:sp>
-        <p:nvSpPr>
-          <p:cNvPr id="15" name="Shape 11"/>
-          <p:cNvSpPr/>
-          <p:nvPr/>
-        </p:nvSpPr>
-        <p:spPr>
-          <a:xfrm>
-            <a:off x="8595360" y="2331720"/>
-            <a:ext cx="868680" cy="868680"/>
-          </a:xfrm>
-          <a:prstGeom prst="ellipse">
-            <a:avLst/>
-          </a:prstGeom>
-          <a:solidFill>
-            <a:srgbClr val="1A2350"/>
-          </a:solidFill>
-          <a:ln/>
-        </p:spPr>
-        <p:txBody>
-          <a:bodyPr/>
-          <a:lstStyle/>
-          <a:p>
-            <a:endParaRPr lang="en-SG"/>
-          </a:p>
-        </p:txBody>
-      </p:sp>
-      <p:pic>
-        <p:nvPicPr>
-          <p:cNvPr id="16" name="Image 2" descr="./icons/check-pink.png"/>
-          <p:cNvPicPr>
-            <a:picLocks noChangeAspect="1"/>
-          </p:cNvPicPr>
-          <p:nvPr/>
-        </p:nvPicPr>
-        <p:blipFill>
-          <a:blip r:embed="rId5"/>
-          <a:stretch>
-            <a:fillRect/>
-          </a:stretch>
-        </p:blipFill>
-        <p:spPr>
-          <a:xfrm>
             <a:off x="8708288" y="2444648"/>
             <a:ext cx="642823" cy="642823"/>
           </a:xfrm>
@@ -3093,7 +3307,7 @@
           <a:bodyPr wrap="square" lIns="0" tIns="0" rIns="0" bIns="0" rtlCol="0" anchor="ctr"/>
           <a:lstStyle/>
           <a:p>
-            <a:pPr marL="0" indent="0">
+            <a:pPr indent="0" marL="0">
               <a:buNone/>
             </a:pPr>
             <a:r>
@@ -3132,7 +3346,7 @@
           <a:bodyPr wrap="square" lIns="0" tIns="0" rIns="0" bIns="0" rtlCol="0" anchor="ctr"/>
           <a:lstStyle/>
           <a:p>
-            <a:pPr marL="0" indent="0">
+            <a:pPr indent="0" marL="0">
               <a:lnSpc>
                 <a:spcPct val="120000"/>
               </a:lnSpc>
@@ -3169,7 +3383,6 @@
         <a:solidFill>
           <a:srgbClr val="0B1020"/>
         </a:solidFill>
-        <a:effectLst/>
       </p:bgPr>
     </p:bg>
     <p:spTree>
@@ -3207,11 +3420,11 @@
           <a:bodyPr wrap="square" lIns="0" tIns="0" rIns="0" bIns="0" rtlCol="0" anchor="ctr"/>
           <a:lstStyle/>
           <a:p>
-            <a:pPr marL="0" indent="0" algn="l">
-              <a:buNone/>
-            </a:pPr>
-            <a:r>
-              <a:rPr lang="en-US" sz="1300" b="1" kern="0" spc="200" dirty="0">
+            <a:pPr algn="l" indent="0" marL="0">
+              <a:buNone/>
+            </a:pPr>
+            <a:r>
+              <a:rPr lang="en-US" sz="1300" b="1" spc="200" kern="0" dirty="0">
                 <a:solidFill>
                   <a:srgbClr val="22D3EE"/>
                 </a:solidFill>
@@ -3246,7 +3459,7 @@
           <a:bodyPr wrap="square" lIns="0" tIns="0" rIns="0" bIns="0" rtlCol="0" anchor="ctr"/>
           <a:lstStyle/>
           <a:p>
-            <a:pPr marL="0" indent="0">
+            <a:pPr indent="0" marL="0">
               <a:buNone/>
             </a:pPr>
             <a:r>
@@ -3285,20 +3498,13 @@
           </a:solidFill>
           <a:ln/>
           <a:effectLst>
-            <a:outerShdw blurRad="127000" dist="50800" dir="5400000" algn="bl" rotWithShape="0">
+            <a:outerShdw sx="100000" sy="100000" kx="0" ky="0" algn="bl" rotWithShape="0" blurRad="127000" dist="50800" dir="5400000">
               <a:srgbClr val="000000">
                 <a:alpha val="35000"/>
               </a:srgbClr>
             </a:outerShdw>
           </a:effectLst>
         </p:spPr>
-        <p:txBody>
-          <a:bodyPr/>
-          <a:lstStyle/>
-          <a:p>
-            <a:endParaRPr lang="en-SG"/>
-          </a:p>
-        </p:txBody>
       </p:sp>
       <p:sp>
         <p:nvSpPr>
@@ -3319,17 +3525,318 @@
           </a:solidFill>
           <a:ln/>
         </p:spPr>
-        <p:txBody>
-          <a:bodyPr/>
-          <a:lstStyle/>
-          <a:p>
-            <a:endParaRPr lang="en-SG"/>
-          </a:p>
-        </p:txBody>
       </p:sp>
       <p:pic>
         <p:nvPicPr>
-          <p:cNvPr id="6" name="Image 0" descr="./icons/zap-cyan.png"/>
+          <p:cNvPr id="6" name="Image 0" descr="./icons/zap-cyan.png">    </p:cNvPr>
+          <p:cNvPicPr>
+            <a:picLocks noChangeAspect="1"/>
+          </p:cNvPicPr>
+          <p:nvPr/>
+        </p:nvPicPr>
+        <p:blipFill>
+          <a:blip r:embed="rId1"/>
+          <a:stretch>
+            <a:fillRect/>
+          </a:stretch>
+        </p:blipFill>
+        <p:spPr>
+          <a:xfrm>
+            <a:off x="1337310" y="2055114"/>
+            <a:ext cx="507492" cy="507492"/>
+          </a:xfrm>
+          <a:prstGeom prst="rect">
+            <a:avLst/>
+          </a:prstGeom>
+        </p:spPr>
+      </p:pic>
+      <p:sp>
+        <p:nvSpPr>
+          <p:cNvPr id="7" name="Text 4"/>
+          <p:cNvSpPr/>
+          <p:nvPr/>
+        </p:nvSpPr>
+        <p:spPr>
+          <a:xfrm>
+            <a:off x="658368" y="2834640"/>
+            <a:ext cx="1865376" cy="457200"/>
+          </a:xfrm>
+          <a:prstGeom prst="rect">
+            <a:avLst/>
+          </a:prstGeom>
+          <a:noFill/>
+          <a:ln/>
+        </p:spPr>
+        <p:txBody>
+          <a:bodyPr wrap="square" lIns="0" tIns="0" rIns="0" bIns="0" rtlCol="0" anchor="ctr"/>
+          <a:lstStyle/>
+          <a:p>
+            <a:pPr algn="ctr" indent="0" marL="0">
+              <a:buNone/>
+            </a:pPr>
+            <a:r>
+              <a:rPr lang="en-US" sz="1400" b="1" dirty="0">
+                <a:solidFill>
+                  <a:srgbClr val="EEF2FF"/>
+                </a:solidFill>
+                <a:latin typeface="Calibri" pitchFamily="34" charset="0"/>
+                <a:ea typeface="Calibri" pitchFamily="34" charset="-122"/>
+                <a:cs typeface="Calibri" pitchFamily="34" charset="-120"/>
+              </a:rPr>
+              <a:t>Explain</a:t>
+            </a:r>
+            <a:endParaRPr lang="en-US" sz="1400" dirty="0"/>
+          </a:p>
+        </p:txBody>
+      </p:sp>
+      <p:sp>
+        <p:nvSpPr>
+          <p:cNvPr id="8" name="Text 5"/>
+          <p:cNvSpPr/>
+          <p:nvPr/>
+        </p:nvSpPr>
+        <p:spPr>
+          <a:xfrm>
+            <a:off x="658368" y="3291840"/>
+            <a:ext cx="1865376" cy="640080"/>
+          </a:xfrm>
+          <a:prstGeom prst="rect">
+            <a:avLst/>
+          </a:prstGeom>
+          <a:noFill/>
+          <a:ln/>
+        </p:spPr>
+        <p:txBody>
+          <a:bodyPr wrap="square" lIns="0" tIns="0" rIns="0" bIns="0" rtlCol="0" anchor="ctr"/>
+          <a:lstStyle/>
+          <a:p>
+            <a:pPr algn="ctr" indent="0" marL="0">
+              <a:lnSpc>
+                <a:spcPct val="110000"/>
+              </a:lnSpc>
+              <a:buNone/>
+            </a:pPr>
+            <a:r>
+              <a:rPr lang="en-US" sz="1100" dirty="0">
+                <a:solidFill>
+                  <a:srgbClr val="9AA6C4"/>
+                </a:solidFill>
+                <a:latin typeface="Calibri" pitchFamily="34" charset="0"/>
+                <a:ea typeface="Calibri" pitchFamily="34" charset="-122"/>
+                <a:cs typeface="Calibri" pitchFamily="34" charset="-120"/>
+              </a:rPr>
+              <a:t>Teaches the concept step by step</a:t>
+            </a:r>
+            <a:endParaRPr lang="en-US" sz="1100" dirty="0"/>
+          </a:p>
+        </p:txBody>
+      </p:sp>
+      <p:sp>
+        <p:nvSpPr>
+          <p:cNvPr id="9" name="Shape 6"/>
+          <p:cNvSpPr/>
+          <p:nvPr/>
+        </p:nvSpPr>
+        <p:spPr>
+          <a:xfrm>
+            <a:off x="2798064" y="1691640"/>
+            <a:ext cx="2084832" cy="2331720"/>
+          </a:xfrm>
+          <a:prstGeom prst="roundRect">
+            <a:avLst>
+              <a:gd name="adj" fmla="val 5263"/>
+            </a:avLst>
+          </a:prstGeom>
+          <a:solidFill>
+            <a:srgbClr val="161D3F"/>
+          </a:solidFill>
+          <a:ln/>
+          <a:effectLst>
+            <a:outerShdw sx="100000" sy="100000" kx="0" ky="0" algn="bl" rotWithShape="0" blurRad="127000" dist="50800" dir="5400000">
+              <a:srgbClr val="000000">
+                <a:alpha val="35000"/>
+              </a:srgbClr>
+            </a:outerShdw>
+          </a:effectLst>
+        </p:spPr>
+      </p:sp>
+      <p:sp>
+        <p:nvSpPr>
+          <p:cNvPr id="10" name="Shape 7"/>
+          <p:cNvSpPr/>
+          <p:nvPr/>
+        </p:nvSpPr>
+        <p:spPr>
+          <a:xfrm>
+            <a:off x="3497580" y="1965960"/>
+            <a:ext cx="685800" cy="685800"/>
+          </a:xfrm>
+          <a:prstGeom prst="ellipse">
+            <a:avLst/>
+          </a:prstGeom>
+          <a:solidFill>
+            <a:srgbClr val="1A2350"/>
+          </a:solidFill>
+          <a:ln/>
+        </p:spPr>
+      </p:sp>
+      <p:pic>
+        <p:nvPicPr>
+          <p:cNvPr id="11" name="Image 1" descr="./icons/grid-cyan.png">    </p:cNvPr>
+          <p:cNvPicPr>
+            <a:picLocks noChangeAspect="1"/>
+          </p:cNvPicPr>
+          <p:nvPr/>
+        </p:nvPicPr>
+        <p:blipFill>
+          <a:blip r:embed="rId2"/>
+          <a:stretch>
+            <a:fillRect/>
+          </a:stretch>
+        </p:blipFill>
+        <p:spPr>
+          <a:xfrm>
+            <a:off x="3586734" y="2055114"/>
+            <a:ext cx="507492" cy="507492"/>
+          </a:xfrm>
+          <a:prstGeom prst="rect">
+            <a:avLst/>
+          </a:prstGeom>
+        </p:spPr>
+      </p:pic>
+      <p:sp>
+        <p:nvSpPr>
+          <p:cNvPr id="12" name="Text 8"/>
+          <p:cNvSpPr/>
+          <p:nvPr/>
+        </p:nvSpPr>
+        <p:spPr>
+          <a:xfrm>
+            <a:off x="2907792" y="2834640"/>
+            <a:ext cx="1865376" cy="457200"/>
+          </a:xfrm>
+          <a:prstGeom prst="rect">
+            <a:avLst/>
+          </a:prstGeom>
+          <a:noFill/>
+          <a:ln/>
+        </p:spPr>
+        <p:txBody>
+          <a:bodyPr wrap="square" lIns="0" tIns="0" rIns="0" bIns="0" rtlCol="0" anchor="ctr"/>
+          <a:lstStyle/>
+          <a:p>
+            <a:pPr algn="ctr" indent="0" marL="0">
+              <a:buNone/>
+            </a:pPr>
+            <a:r>
+              <a:rPr lang="en-US" sz="1400" b="1" dirty="0">
+                <a:solidFill>
+                  <a:srgbClr val="EEF2FF"/>
+                </a:solidFill>
+                <a:latin typeface="Calibri" pitchFamily="34" charset="0"/>
+                <a:ea typeface="Calibri" pitchFamily="34" charset="-122"/>
+                <a:cs typeface="Calibri" pitchFamily="34" charset="-120"/>
+              </a:rPr>
+              <a:t>Give Example</a:t>
+            </a:r>
+            <a:endParaRPr lang="en-US" sz="1400" dirty="0"/>
+          </a:p>
+        </p:txBody>
+      </p:sp>
+      <p:sp>
+        <p:nvSpPr>
+          <p:cNvPr id="13" name="Text 9"/>
+          <p:cNvSpPr/>
+          <p:nvPr/>
+        </p:nvSpPr>
+        <p:spPr>
+          <a:xfrm>
+            <a:off x="2907792" y="3291840"/>
+            <a:ext cx="1865376" cy="640080"/>
+          </a:xfrm>
+          <a:prstGeom prst="rect">
+            <a:avLst/>
+          </a:prstGeom>
+          <a:noFill/>
+          <a:ln/>
+        </p:spPr>
+        <p:txBody>
+          <a:bodyPr wrap="square" lIns="0" tIns="0" rIns="0" bIns="0" rtlCol="0" anchor="ctr"/>
+          <a:lstStyle/>
+          <a:p>
+            <a:pPr algn="ctr" indent="0" marL="0">
+              <a:lnSpc>
+                <a:spcPct val="110000"/>
+              </a:lnSpc>
+              <a:buNone/>
+            </a:pPr>
+            <a:r>
+              <a:rPr lang="en-US" sz="1100" dirty="0">
+                <a:solidFill>
+                  <a:srgbClr val="9AA6C4"/>
+                </a:solidFill>
+                <a:latin typeface="Calibri" pitchFamily="34" charset="0"/>
+                <a:ea typeface="Calibri" pitchFamily="34" charset="-122"/>
+                <a:cs typeface="Calibri" pitchFamily="34" charset="-120"/>
+              </a:rPr>
+              <a:t>Shows one worked example</a:t>
+            </a:r>
+            <a:endParaRPr lang="en-US" sz="1100" dirty="0"/>
+          </a:p>
+        </p:txBody>
+      </p:sp>
+      <p:sp>
+        <p:nvSpPr>
+          <p:cNvPr id="14" name="Shape 10"/>
+          <p:cNvSpPr/>
+          <p:nvPr/>
+        </p:nvSpPr>
+        <p:spPr>
+          <a:xfrm>
+            <a:off x="5047488" y="1691640"/>
+            <a:ext cx="2084832" cy="2331720"/>
+          </a:xfrm>
+          <a:prstGeom prst="roundRect">
+            <a:avLst>
+              <a:gd name="adj" fmla="val 5263"/>
+            </a:avLst>
+          </a:prstGeom>
+          <a:solidFill>
+            <a:srgbClr val="161D3F"/>
+          </a:solidFill>
+          <a:ln/>
+          <a:effectLst>
+            <a:outerShdw sx="100000" sy="100000" kx="0" ky="0" algn="bl" rotWithShape="0" blurRad="127000" dist="50800" dir="5400000">
+              <a:srgbClr val="000000">
+                <a:alpha val="35000"/>
+              </a:srgbClr>
+            </a:outerShdw>
+          </a:effectLst>
+        </p:spPr>
+      </p:sp>
+      <p:sp>
+        <p:nvSpPr>
+          <p:cNvPr id="15" name="Shape 11"/>
+          <p:cNvSpPr/>
+          <p:nvPr/>
+        </p:nvSpPr>
+        <p:spPr>
+          <a:xfrm>
+            <a:off x="5747004" y="1965960"/>
+            <a:ext cx="685800" cy="685800"/>
+          </a:xfrm>
+          <a:prstGeom prst="ellipse">
+            <a:avLst/>
+          </a:prstGeom>
+          <a:solidFill>
+            <a:srgbClr val="1A2350"/>
+          </a:solidFill>
+          <a:ln/>
+        </p:spPr>
+      </p:sp>
+      <p:pic>
+        <p:nvPicPr>
+          <p:cNvPr id="16" name="Image 2" descr="./icons/help-cyan.png">    </p:cNvPr>
           <p:cNvPicPr>
             <a:picLocks noChangeAspect="1"/>
           </p:cNvPicPr>
@@ -3343,7 +3850,7 @@
         </p:blipFill>
         <p:spPr>
           <a:xfrm>
-            <a:off x="1337310" y="2055114"/>
+            <a:off x="5836158" y="2055114"/>
             <a:ext cx="507492" cy="507492"/>
           </a:xfrm>
           <a:prstGeom prst="rect">
@@ -3353,13 +3860,13 @@
       </p:pic>
       <p:sp>
         <p:nvSpPr>
-          <p:cNvPr id="7" name="Text 4"/>
-          <p:cNvSpPr/>
-          <p:nvPr/>
-        </p:nvSpPr>
-        <p:spPr>
-          <a:xfrm>
-            <a:off x="658368" y="2834640"/>
+          <p:cNvPr id="17" name="Text 12"/>
+          <p:cNvSpPr/>
+          <p:nvPr/>
+        </p:nvSpPr>
+        <p:spPr>
+          <a:xfrm>
+            <a:off x="5157216" y="2834640"/>
             <a:ext cx="1865376" cy="457200"/>
           </a:xfrm>
           <a:prstGeom prst="rect">
@@ -3372,7 +3879,7 @@
           <a:bodyPr wrap="square" lIns="0" tIns="0" rIns="0" bIns="0" rtlCol="0" anchor="ctr"/>
           <a:lstStyle/>
           <a:p>
-            <a:pPr marL="0" indent="0" algn="ctr">
+            <a:pPr algn="ctr" indent="0" marL="0">
               <a:buNone/>
             </a:pPr>
             <a:r>
@@ -3384,7 +3891,7 @@
                 <a:ea typeface="Calibri" pitchFamily="34" charset="-122"/>
                 <a:cs typeface="Calibri" pitchFamily="34" charset="-120"/>
               </a:rPr>
-              <a:t>Explain</a:t>
+              <a:t>Ask Me Questions</a:t>
             </a:r>
             <a:endParaRPr lang="en-US" sz="1400" dirty="0"/>
           </a:p>
@@ -3392,13 +3899,13 @@
       </p:sp>
       <p:sp>
         <p:nvSpPr>
-          <p:cNvPr id="8" name="Text 5"/>
-          <p:cNvSpPr/>
-          <p:nvPr/>
-        </p:nvSpPr>
-        <p:spPr>
-          <a:xfrm>
-            <a:off x="658368" y="3291840"/>
+          <p:cNvPr id="18" name="Text 13"/>
+          <p:cNvSpPr/>
+          <p:nvPr/>
+        </p:nvSpPr>
+        <p:spPr>
+          <a:xfrm>
+            <a:off x="5157216" y="3291840"/>
             <a:ext cx="1865376" cy="640080"/>
           </a:xfrm>
           <a:prstGeom prst="rect">
@@ -3411,7 +3918,7 @@
           <a:bodyPr wrap="square" lIns="0" tIns="0" rIns="0" bIns="0" rtlCol="0" anchor="ctr"/>
           <a:lstStyle/>
           <a:p>
-            <a:pPr marL="0" indent="0" algn="ctr">
+            <a:pPr algn="ctr" indent="0" marL="0">
               <a:lnSpc>
                 <a:spcPct val="110000"/>
               </a:lnSpc>
@@ -3426,7 +3933,7 @@
                 <a:ea typeface="Calibri" pitchFamily="34" charset="-122"/>
                 <a:cs typeface="Calibri" pitchFamily="34" charset="-120"/>
               </a:rPr>
-              <a:t>Teaches the concept step by step</a:t>
+              <a:t>Socratic — one question at a time</a:t>
             </a:r>
             <a:endParaRPr lang="en-US" sz="1100" dirty="0"/>
           </a:p>
@@ -3434,13 +3941,13 @@
       </p:sp>
       <p:sp>
         <p:nvSpPr>
-          <p:cNvPr id="9" name="Shape 6"/>
-          <p:cNvSpPr/>
-          <p:nvPr/>
-        </p:nvSpPr>
-        <p:spPr>
-          <a:xfrm>
-            <a:off x="2798064" y="1691640"/>
+          <p:cNvPr id="19" name="Shape 14"/>
+          <p:cNvSpPr/>
+          <p:nvPr/>
+        </p:nvSpPr>
+        <p:spPr>
+          <a:xfrm>
+            <a:off x="7296912" y="1691640"/>
             <a:ext cx="2084832" cy="2331720"/>
           </a:xfrm>
           <a:prstGeom prst="roundRect">
@@ -3453,30 +3960,23 @@
           </a:solidFill>
           <a:ln/>
           <a:effectLst>
-            <a:outerShdw blurRad="127000" dist="50800" dir="5400000" algn="bl" rotWithShape="0">
+            <a:outerShdw sx="100000" sy="100000" kx="0" ky="0" algn="bl" rotWithShape="0" blurRad="127000" dist="50800" dir="5400000">
               <a:srgbClr val="000000">
                 <a:alpha val="35000"/>
               </a:srgbClr>
             </a:outerShdw>
           </a:effectLst>
         </p:spPr>
-        <p:txBody>
-          <a:bodyPr/>
-          <a:lstStyle/>
-          <a:p>
-            <a:endParaRPr lang="en-SG"/>
-          </a:p>
-        </p:txBody>
-      </p:sp>
-      <p:sp>
-        <p:nvSpPr>
-          <p:cNvPr id="10" name="Shape 7"/>
-          <p:cNvSpPr/>
-          <p:nvPr/>
-        </p:nvSpPr>
-        <p:spPr>
-          <a:xfrm>
-            <a:off x="3497580" y="1965960"/>
+      </p:sp>
+      <p:sp>
+        <p:nvSpPr>
+          <p:cNvPr id="20" name="Shape 15"/>
+          <p:cNvSpPr/>
+          <p:nvPr/>
+        </p:nvSpPr>
+        <p:spPr>
+          <a:xfrm>
+            <a:off x="7996428" y="1965960"/>
             <a:ext cx="685800" cy="685800"/>
           </a:xfrm>
           <a:prstGeom prst="ellipse">
@@ -3487,17 +3987,10 @@
           </a:solidFill>
           <a:ln/>
         </p:spPr>
-        <p:txBody>
-          <a:bodyPr/>
-          <a:lstStyle/>
-          <a:p>
-            <a:endParaRPr lang="en-SG"/>
-          </a:p>
-        </p:txBody>
       </p:sp>
       <p:pic>
         <p:nvPicPr>
-          <p:cNvPr id="11" name="Image 1" descr="./icons/grid-cyan.png"/>
+          <p:cNvPr id="21" name="Image 3" descr="./icons/checksquare-cyan.png">    </p:cNvPr>
           <p:cNvPicPr>
             <a:picLocks noChangeAspect="1"/>
           </p:cNvPicPr>
@@ -3511,7 +4004,7 @@
         </p:blipFill>
         <p:spPr>
           <a:xfrm>
-            <a:off x="3586734" y="2055114"/>
+            <a:off x="8085582" y="2055114"/>
             <a:ext cx="507492" cy="507492"/>
           </a:xfrm>
           <a:prstGeom prst="rect">
@@ -3521,13 +4014,13 @@
       </p:pic>
       <p:sp>
         <p:nvSpPr>
-          <p:cNvPr id="12" name="Text 8"/>
-          <p:cNvSpPr/>
-          <p:nvPr/>
-        </p:nvSpPr>
-        <p:spPr>
-          <a:xfrm>
-            <a:off x="2907792" y="2834640"/>
+          <p:cNvPr id="22" name="Text 16"/>
+          <p:cNvSpPr/>
+          <p:nvPr/>
+        </p:nvSpPr>
+        <p:spPr>
+          <a:xfrm>
+            <a:off x="7406640" y="2834640"/>
             <a:ext cx="1865376" cy="457200"/>
           </a:xfrm>
           <a:prstGeom prst="rect">
@@ -3540,7 +4033,7 @@
           <a:bodyPr wrap="square" lIns="0" tIns="0" rIns="0" bIns="0" rtlCol="0" anchor="ctr"/>
           <a:lstStyle/>
           <a:p>
-            <a:pPr marL="0" indent="0" algn="ctr">
+            <a:pPr algn="ctr" indent="0" marL="0">
               <a:buNone/>
             </a:pPr>
             <a:r>
@@ -3552,7 +4045,7 @@
                 <a:ea typeface="Calibri" pitchFamily="34" charset="-122"/>
                 <a:cs typeface="Calibri" pitchFamily="34" charset="-120"/>
               </a:rPr>
-              <a:t>Give Example</a:t>
+              <a:t>Check My Answer</a:t>
             </a:r>
             <a:endParaRPr lang="en-US" sz="1400" dirty="0"/>
           </a:p>
@@ -3560,13 +4053,13 @@
       </p:sp>
       <p:sp>
         <p:nvSpPr>
-          <p:cNvPr id="13" name="Text 9"/>
-          <p:cNvSpPr/>
-          <p:nvPr/>
-        </p:nvSpPr>
-        <p:spPr>
-          <a:xfrm>
-            <a:off x="2907792" y="3291840"/>
+          <p:cNvPr id="23" name="Text 17"/>
+          <p:cNvSpPr/>
+          <p:nvPr/>
+        </p:nvSpPr>
+        <p:spPr>
+          <a:xfrm>
+            <a:off x="7406640" y="3291840"/>
             <a:ext cx="1865376" cy="640080"/>
           </a:xfrm>
           <a:prstGeom prst="rect">
@@ -3579,7 +4072,7 @@
           <a:bodyPr wrap="square" lIns="0" tIns="0" rIns="0" bIns="0" rtlCol="0" anchor="ctr"/>
           <a:lstStyle/>
           <a:p>
-            <a:pPr marL="0" indent="0" algn="ctr">
+            <a:pPr algn="ctr" indent="0" marL="0">
               <a:lnSpc>
                 <a:spcPct val="110000"/>
               </a:lnSpc>
@@ -3594,7 +4087,7 @@
                 <a:ea typeface="Calibri" pitchFamily="34" charset="-122"/>
                 <a:cs typeface="Calibri" pitchFamily="34" charset="-120"/>
               </a:rPr>
-              <a:t>Shows one worked example</a:t>
+              <a:t>Hints, never the final answer</a:t>
             </a:r>
             <a:endParaRPr lang="en-US" sz="1100" dirty="0"/>
           </a:p>
@@ -3602,13 +4095,13 @@
       </p:sp>
       <p:sp>
         <p:nvSpPr>
-          <p:cNvPr id="14" name="Shape 10"/>
-          <p:cNvSpPr/>
-          <p:nvPr/>
-        </p:nvSpPr>
-        <p:spPr>
-          <a:xfrm>
-            <a:off x="5047488" y="1691640"/>
+          <p:cNvPr id="24" name="Shape 18"/>
+          <p:cNvSpPr/>
+          <p:nvPr/>
+        </p:nvSpPr>
+        <p:spPr>
+          <a:xfrm>
+            <a:off x="9546336" y="1691640"/>
             <a:ext cx="2084832" cy="2331720"/>
           </a:xfrm>
           <a:prstGeom prst="roundRect">
@@ -3621,30 +4114,23 @@
           </a:solidFill>
           <a:ln/>
           <a:effectLst>
-            <a:outerShdw blurRad="127000" dist="50800" dir="5400000" algn="bl" rotWithShape="0">
+            <a:outerShdw sx="100000" sy="100000" kx="0" ky="0" algn="bl" rotWithShape="0" blurRad="127000" dist="50800" dir="5400000">
               <a:srgbClr val="000000">
                 <a:alpha val="35000"/>
               </a:srgbClr>
             </a:outerShdw>
           </a:effectLst>
         </p:spPr>
-        <p:txBody>
-          <a:bodyPr/>
-          <a:lstStyle/>
-          <a:p>
-            <a:endParaRPr lang="en-SG"/>
-          </a:p>
-        </p:txBody>
-      </p:sp>
-      <p:sp>
-        <p:nvSpPr>
-          <p:cNvPr id="15" name="Shape 11"/>
-          <p:cNvSpPr/>
-          <p:nvPr/>
-        </p:nvSpPr>
-        <p:spPr>
-          <a:xfrm>
-            <a:off x="5747004" y="1965960"/>
+      </p:sp>
+      <p:sp>
+        <p:nvSpPr>
+          <p:cNvPr id="25" name="Shape 19"/>
+          <p:cNvSpPr/>
+          <p:nvPr/>
+        </p:nvSpPr>
+        <p:spPr>
+          <a:xfrm>
+            <a:off x="10245852" y="1965960"/>
             <a:ext cx="685800" cy="685800"/>
           </a:xfrm>
           <a:prstGeom prst="ellipse">
@@ -3655,17 +4141,10 @@
           </a:solidFill>
           <a:ln/>
         </p:spPr>
-        <p:txBody>
-          <a:bodyPr/>
-          <a:lstStyle/>
-          <a:p>
-            <a:endParaRPr lang="en-SG"/>
-          </a:p>
-        </p:txBody>
       </p:sp>
       <p:pic>
         <p:nvPicPr>
-          <p:cNvPr id="16" name="Image 2" descr="./icons/help-cyan.png"/>
+          <p:cNvPr id="26" name="Image 4" descr="./icons/globe-cyan.png">    </p:cNvPr>
           <p:cNvPicPr>
             <a:picLocks noChangeAspect="1"/>
           </p:cNvPicPr>
@@ -3679,7 +4158,7 @@
         </p:blipFill>
         <p:spPr>
           <a:xfrm>
-            <a:off x="5836158" y="2055114"/>
+            <a:off x="10335006" y="2055114"/>
             <a:ext cx="507492" cy="507492"/>
           </a:xfrm>
           <a:prstGeom prst="rect">
@@ -3689,13 +4168,13 @@
       </p:pic>
       <p:sp>
         <p:nvSpPr>
-          <p:cNvPr id="17" name="Text 12"/>
-          <p:cNvSpPr/>
-          <p:nvPr/>
-        </p:nvSpPr>
-        <p:spPr>
-          <a:xfrm>
-            <a:off x="5157216" y="2834640"/>
+          <p:cNvPr id="27" name="Text 20"/>
+          <p:cNvSpPr/>
+          <p:nvPr/>
+        </p:nvSpPr>
+        <p:spPr>
+          <a:xfrm>
+            <a:off x="9656064" y="2834640"/>
             <a:ext cx="1865376" cy="457200"/>
           </a:xfrm>
           <a:prstGeom prst="rect">
@@ -3708,7 +4187,7 @@
           <a:bodyPr wrap="square" lIns="0" tIns="0" rIns="0" bIns="0" rtlCol="0" anchor="ctr"/>
           <a:lstStyle/>
           <a:p>
-            <a:pPr marL="0" indent="0" algn="ctr">
+            <a:pPr algn="ctr" indent="0" marL="0">
               <a:buNone/>
             </a:pPr>
             <a:r>
@@ -3720,7 +4199,7 @@
                 <a:ea typeface="Calibri" pitchFamily="34" charset="-122"/>
                 <a:cs typeface="Calibri" pitchFamily="34" charset="-120"/>
               </a:rPr>
-              <a:t>Ask Me Questions</a:t>
+              <a:t>Translate</a:t>
             </a:r>
             <a:endParaRPr lang="en-US" sz="1400" dirty="0"/>
           </a:p>
@@ -3728,13 +4207,13 @@
       </p:sp>
       <p:sp>
         <p:nvSpPr>
-          <p:cNvPr id="18" name="Text 13"/>
-          <p:cNvSpPr/>
-          <p:nvPr/>
-        </p:nvSpPr>
-        <p:spPr>
-          <a:xfrm>
-            <a:off x="5157216" y="3291840"/>
+          <p:cNvPr id="28" name="Text 21"/>
+          <p:cNvSpPr/>
+          <p:nvPr/>
+        </p:nvSpPr>
+        <p:spPr>
+          <a:xfrm>
+            <a:off x="9656064" y="3291840"/>
             <a:ext cx="1865376" cy="640080"/>
           </a:xfrm>
           <a:prstGeom prst="rect">
@@ -3747,7 +4226,7 @@
           <a:bodyPr wrap="square" lIns="0" tIns="0" rIns="0" bIns="0" rtlCol="0" anchor="ctr"/>
           <a:lstStyle/>
           <a:p>
-            <a:pPr marL="0" indent="0" algn="ctr">
+            <a:pPr algn="ctr" indent="0" marL="0">
               <a:lnSpc>
                 <a:spcPct val="110000"/>
               </a:lnSpc>
@@ -3762,7 +4241,7 @@
                 <a:ea typeface="Calibri" pitchFamily="34" charset="-122"/>
                 <a:cs typeface="Calibri" pitchFamily="34" charset="-120"/>
               </a:rPr>
-              <a:t>Socratic — one question at a time</a:t>
+              <a:t>Into the student's own language</a:t>
             </a:r>
             <a:endParaRPr lang="en-US" sz="1100" dirty="0"/>
           </a:p>
@@ -3770,70 +4249,66 @@
       </p:sp>
       <p:sp>
         <p:nvSpPr>
-          <p:cNvPr id="19" name="Shape 14"/>
-          <p:cNvSpPr/>
-          <p:nvPr/>
-        </p:nvSpPr>
-        <p:spPr>
-          <a:xfrm>
-            <a:off x="7296912" y="1691640"/>
-            <a:ext cx="2084832" cy="2331720"/>
-          </a:xfrm>
-          <a:prstGeom prst="roundRect">
-            <a:avLst>
-              <a:gd name="adj" fmla="val 5263"/>
-            </a:avLst>
+          <p:cNvPr id="29" name="Text 22"/>
+          <p:cNvSpPr/>
+          <p:nvPr/>
+        </p:nvSpPr>
+        <p:spPr>
+          <a:xfrm>
+            <a:off x="548640" y="4297680"/>
+            <a:ext cx="11064240" cy="457200"/>
+          </a:xfrm>
+          <a:prstGeom prst="rect">
+            <a:avLst/>
+          </a:prstGeom>
+          <a:noFill/>
+          <a:ln/>
+        </p:spPr>
+        <p:txBody>
+          <a:bodyPr wrap="square" lIns="0" tIns="0" rIns="0" bIns="0" rtlCol="0" anchor="ctr"/>
+          <a:lstStyle/>
+          <a:p>
+            <a:pPr indent="0" marL="0">
+              <a:buNone/>
+            </a:pPr>
+            <a:r>
+              <a:rPr lang="en-US" sz="1400" i="1" dirty="0">
+                <a:solidFill>
+                  <a:srgbClr val="9AA6C4"/>
+                </a:solidFill>
+                <a:latin typeface="Calibri" pitchFamily="34" charset="0"/>
+                <a:ea typeface="Calibri" pitchFamily="34" charset="-122"/>
+                <a:cs typeface="Calibri" pitchFamily="34" charset="-120"/>
+              </a:rPr>
+              <a:t>Real conversational memory: the tutor threads full history so it genuinely remembers what it already explained — no repetition, real back-and-forth.</a:t>
+            </a:r>
+            <a:endParaRPr lang="en-US" sz="1400" dirty="0"/>
+          </a:p>
+        </p:txBody>
+      </p:sp>
+      <p:sp>
+        <p:nvSpPr>
+          <p:cNvPr id="30" name="Shape 23"/>
+          <p:cNvSpPr/>
+          <p:nvPr/>
+        </p:nvSpPr>
+        <p:spPr>
+          <a:xfrm>
+            <a:off x="548640" y="5029200"/>
+            <a:ext cx="640080" cy="640080"/>
+          </a:xfrm>
+          <a:prstGeom prst="ellipse">
+            <a:avLst/>
           </a:prstGeom>
           <a:solidFill>
             <a:srgbClr val="161D3F"/>
           </a:solidFill>
           <a:ln/>
-          <a:effectLst>
-            <a:outerShdw blurRad="127000" dist="50800" dir="5400000" algn="bl" rotWithShape="0">
-              <a:srgbClr val="000000">
-                <a:alpha val="35000"/>
-              </a:srgbClr>
-            </a:outerShdw>
-          </a:effectLst>
-        </p:spPr>
-        <p:txBody>
-          <a:bodyPr/>
-          <a:lstStyle/>
-          <a:p>
-            <a:endParaRPr lang="en-SG"/>
-          </a:p>
-        </p:txBody>
-      </p:sp>
-      <p:sp>
-        <p:nvSpPr>
-          <p:cNvPr id="20" name="Shape 15"/>
-          <p:cNvSpPr/>
-          <p:nvPr/>
-        </p:nvSpPr>
-        <p:spPr>
-          <a:xfrm>
-            <a:off x="7996428" y="1965960"/>
-            <a:ext cx="685800" cy="685800"/>
-          </a:xfrm>
-          <a:prstGeom prst="ellipse">
-            <a:avLst/>
-          </a:prstGeom>
-          <a:solidFill>
-            <a:srgbClr val="1A2350"/>
-          </a:solidFill>
-          <a:ln/>
-        </p:spPr>
-        <p:txBody>
-          <a:bodyPr/>
-          <a:lstStyle/>
-          <a:p>
-            <a:endParaRPr lang="en-SG"/>
-          </a:p>
-        </p:txBody>
+        </p:spPr>
       </p:sp>
       <p:pic>
         <p:nvPicPr>
-          <p:cNvPr id="21" name="Image 3" descr="./icons/checksquare-cyan.png"/>
+          <p:cNvPr id="31" name="Image 5" descr="./icons/target-pink.png">    </p:cNvPr>
           <p:cNvPicPr>
             <a:picLocks noChangeAspect="1"/>
           </p:cNvPicPr>
@@ -3847,8 +4322,8 @@
         </p:blipFill>
         <p:spPr>
           <a:xfrm>
-            <a:off x="8085582" y="2055114"/>
-            <a:ext cx="507492" cy="507492"/>
+            <a:off x="631850" y="5112410"/>
+            <a:ext cx="473659" cy="473659"/>
           </a:xfrm>
           <a:prstGeom prst="rect">
             <a:avLst/>
@@ -3857,26 +4332,26 @@
       </p:pic>
       <p:sp>
         <p:nvSpPr>
-          <p:cNvPr id="22" name="Text 16"/>
-          <p:cNvSpPr/>
-          <p:nvPr/>
-        </p:nvSpPr>
-        <p:spPr>
-          <a:xfrm>
-            <a:off x="7406640" y="2834640"/>
-            <a:ext cx="1865376" cy="457200"/>
-          </a:xfrm>
-          <a:prstGeom prst="rect">
-            <a:avLst/>
-          </a:prstGeom>
-          <a:noFill/>
-          <a:ln/>
-        </p:spPr>
-        <p:txBody>
-          <a:bodyPr wrap="square" lIns="0" tIns="0" rIns="0" bIns="0" rtlCol="0" anchor="ctr"/>
-          <a:lstStyle/>
-          <a:p>
-            <a:pPr marL="0" indent="0" algn="ctr">
+          <p:cNvPr id="32" name="Text 24"/>
+          <p:cNvSpPr/>
+          <p:nvPr/>
+        </p:nvSpPr>
+        <p:spPr>
+          <a:xfrm>
+            <a:off x="1371600" y="5010912"/>
+            <a:ext cx="4526280" cy="320040"/>
+          </a:xfrm>
+          <a:prstGeom prst="rect">
+            <a:avLst/>
+          </a:prstGeom>
+          <a:noFill/>
+          <a:ln/>
+        </p:spPr>
+        <p:txBody>
+          <a:bodyPr wrap="square" lIns="0" tIns="0" rIns="0" bIns="0" rtlCol="0" anchor="ctr"/>
+          <a:lstStyle/>
+          <a:p>
+            <a:pPr indent="0" marL="0">
               <a:buNone/>
             </a:pPr>
             <a:r>
@@ -3888,7 +4363,7 @@
                 <a:ea typeface="Calibri" pitchFamily="34" charset="-122"/>
                 <a:cs typeface="Calibri" pitchFamily="34" charset="-120"/>
               </a:rPr>
-              <a:t>Check My Answer</a:t>
+              <a:t>Drag-and-feel physics</a:t>
             </a:r>
             <a:endParaRPr lang="en-US" sz="1400" dirty="0"/>
           </a:p>
@@ -3896,33 +4371,33 @@
       </p:sp>
       <p:sp>
         <p:nvSpPr>
-          <p:cNvPr id="23" name="Text 17"/>
-          <p:cNvSpPr/>
-          <p:nvPr/>
-        </p:nvSpPr>
-        <p:spPr>
-          <a:xfrm>
-            <a:off x="7406640" y="3291840"/>
-            <a:ext cx="1865376" cy="640080"/>
-          </a:xfrm>
-          <a:prstGeom prst="rect">
-            <a:avLst/>
-          </a:prstGeom>
-          <a:noFill/>
-          <a:ln/>
-        </p:spPr>
-        <p:txBody>
-          <a:bodyPr wrap="square" lIns="0" tIns="0" rIns="0" bIns="0" rtlCol="0" anchor="ctr"/>
-          <a:lstStyle/>
-          <a:p>
-            <a:pPr marL="0" indent="0" algn="ctr">
+          <p:cNvPr id="33" name="Text 25"/>
+          <p:cNvSpPr/>
+          <p:nvPr/>
+        </p:nvSpPr>
+        <p:spPr>
+          <a:xfrm>
+            <a:off x="1371600" y="5321808"/>
+            <a:ext cx="4526280" cy="777240"/>
+          </a:xfrm>
+          <a:prstGeom prst="rect">
+            <a:avLst/>
+          </a:prstGeom>
+          <a:noFill/>
+          <a:ln/>
+        </p:spPr>
+        <p:txBody>
+          <a:bodyPr wrap="square" lIns="0" tIns="0" rIns="0" bIns="0" rtlCol="0" anchor="ctr"/>
+          <a:lstStyle/>
+          <a:p>
+            <a:pPr indent="0" marL="0">
               <a:lnSpc>
-                <a:spcPct val="110000"/>
+                <a:spcPct val="115000"/>
               </a:lnSpc>
               <a:buNone/>
             </a:pPr>
             <a:r>
-              <a:rPr lang="en-US" sz="1100" dirty="0">
+              <a:rPr lang="en-US" sz="1200" dirty="0">
                 <a:solidFill>
                   <a:srgbClr val="9AA6C4"/>
                 </a:solidFill>
@@ -3930,78 +4405,35 @@
                 <a:ea typeface="Calibri" pitchFamily="34" charset="-122"/>
                 <a:cs typeface="Calibri" pitchFamily="34" charset="-120"/>
               </a:rPr>
-              <a:t>Hints, never the final answer</a:t>
-            </a:r>
-            <a:endParaRPr lang="en-US" sz="1100" dirty="0"/>
-          </a:p>
-        </p:txBody>
-      </p:sp>
-      <p:sp>
-        <p:nvSpPr>
-          <p:cNvPr id="24" name="Shape 18"/>
-          <p:cNvSpPr/>
-          <p:nvPr/>
-        </p:nvSpPr>
-        <p:spPr>
-          <a:xfrm>
-            <a:off x="9546336" y="1691640"/>
-            <a:ext cx="2084832" cy="2331720"/>
-          </a:xfrm>
-          <a:prstGeom prst="roundRect">
-            <a:avLst>
-              <a:gd name="adj" fmla="val 5263"/>
-            </a:avLst>
+              <a:t>An interactive seesaw simulation makes moments of a force tangible — drag weights, watch clockwise/anticlockwise balance live.</a:t>
+            </a:r>
+            <a:endParaRPr lang="en-US" sz="1200" dirty="0"/>
+          </a:p>
+        </p:txBody>
+      </p:sp>
+      <p:sp>
+        <p:nvSpPr>
+          <p:cNvPr id="34" name="Shape 26"/>
+          <p:cNvSpPr/>
+          <p:nvPr/>
+        </p:nvSpPr>
+        <p:spPr>
+          <a:xfrm>
+            <a:off x="6263640" y="5029200"/>
+            <a:ext cx="640080" cy="640080"/>
+          </a:xfrm>
+          <a:prstGeom prst="ellipse">
+            <a:avLst/>
           </a:prstGeom>
           <a:solidFill>
             <a:srgbClr val="161D3F"/>
           </a:solidFill>
           <a:ln/>
-          <a:effectLst>
-            <a:outerShdw blurRad="127000" dist="50800" dir="5400000" algn="bl" rotWithShape="0">
-              <a:srgbClr val="000000">
-                <a:alpha val="35000"/>
-              </a:srgbClr>
-            </a:outerShdw>
-          </a:effectLst>
-        </p:spPr>
-        <p:txBody>
-          <a:bodyPr/>
-          <a:lstStyle/>
-          <a:p>
-            <a:endParaRPr lang="en-SG"/>
-          </a:p>
-        </p:txBody>
-      </p:sp>
-      <p:sp>
-        <p:nvSpPr>
-          <p:cNvPr id="25" name="Shape 19"/>
-          <p:cNvSpPr/>
-          <p:nvPr/>
-        </p:nvSpPr>
-        <p:spPr>
-          <a:xfrm>
-            <a:off x="10245852" y="1965960"/>
-            <a:ext cx="685800" cy="685800"/>
-          </a:xfrm>
-          <a:prstGeom prst="ellipse">
-            <a:avLst/>
-          </a:prstGeom>
-          <a:solidFill>
-            <a:srgbClr val="1A2350"/>
-          </a:solidFill>
-          <a:ln/>
-        </p:spPr>
-        <p:txBody>
-          <a:bodyPr/>
-          <a:lstStyle/>
-          <a:p>
-            <a:endParaRPr lang="en-SG"/>
-          </a:p>
-        </p:txBody>
+        </p:spPr>
       </p:sp>
       <p:pic>
         <p:nvPicPr>
-          <p:cNvPr id="26" name="Image 4" descr="./icons/globe-cyan.png"/>
+          <p:cNvPr id="35" name="Image 6" descr="./icons/trending-pink.png">    </p:cNvPr>
           <p:cNvPicPr>
             <a:picLocks noChangeAspect="1"/>
           </p:cNvPicPr>
@@ -4015,309 +4447,6 @@
         </p:blipFill>
         <p:spPr>
           <a:xfrm>
-            <a:off x="10335006" y="2055114"/>
-            <a:ext cx="507492" cy="507492"/>
-          </a:xfrm>
-          <a:prstGeom prst="rect">
-            <a:avLst/>
-          </a:prstGeom>
-        </p:spPr>
-      </p:pic>
-      <p:sp>
-        <p:nvSpPr>
-          <p:cNvPr id="27" name="Text 20"/>
-          <p:cNvSpPr/>
-          <p:nvPr/>
-        </p:nvSpPr>
-        <p:spPr>
-          <a:xfrm>
-            <a:off x="9656064" y="2834640"/>
-            <a:ext cx="1865376" cy="457200"/>
-          </a:xfrm>
-          <a:prstGeom prst="rect">
-            <a:avLst/>
-          </a:prstGeom>
-          <a:noFill/>
-          <a:ln/>
-        </p:spPr>
-        <p:txBody>
-          <a:bodyPr wrap="square" lIns="0" tIns="0" rIns="0" bIns="0" rtlCol="0" anchor="ctr"/>
-          <a:lstStyle/>
-          <a:p>
-            <a:pPr marL="0" indent="0" algn="ctr">
-              <a:buNone/>
-            </a:pPr>
-            <a:r>
-              <a:rPr lang="en-US" sz="1400" b="1" dirty="0">
-                <a:solidFill>
-                  <a:srgbClr val="EEF2FF"/>
-                </a:solidFill>
-                <a:latin typeface="Calibri" pitchFamily="34" charset="0"/>
-                <a:ea typeface="Calibri" pitchFamily="34" charset="-122"/>
-                <a:cs typeface="Calibri" pitchFamily="34" charset="-120"/>
-              </a:rPr>
-              <a:t>Translate</a:t>
-            </a:r>
-            <a:endParaRPr lang="en-US" sz="1400" dirty="0"/>
-          </a:p>
-        </p:txBody>
-      </p:sp>
-      <p:sp>
-        <p:nvSpPr>
-          <p:cNvPr id="28" name="Text 21"/>
-          <p:cNvSpPr/>
-          <p:nvPr/>
-        </p:nvSpPr>
-        <p:spPr>
-          <a:xfrm>
-            <a:off x="9656064" y="3291840"/>
-            <a:ext cx="1865376" cy="640080"/>
-          </a:xfrm>
-          <a:prstGeom prst="rect">
-            <a:avLst/>
-          </a:prstGeom>
-          <a:noFill/>
-          <a:ln/>
-        </p:spPr>
-        <p:txBody>
-          <a:bodyPr wrap="square" lIns="0" tIns="0" rIns="0" bIns="0" rtlCol="0" anchor="ctr"/>
-          <a:lstStyle/>
-          <a:p>
-            <a:pPr marL="0" indent="0" algn="ctr">
-              <a:lnSpc>
-                <a:spcPct val="110000"/>
-              </a:lnSpc>
-              <a:buNone/>
-            </a:pPr>
-            <a:r>
-              <a:rPr lang="en-US" sz="1100" dirty="0">
-                <a:solidFill>
-                  <a:srgbClr val="9AA6C4"/>
-                </a:solidFill>
-                <a:latin typeface="Calibri" pitchFamily="34" charset="0"/>
-                <a:ea typeface="Calibri" pitchFamily="34" charset="-122"/>
-                <a:cs typeface="Calibri" pitchFamily="34" charset="-120"/>
-              </a:rPr>
-              <a:t>Into the student's own language</a:t>
-            </a:r>
-            <a:endParaRPr lang="en-US" sz="1100" dirty="0"/>
-          </a:p>
-        </p:txBody>
-      </p:sp>
-      <p:sp>
-        <p:nvSpPr>
-          <p:cNvPr id="29" name="Text 22"/>
-          <p:cNvSpPr/>
-          <p:nvPr/>
-        </p:nvSpPr>
-        <p:spPr>
-          <a:xfrm>
-            <a:off x="548640" y="4297680"/>
-            <a:ext cx="11064240" cy="457200"/>
-          </a:xfrm>
-          <a:prstGeom prst="rect">
-            <a:avLst/>
-          </a:prstGeom>
-          <a:noFill/>
-          <a:ln/>
-        </p:spPr>
-        <p:txBody>
-          <a:bodyPr wrap="square" lIns="0" tIns="0" rIns="0" bIns="0" rtlCol="0" anchor="ctr"/>
-          <a:lstStyle/>
-          <a:p>
-            <a:pPr marL="0" indent="0">
-              <a:buNone/>
-            </a:pPr>
-            <a:r>
-              <a:rPr lang="en-US" sz="1400" i="1" dirty="0">
-                <a:solidFill>
-                  <a:srgbClr val="9AA6C4"/>
-                </a:solidFill>
-                <a:latin typeface="Calibri" pitchFamily="34" charset="0"/>
-                <a:ea typeface="Calibri" pitchFamily="34" charset="-122"/>
-                <a:cs typeface="Calibri" pitchFamily="34" charset="-120"/>
-              </a:rPr>
-              <a:t>Real conversational memory: the tutor threads full history so it genuinely remembers what it already explained — no repetition, real back-and-forth.</a:t>
-            </a:r>
-            <a:endParaRPr lang="en-US" sz="1400" dirty="0"/>
-          </a:p>
-        </p:txBody>
-      </p:sp>
-      <p:sp>
-        <p:nvSpPr>
-          <p:cNvPr id="30" name="Shape 23"/>
-          <p:cNvSpPr/>
-          <p:nvPr/>
-        </p:nvSpPr>
-        <p:spPr>
-          <a:xfrm>
-            <a:off x="548640" y="5029200"/>
-            <a:ext cx="640080" cy="640080"/>
-          </a:xfrm>
-          <a:prstGeom prst="ellipse">
-            <a:avLst/>
-          </a:prstGeom>
-          <a:solidFill>
-            <a:srgbClr val="161D3F"/>
-          </a:solidFill>
-          <a:ln/>
-        </p:spPr>
-        <p:txBody>
-          <a:bodyPr/>
-          <a:lstStyle/>
-          <a:p>
-            <a:endParaRPr lang="en-SG"/>
-          </a:p>
-        </p:txBody>
-      </p:sp>
-      <p:pic>
-        <p:nvPicPr>
-          <p:cNvPr id="31" name="Image 5" descr="./icons/target-pink.png"/>
-          <p:cNvPicPr>
-            <a:picLocks noChangeAspect="1"/>
-          </p:cNvPicPr>
-          <p:nvPr/>
-        </p:nvPicPr>
-        <p:blipFill>
-          <a:blip r:embed="rId8"/>
-          <a:stretch>
-            <a:fillRect/>
-          </a:stretch>
-        </p:blipFill>
-        <p:spPr>
-          <a:xfrm>
-            <a:off x="631850" y="5112410"/>
-            <a:ext cx="473659" cy="473659"/>
-          </a:xfrm>
-          <a:prstGeom prst="rect">
-            <a:avLst/>
-          </a:prstGeom>
-        </p:spPr>
-      </p:pic>
-      <p:sp>
-        <p:nvSpPr>
-          <p:cNvPr id="32" name="Text 24"/>
-          <p:cNvSpPr/>
-          <p:nvPr/>
-        </p:nvSpPr>
-        <p:spPr>
-          <a:xfrm>
-            <a:off x="1371600" y="5010912"/>
-            <a:ext cx="4526280" cy="320040"/>
-          </a:xfrm>
-          <a:prstGeom prst="rect">
-            <a:avLst/>
-          </a:prstGeom>
-          <a:noFill/>
-          <a:ln/>
-        </p:spPr>
-        <p:txBody>
-          <a:bodyPr wrap="square" lIns="0" tIns="0" rIns="0" bIns="0" rtlCol="0" anchor="ctr"/>
-          <a:lstStyle/>
-          <a:p>
-            <a:pPr marL="0" indent="0">
-              <a:buNone/>
-            </a:pPr>
-            <a:r>
-              <a:rPr lang="en-US" sz="1400" b="1" dirty="0">
-                <a:solidFill>
-                  <a:srgbClr val="EEF2FF"/>
-                </a:solidFill>
-                <a:latin typeface="Calibri" pitchFamily="34" charset="0"/>
-                <a:ea typeface="Calibri" pitchFamily="34" charset="-122"/>
-                <a:cs typeface="Calibri" pitchFamily="34" charset="-120"/>
-              </a:rPr>
-              <a:t>Drag-and-feel physics</a:t>
-            </a:r>
-            <a:endParaRPr lang="en-US" sz="1400" dirty="0"/>
-          </a:p>
-        </p:txBody>
-      </p:sp>
-      <p:sp>
-        <p:nvSpPr>
-          <p:cNvPr id="33" name="Text 25"/>
-          <p:cNvSpPr/>
-          <p:nvPr/>
-        </p:nvSpPr>
-        <p:spPr>
-          <a:xfrm>
-            <a:off x="1371600" y="5321808"/>
-            <a:ext cx="4526280" cy="777240"/>
-          </a:xfrm>
-          <a:prstGeom prst="rect">
-            <a:avLst/>
-          </a:prstGeom>
-          <a:noFill/>
-          <a:ln/>
-        </p:spPr>
-        <p:txBody>
-          <a:bodyPr wrap="square" lIns="0" tIns="0" rIns="0" bIns="0" rtlCol="0" anchor="ctr"/>
-          <a:lstStyle/>
-          <a:p>
-            <a:pPr marL="0" indent="0">
-              <a:lnSpc>
-                <a:spcPct val="115000"/>
-              </a:lnSpc>
-              <a:buNone/>
-            </a:pPr>
-            <a:r>
-              <a:rPr lang="en-US" sz="1200" dirty="0">
-                <a:solidFill>
-                  <a:srgbClr val="9AA6C4"/>
-                </a:solidFill>
-                <a:latin typeface="Calibri" pitchFamily="34" charset="0"/>
-                <a:ea typeface="Calibri" pitchFamily="34" charset="-122"/>
-                <a:cs typeface="Calibri" pitchFamily="34" charset="-120"/>
-              </a:rPr>
-              <a:t>An interactive seesaw simulation makes moments of a force tangible — drag weights, watch clockwise/anticlockwise balance live.</a:t>
-            </a:r>
-            <a:endParaRPr lang="en-US" sz="1200" dirty="0"/>
-          </a:p>
-        </p:txBody>
-      </p:sp>
-      <p:sp>
-        <p:nvSpPr>
-          <p:cNvPr id="34" name="Shape 26"/>
-          <p:cNvSpPr/>
-          <p:nvPr/>
-        </p:nvSpPr>
-        <p:spPr>
-          <a:xfrm>
-            <a:off x="6263640" y="5029200"/>
-            <a:ext cx="640080" cy="640080"/>
-          </a:xfrm>
-          <a:prstGeom prst="ellipse">
-            <a:avLst/>
-          </a:prstGeom>
-          <a:solidFill>
-            <a:srgbClr val="161D3F"/>
-          </a:solidFill>
-          <a:ln/>
-        </p:spPr>
-        <p:txBody>
-          <a:bodyPr/>
-          <a:lstStyle/>
-          <a:p>
-            <a:endParaRPr lang="en-SG"/>
-          </a:p>
-        </p:txBody>
-      </p:sp>
-      <p:pic>
-        <p:nvPicPr>
-          <p:cNvPr id="35" name="Image 6" descr="./icons/trending-pink.png"/>
-          <p:cNvPicPr>
-            <a:picLocks noChangeAspect="1"/>
-          </p:cNvPicPr>
-          <p:nvPr/>
-        </p:nvPicPr>
-        <p:blipFill>
-          <a:blip r:embed="rId9"/>
-          <a:stretch>
-            <a:fillRect/>
-          </a:stretch>
-        </p:blipFill>
-        <p:spPr>
-          <a:xfrm>
             <a:off x="6346850" y="5112410"/>
             <a:ext cx="473659" cy="473659"/>
           </a:xfrm>
@@ -4347,7 +4476,7 @@
           <a:bodyPr wrap="square" lIns="0" tIns="0" rIns="0" bIns="0" rtlCol="0" anchor="ctr"/>
           <a:lstStyle/>
           <a:p>
-            <a:pPr marL="0" indent="0">
+            <a:pPr indent="0" marL="0">
               <a:buNone/>
             </a:pPr>
             <a:r>
@@ -4386,7 +4515,7 @@
           <a:bodyPr wrap="square" lIns="0" tIns="0" rIns="0" bIns="0" rtlCol="0" anchor="ctr"/>
           <a:lstStyle/>
           <a:p>
-            <a:pPr marL="0" indent="0">
+            <a:pPr indent="0" marL="0">
               <a:lnSpc>
                 <a:spcPct val="115000"/>
               </a:lnSpc>
@@ -4423,7 +4552,6 @@
         <a:solidFill>
           <a:srgbClr val="0B1020"/>
         </a:solidFill>
-        <a:effectLst/>
       </p:bgPr>
     </p:bg>
     <p:spTree>
@@ -4461,11 +4589,11 @@
           <a:bodyPr wrap="square" lIns="0" tIns="0" rIns="0" bIns="0" rtlCol="0" anchor="ctr"/>
           <a:lstStyle/>
           <a:p>
-            <a:pPr marL="0" indent="0" algn="l">
-              <a:buNone/>
-            </a:pPr>
-            <a:r>
-              <a:rPr lang="en-US" sz="1300" b="1" kern="0" spc="200" dirty="0">
+            <a:pPr algn="l" indent="0" marL="0">
+              <a:buNone/>
+            </a:pPr>
+            <a:r>
+              <a:rPr lang="en-US" sz="1300" b="1" spc="200" kern="0" dirty="0">
                 <a:solidFill>
                   <a:srgbClr val="22D3EE"/>
                 </a:solidFill>
@@ -4500,7 +4628,7 @@
           <a:bodyPr wrap="square" lIns="0" tIns="0" rIns="0" bIns="0" rtlCol="0" anchor="ctr"/>
           <a:lstStyle/>
           <a:p>
-            <a:pPr marL="0" indent="0">
+            <a:pPr indent="0" marL="0">
               <a:buNone/>
             </a:pPr>
             <a:r>
@@ -4539,20 +4667,13 @@
           </a:solidFill>
           <a:ln/>
           <a:effectLst>
-            <a:outerShdw blurRad="127000" dist="50800" dir="5400000" algn="bl" rotWithShape="0">
+            <a:outerShdw sx="100000" sy="100000" kx="0" ky="0" algn="bl" rotWithShape="0" blurRad="127000" dist="50800" dir="5400000">
               <a:srgbClr val="000000">
                 <a:alpha val="35000"/>
               </a:srgbClr>
             </a:outerShdw>
           </a:effectLst>
         </p:spPr>
-        <p:txBody>
-          <a:bodyPr/>
-          <a:lstStyle/>
-          <a:p>
-            <a:endParaRPr lang="en-SG"/>
-          </a:p>
-        </p:txBody>
       </p:sp>
       <p:sp>
         <p:nvSpPr>
@@ -4573,17 +4694,318 @@
           </a:solidFill>
           <a:ln/>
         </p:spPr>
-        <p:txBody>
-          <a:bodyPr/>
-          <a:lstStyle/>
-          <a:p>
-            <a:endParaRPr lang="en-SG"/>
-          </a:p>
-        </p:txBody>
       </p:sp>
       <p:pic>
         <p:nvPicPr>
-          <p:cNvPr id="6" name="Image 0" descr="./icons/database-indigo.png"/>
+          <p:cNvPr id="6" name="Image 0" descr="./icons/database-indigo.png">    </p:cNvPr>
+          <p:cNvPicPr>
+            <a:picLocks noChangeAspect="1"/>
+          </p:cNvPicPr>
+          <p:nvPr/>
+        </p:nvPicPr>
+        <p:blipFill>
+          <a:blip r:embed="rId1"/>
+          <a:stretch>
+            <a:fillRect/>
+          </a:stretch>
+        </p:blipFill>
+        <p:spPr>
+          <a:xfrm>
+            <a:off x="912114" y="2055114"/>
+            <a:ext cx="507492" cy="507492"/>
+          </a:xfrm>
+          <a:prstGeom prst="rect">
+            <a:avLst/>
+          </a:prstGeom>
+        </p:spPr>
+      </p:pic>
+      <p:sp>
+        <p:nvSpPr>
+          <p:cNvPr id="7" name="Text 4"/>
+          <p:cNvSpPr/>
+          <p:nvPr/>
+        </p:nvSpPr>
+        <p:spPr>
+          <a:xfrm>
+            <a:off x="1691640" y="1947672"/>
+            <a:ext cx="3931920" cy="365760"/>
+          </a:xfrm>
+          <a:prstGeom prst="rect">
+            <a:avLst/>
+          </a:prstGeom>
+          <a:noFill/>
+          <a:ln/>
+        </p:spPr>
+        <p:txBody>
+          <a:bodyPr wrap="square" lIns="0" tIns="0" rIns="0" bIns="0" rtlCol="0" anchor="ctr"/>
+          <a:lstStyle/>
+          <a:p>
+            <a:pPr indent="0" marL="0">
+              <a:buNone/>
+            </a:pPr>
+            <a:r>
+              <a:rPr lang="en-US" sz="1550" b="1" dirty="0">
+                <a:solidFill>
+                  <a:srgbClr val="EEF2FF"/>
+                </a:solidFill>
+                <a:latin typeface="Calibri" pitchFamily="34" charset="0"/>
+                <a:ea typeface="Calibri" pitchFamily="34" charset="-122"/>
+                <a:cs typeface="Calibri" pitchFamily="34" charset="-120"/>
+              </a:rPr>
+              <a:t>Vectorless, long-context RAG</a:t>
+            </a:r>
+            <a:endParaRPr lang="en-US" sz="1550" dirty="0"/>
+          </a:p>
+        </p:txBody>
+      </p:sp>
+      <p:sp>
+        <p:nvSpPr>
+          <p:cNvPr id="8" name="Text 5"/>
+          <p:cNvSpPr/>
+          <p:nvPr/>
+        </p:nvSpPr>
+        <p:spPr>
+          <a:xfrm>
+            <a:off x="822960" y="2697480"/>
+            <a:ext cx="4800600" cy="868680"/>
+          </a:xfrm>
+          <a:prstGeom prst="rect">
+            <a:avLst/>
+          </a:prstGeom>
+          <a:noFill/>
+          <a:ln/>
+        </p:spPr>
+        <p:txBody>
+          <a:bodyPr wrap="square" lIns="0" tIns="0" rIns="0" bIns="0" rtlCol="0" anchor="ctr"/>
+          <a:lstStyle/>
+          <a:p>
+            <a:pPr indent="0" marL="0">
+              <a:lnSpc>
+                <a:spcPct val="118000"/>
+              </a:lnSpc>
+              <a:buNone/>
+            </a:pPr>
+            <a:r>
+              <a:rPr lang="en-US" sz="1200" dirty="0">
+                <a:solidFill>
+                  <a:srgbClr val="9AA6C4"/>
+                </a:solidFill>
+                <a:latin typeface="Calibri" pitchFamily="34" charset="0"/>
+                <a:ea typeface="Calibri" pitchFamily="34" charset="-122"/>
+                <a:cs typeface="Calibri" pitchFamily="34" charset="-120"/>
+              </a:rPr>
+              <a:t>For a bounded class corpus, the full approved material is injected directly into context — no embedding drift, maximum accuracy at classroom scale.</a:t>
+            </a:r>
+            <a:endParaRPr lang="en-US" sz="1200" dirty="0"/>
+          </a:p>
+        </p:txBody>
+      </p:sp>
+      <p:sp>
+        <p:nvSpPr>
+          <p:cNvPr id="9" name="Shape 6"/>
+          <p:cNvSpPr/>
+          <p:nvPr/>
+        </p:nvSpPr>
+        <p:spPr>
+          <a:xfrm>
+            <a:off x="6263640" y="1691640"/>
+            <a:ext cx="5349240" cy="1965960"/>
+          </a:xfrm>
+          <a:prstGeom prst="roundRect">
+            <a:avLst>
+              <a:gd name="adj" fmla="val 5581"/>
+            </a:avLst>
+          </a:prstGeom>
+          <a:solidFill>
+            <a:srgbClr val="161D3F"/>
+          </a:solidFill>
+          <a:ln/>
+          <a:effectLst>
+            <a:outerShdw sx="100000" sy="100000" kx="0" ky="0" algn="bl" rotWithShape="0" blurRad="127000" dist="50800" dir="5400000">
+              <a:srgbClr val="000000">
+                <a:alpha val="35000"/>
+              </a:srgbClr>
+            </a:outerShdw>
+          </a:effectLst>
+        </p:spPr>
+      </p:sp>
+      <p:sp>
+        <p:nvSpPr>
+          <p:cNvPr id="10" name="Shape 7"/>
+          <p:cNvSpPr/>
+          <p:nvPr/>
+        </p:nvSpPr>
+        <p:spPr>
+          <a:xfrm>
+            <a:off x="6537960" y="1965960"/>
+            <a:ext cx="685800" cy="685800"/>
+          </a:xfrm>
+          <a:prstGeom prst="ellipse">
+            <a:avLst/>
+          </a:prstGeom>
+          <a:solidFill>
+            <a:srgbClr val="1A2350"/>
+          </a:solidFill>
+          <a:ln/>
+        </p:spPr>
+      </p:sp>
+      <p:pic>
+        <p:nvPicPr>
+          <p:cNvPr id="11" name="Image 1" descr="./icons/cpu-cyan.png">    </p:cNvPr>
+          <p:cNvPicPr>
+            <a:picLocks noChangeAspect="1"/>
+          </p:cNvPicPr>
+          <p:nvPr/>
+        </p:nvPicPr>
+        <p:blipFill>
+          <a:blip r:embed="rId2"/>
+          <a:stretch>
+            <a:fillRect/>
+          </a:stretch>
+        </p:blipFill>
+        <p:spPr>
+          <a:xfrm>
+            <a:off x="6627114" y="2055114"/>
+            <a:ext cx="507492" cy="507492"/>
+          </a:xfrm>
+          <a:prstGeom prst="rect">
+            <a:avLst/>
+          </a:prstGeom>
+        </p:spPr>
+      </p:pic>
+      <p:sp>
+        <p:nvSpPr>
+          <p:cNvPr id="12" name="Text 8"/>
+          <p:cNvSpPr/>
+          <p:nvPr/>
+        </p:nvSpPr>
+        <p:spPr>
+          <a:xfrm>
+            <a:off x="7406640" y="1947672"/>
+            <a:ext cx="3931920" cy="365760"/>
+          </a:xfrm>
+          <a:prstGeom prst="rect">
+            <a:avLst/>
+          </a:prstGeom>
+          <a:noFill/>
+          <a:ln/>
+        </p:spPr>
+        <p:txBody>
+          <a:bodyPr wrap="square" lIns="0" tIns="0" rIns="0" bIns="0" rtlCol="0" anchor="ctr"/>
+          <a:lstStyle/>
+          <a:p>
+            <a:pPr indent="0" marL="0">
+              <a:buNone/>
+            </a:pPr>
+            <a:r>
+              <a:rPr lang="en-US" sz="1550" b="1" dirty="0">
+                <a:solidFill>
+                  <a:srgbClr val="EEF2FF"/>
+                </a:solidFill>
+                <a:latin typeface="Calibri" pitchFamily="34" charset="0"/>
+                <a:ea typeface="Calibri" pitchFamily="34" charset="-122"/>
+                <a:cs typeface="Calibri" pitchFamily="34" charset="-120"/>
+              </a:rPr>
+              <a:t>Deterministic + probabilistic hybrid</a:t>
+            </a:r>
+            <a:endParaRPr lang="en-US" sz="1550" dirty="0"/>
+          </a:p>
+        </p:txBody>
+      </p:sp>
+      <p:sp>
+        <p:nvSpPr>
+          <p:cNvPr id="13" name="Text 9"/>
+          <p:cNvSpPr/>
+          <p:nvPr/>
+        </p:nvSpPr>
+        <p:spPr>
+          <a:xfrm>
+            <a:off x="6537960" y="2697480"/>
+            <a:ext cx="4800600" cy="868680"/>
+          </a:xfrm>
+          <a:prstGeom prst="rect">
+            <a:avLst/>
+          </a:prstGeom>
+          <a:noFill/>
+          <a:ln/>
+        </p:spPr>
+        <p:txBody>
+          <a:bodyPr wrap="square" lIns="0" tIns="0" rIns="0" bIns="0" rtlCol="0" anchor="ctr"/>
+          <a:lstStyle/>
+          <a:p>
+            <a:pPr indent="0" marL="0">
+              <a:lnSpc>
+                <a:spcPct val="118000"/>
+              </a:lnSpc>
+              <a:buNone/>
+            </a:pPr>
+            <a:r>
+              <a:rPr lang="en-US" sz="1200" dirty="0">
+                <a:solidFill>
+                  <a:srgbClr val="9AA6C4"/>
+                </a:solidFill>
+                <a:latin typeface="Calibri" pitchFamily="34" charset="0"/>
+                <a:ea typeface="Calibri" pitchFamily="34" charset="-122"/>
+                <a:cs typeface="Calibri" pitchFamily="34" charset="-120"/>
+              </a:rPr>
+              <a:t>Numbers and multiple-choice are graded by rule-based code, unit-tested. The LLM is reserved only for explanation, questions, and translation.</a:t>
+            </a:r>
+            <a:endParaRPr lang="en-US" sz="1200" dirty="0"/>
+          </a:p>
+        </p:txBody>
+      </p:sp>
+      <p:sp>
+        <p:nvSpPr>
+          <p:cNvPr id="14" name="Shape 10"/>
+          <p:cNvSpPr/>
+          <p:nvPr/>
+        </p:nvSpPr>
+        <p:spPr>
+          <a:xfrm>
+            <a:off x="548640" y="3977640"/>
+            <a:ext cx="5349240" cy="1965960"/>
+          </a:xfrm>
+          <a:prstGeom prst="roundRect">
+            <a:avLst>
+              <a:gd name="adj" fmla="val 5581"/>
+            </a:avLst>
+          </a:prstGeom>
+          <a:solidFill>
+            <a:srgbClr val="161D3F"/>
+          </a:solidFill>
+          <a:ln/>
+          <a:effectLst>
+            <a:outerShdw sx="100000" sy="100000" kx="0" ky="0" algn="bl" rotWithShape="0" blurRad="127000" dist="50800" dir="5400000">
+              <a:srgbClr val="000000">
+                <a:alpha val="35000"/>
+              </a:srgbClr>
+            </a:outerShdw>
+          </a:effectLst>
+        </p:spPr>
+      </p:sp>
+      <p:sp>
+        <p:nvSpPr>
+          <p:cNvPr id="15" name="Shape 11"/>
+          <p:cNvSpPr/>
+          <p:nvPr/>
+        </p:nvSpPr>
+        <p:spPr>
+          <a:xfrm>
+            <a:off x="822960" y="4251960"/>
+            <a:ext cx="685800" cy="685800"/>
+          </a:xfrm>
+          <a:prstGeom prst="ellipse">
+            <a:avLst/>
+          </a:prstGeom>
+          <a:solidFill>
+            <a:srgbClr val="1A2350"/>
+          </a:solidFill>
+          <a:ln/>
+        </p:spPr>
+      </p:sp>
+      <p:pic>
+        <p:nvPicPr>
+          <p:cNvPr id="16" name="Image 2" descr="./icons/repeat-pink.png">    </p:cNvPr>
           <p:cNvPicPr>
             <a:picLocks noChangeAspect="1"/>
           </p:cNvPicPr>
@@ -4597,7 +5019,7 @@
         </p:blipFill>
         <p:spPr>
           <a:xfrm>
-            <a:off x="912114" y="2055114"/>
+            <a:off x="912114" y="4341114"/>
             <a:ext cx="507492" cy="507492"/>
           </a:xfrm>
           <a:prstGeom prst="rect">
@@ -4607,13 +5029,13 @@
       </p:pic>
       <p:sp>
         <p:nvSpPr>
-          <p:cNvPr id="7" name="Text 4"/>
-          <p:cNvSpPr/>
-          <p:nvPr/>
-        </p:nvSpPr>
-        <p:spPr>
-          <a:xfrm>
-            <a:off x="1691640" y="1947672"/>
+          <p:cNvPr id="17" name="Text 12"/>
+          <p:cNvSpPr/>
+          <p:nvPr/>
+        </p:nvSpPr>
+        <p:spPr>
+          <a:xfrm>
+            <a:off x="1691640" y="4233672"/>
             <a:ext cx="3931920" cy="365760"/>
           </a:xfrm>
           <a:prstGeom prst="rect">
@@ -4626,7 +5048,7 @@
           <a:bodyPr wrap="square" lIns="0" tIns="0" rIns="0" bIns="0" rtlCol="0" anchor="ctr"/>
           <a:lstStyle/>
           <a:p>
-            <a:pPr marL="0" indent="0">
+            <a:pPr indent="0" marL="0">
               <a:buNone/>
             </a:pPr>
             <a:r>
@@ -4638,7 +5060,7 @@
                 <a:ea typeface="Calibri" pitchFamily="34" charset="-122"/>
                 <a:cs typeface="Calibri" pitchFamily="34" charset="-120"/>
               </a:rPr>
-              <a:t>Vectorless, long-context RAG</a:t>
+              <a:t>Real conversational memory</a:t>
             </a:r>
             <a:endParaRPr lang="en-US" sz="1550" dirty="0"/>
           </a:p>
@@ -4646,13 +5068,13 @@
       </p:sp>
       <p:sp>
         <p:nvSpPr>
-          <p:cNvPr id="8" name="Text 5"/>
-          <p:cNvSpPr/>
-          <p:nvPr/>
-        </p:nvSpPr>
-        <p:spPr>
-          <a:xfrm>
-            <a:off x="822960" y="2697480"/>
+          <p:cNvPr id="18" name="Text 13"/>
+          <p:cNvSpPr/>
+          <p:nvPr/>
+        </p:nvSpPr>
+        <p:spPr>
+          <a:xfrm>
+            <a:off x="822960" y="4983480"/>
             <a:ext cx="4800600" cy="868680"/>
           </a:xfrm>
           <a:prstGeom prst="rect">
@@ -4665,7 +5087,7 @@
           <a:bodyPr wrap="square" lIns="0" tIns="0" rIns="0" bIns="0" rtlCol="0" anchor="ctr"/>
           <a:lstStyle/>
           <a:p>
-            <a:pPr marL="0" indent="0">
+            <a:pPr indent="0" marL="0">
               <a:lnSpc>
                 <a:spcPct val="118000"/>
               </a:lnSpc>
@@ -4680,7 +5102,7 @@
                 <a:ea typeface="Calibri" pitchFamily="34" charset="-122"/>
                 <a:cs typeface="Calibri" pitchFamily="34" charset="-120"/>
               </a:rPr>
-              <a:t>For a bounded class corpus, the full approved material is injected directly into context — no embedding drift, maximum accuracy at classroom scale.</a:t>
+              <a:t>Full history threads on every turn so the tutor genuinely remembers what it already said — no repetition, real Socratic back-and-forth.</a:t>
             </a:r>
             <a:endParaRPr lang="en-US" sz="1200" dirty="0"/>
           </a:p>
@@ -4688,13 +5110,13 @@
       </p:sp>
       <p:sp>
         <p:nvSpPr>
-          <p:cNvPr id="9" name="Shape 6"/>
-          <p:cNvSpPr/>
-          <p:nvPr/>
-        </p:nvSpPr>
-        <p:spPr>
-          <a:xfrm>
-            <a:off x="6263640" y="1691640"/>
+          <p:cNvPr id="19" name="Shape 14"/>
+          <p:cNvSpPr/>
+          <p:nvPr/>
+        </p:nvSpPr>
+        <p:spPr>
+          <a:xfrm>
+            <a:off x="6263640" y="3977640"/>
             <a:ext cx="5349240" cy="1965960"/>
           </a:xfrm>
           <a:prstGeom prst="roundRect">
@@ -4707,30 +5129,23 @@
           </a:solidFill>
           <a:ln/>
           <a:effectLst>
-            <a:outerShdw blurRad="127000" dist="50800" dir="5400000" algn="bl" rotWithShape="0">
+            <a:outerShdw sx="100000" sy="100000" kx="0" ky="0" algn="bl" rotWithShape="0" blurRad="127000" dist="50800" dir="5400000">
               <a:srgbClr val="000000">
                 <a:alpha val="35000"/>
               </a:srgbClr>
             </a:outerShdw>
           </a:effectLst>
         </p:spPr>
-        <p:txBody>
-          <a:bodyPr/>
-          <a:lstStyle/>
-          <a:p>
-            <a:endParaRPr lang="en-SG"/>
-          </a:p>
-        </p:txBody>
-      </p:sp>
-      <p:sp>
-        <p:nvSpPr>
-          <p:cNvPr id="10" name="Shape 7"/>
-          <p:cNvSpPr/>
-          <p:nvPr/>
-        </p:nvSpPr>
-        <p:spPr>
-          <a:xfrm>
-            <a:off x="6537960" y="1965960"/>
+      </p:sp>
+      <p:sp>
+        <p:nvSpPr>
+          <p:cNvPr id="20" name="Shape 15"/>
+          <p:cNvSpPr/>
+          <p:nvPr/>
+        </p:nvSpPr>
+        <p:spPr>
+          <a:xfrm>
+            <a:off x="6537960" y="4251960"/>
             <a:ext cx="685800" cy="685800"/>
           </a:xfrm>
           <a:prstGeom prst="ellipse">
@@ -4741,17 +5156,10 @@
           </a:solidFill>
           <a:ln/>
         </p:spPr>
-        <p:txBody>
-          <a:bodyPr/>
-          <a:lstStyle/>
-          <a:p>
-            <a:endParaRPr lang="en-SG"/>
-          </a:p>
-        </p:txBody>
       </p:sp>
       <p:pic>
         <p:nvPicPr>
-          <p:cNvPr id="11" name="Image 1" descr="./icons/cpu-cyan.png"/>
+          <p:cNvPr id="21" name="Image 3" descr="./icons/globe-indigo.png">    </p:cNvPr>
           <p:cNvPicPr>
             <a:picLocks noChangeAspect="1"/>
           </p:cNvPicPr>
@@ -4765,342 +5173,6 @@
         </p:blipFill>
         <p:spPr>
           <a:xfrm>
-            <a:off x="6627114" y="2055114"/>
-            <a:ext cx="507492" cy="507492"/>
-          </a:xfrm>
-          <a:prstGeom prst="rect">
-            <a:avLst/>
-          </a:prstGeom>
-        </p:spPr>
-      </p:pic>
-      <p:sp>
-        <p:nvSpPr>
-          <p:cNvPr id="12" name="Text 8"/>
-          <p:cNvSpPr/>
-          <p:nvPr/>
-        </p:nvSpPr>
-        <p:spPr>
-          <a:xfrm>
-            <a:off x="7406640" y="1947672"/>
-            <a:ext cx="3931920" cy="365760"/>
-          </a:xfrm>
-          <a:prstGeom prst="rect">
-            <a:avLst/>
-          </a:prstGeom>
-          <a:noFill/>
-          <a:ln/>
-        </p:spPr>
-        <p:txBody>
-          <a:bodyPr wrap="square" lIns="0" tIns="0" rIns="0" bIns="0" rtlCol="0" anchor="ctr"/>
-          <a:lstStyle/>
-          <a:p>
-            <a:pPr marL="0" indent="0">
-              <a:buNone/>
-            </a:pPr>
-            <a:r>
-              <a:rPr lang="en-US" sz="1550" b="1" dirty="0">
-                <a:solidFill>
-                  <a:srgbClr val="EEF2FF"/>
-                </a:solidFill>
-                <a:latin typeface="Calibri" pitchFamily="34" charset="0"/>
-                <a:ea typeface="Calibri" pitchFamily="34" charset="-122"/>
-                <a:cs typeface="Calibri" pitchFamily="34" charset="-120"/>
-              </a:rPr>
-              <a:t>Deterministic + probabilistic hybrid</a:t>
-            </a:r>
-            <a:endParaRPr lang="en-US" sz="1550" dirty="0"/>
-          </a:p>
-        </p:txBody>
-      </p:sp>
-      <p:sp>
-        <p:nvSpPr>
-          <p:cNvPr id="13" name="Text 9"/>
-          <p:cNvSpPr/>
-          <p:nvPr/>
-        </p:nvSpPr>
-        <p:spPr>
-          <a:xfrm>
-            <a:off x="6537960" y="2697480"/>
-            <a:ext cx="4800600" cy="868680"/>
-          </a:xfrm>
-          <a:prstGeom prst="rect">
-            <a:avLst/>
-          </a:prstGeom>
-          <a:noFill/>
-          <a:ln/>
-        </p:spPr>
-        <p:txBody>
-          <a:bodyPr wrap="square" lIns="0" tIns="0" rIns="0" bIns="0" rtlCol="0" anchor="ctr"/>
-          <a:lstStyle/>
-          <a:p>
-            <a:pPr marL="0" indent="0">
-              <a:lnSpc>
-                <a:spcPct val="118000"/>
-              </a:lnSpc>
-              <a:buNone/>
-            </a:pPr>
-            <a:r>
-              <a:rPr lang="en-US" sz="1200" dirty="0">
-                <a:solidFill>
-                  <a:srgbClr val="9AA6C4"/>
-                </a:solidFill>
-                <a:latin typeface="Calibri" pitchFamily="34" charset="0"/>
-                <a:ea typeface="Calibri" pitchFamily="34" charset="-122"/>
-                <a:cs typeface="Calibri" pitchFamily="34" charset="-120"/>
-              </a:rPr>
-              <a:t>Numbers and multiple-choice are graded by rule-based code, unit-tested. The LLM is reserved only for explanation, questions, and translation.</a:t>
-            </a:r>
-            <a:endParaRPr lang="en-US" sz="1200" dirty="0"/>
-          </a:p>
-        </p:txBody>
-      </p:sp>
-      <p:sp>
-        <p:nvSpPr>
-          <p:cNvPr id="14" name="Shape 10"/>
-          <p:cNvSpPr/>
-          <p:nvPr/>
-        </p:nvSpPr>
-        <p:spPr>
-          <a:xfrm>
-            <a:off x="548640" y="3977640"/>
-            <a:ext cx="5349240" cy="1965960"/>
-          </a:xfrm>
-          <a:prstGeom prst="roundRect">
-            <a:avLst>
-              <a:gd name="adj" fmla="val 5581"/>
-            </a:avLst>
-          </a:prstGeom>
-          <a:solidFill>
-            <a:srgbClr val="161D3F"/>
-          </a:solidFill>
-          <a:ln/>
-          <a:effectLst>
-            <a:outerShdw blurRad="127000" dist="50800" dir="5400000" algn="bl" rotWithShape="0">
-              <a:srgbClr val="000000">
-                <a:alpha val="35000"/>
-              </a:srgbClr>
-            </a:outerShdw>
-          </a:effectLst>
-        </p:spPr>
-        <p:txBody>
-          <a:bodyPr/>
-          <a:lstStyle/>
-          <a:p>
-            <a:endParaRPr lang="en-SG"/>
-          </a:p>
-        </p:txBody>
-      </p:sp>
-      <p:sp>
-        <p:nvSpPr>
-          <p:cNvPr id="15" name="Shape 11"/>
-          <p:cNvSpPr/>
-          <p:nvPr/>
-        </p:nvSpPr>
-        <p:spPr>
-          <a:xfrm>
-            <a:off x="822960" y="4251960"/>
-            <a:ext cx="685800" cy="685800"/>
-          </a:xfrm>
-          <a:prstGeom prst="ellipse">
-            <a:avLst/>
-          </a:prstGeom>
-          <a:solidFill>
-            <a:srgbClr val="1A2350"/>
-          </a:solidFill>
-          <a:ln/>
-        </p:spPr>
-        <p:txBody>
-          <a:bodyPr/>
-          <a:lstStyle/>
-          <a:p>
-            <a:endParaRPr lang="en-SG"/>
-          </a:p>
-        </p:txBody>
-      </p:sp>
-      <p:pic>
-        <p:nvPicPr>
-          <p:cNvPr id="16" name="Image 2" descr="./icons/repeat-pink.png"/>
-          <p:cNvPicPr>
-            <a:picLocks noChangeAspect="1"/>
-          </p:cNvPicPr>
-          <p:nvPr/>
-        </p:nvPicPr>
-        <p:blipFill>
-          <a:blip r:embed="rId5"/>
-          <a:stretch>
-            <a:fillRect/>
-          </a:stretch>
-        </p:blipFill>
-        <p:spPr>
-          <a:xfrm>
-            <a:off x="912114" y="4341114"/>
-            <a:ext cx="507492" cy="507492"/>
-          </a:xfrm>
-          <a:prstGeom prst="rect">
-            <a:avLst/>
-          </a:prstGeom>
-        </p:spPr>
-      </p:pic>
-      <p:sp>
-        <p:nvSpPr>
-          <p:cNvPr id="17" name="Text 12"/>
-          <p:cNvSpPr/>
-          <p:nvPr/>
-        </p:nvSpPr>
-        <p:spPr>
-          <a:xfrm>
-            <a:off x="1691640" y="4233672"/>
-            <a:ext cx="3931920" cy="365760"/>
-          </a:xfrm>
-          <a:prstGeom prst="rect">
-            <a:avLst/>
-          </a:prstGeom>
-          <a:noFill/>
-          <a:ln/>
-        </p:spPr>
-        <p:txBody>
-          <a:bodyPr wrap="square" lIns="0" tIns="0" rIns="0" bIns="0" rtlCol="0" anchor="ctr"/>
-          <a:lstStyle/>
-          <a:p>
-            <a:pPr marL="0" indent="0">
-              <a:buNone/>
-            </a:pPr>
-            <a:r>
-              <a:rPr lang="en-US" sz="1550" b="1" dirty="0">
-                <a:solidFill>
-                  <a:srgbClr val="EEF2FF"/>
-                </a:solidFill>
-                <a:latin typeface="Calibri" pitchFamily="34" charset="0"/>
-                <a:ea typeface="Calibri" pitchFamily="34" charset="-122"/>
-                <a:cs typeface="Calibri" pitchFamily="34" charset="-120"/>
-              </a:rPr>
-              <a:t>Real conversational memory</a:t>
-            </a:r>
-            <a:endParaRPr lang="en-US" sz="1550" dirty="0"/>
-          </a:p>
-        </p:txBody>
-      </p:sp>
-      <p:sp>
-        <p:nvSpPr>
-          <p:cNvPr id="18" name="Text 13"/>
-          <p:cNvSpPr/>
-          <p:nvPr/>
-        </p:nvSpPr>
-        <p:spPr>
-          <a:xfrm>
-            <a:off x="822960" y="4983480"/>
-            <a:ext cx="4800600" cy="868680"/>
-          </a:xfrm>
-          <a:prstGeom prst="rect">
-            <a:avLst/>
-          </a:prstGeom>
-          <a:noFill/>
-          <a:ln/>
-        </p:spPr>
-        <p:txBody>
-          <a:bodyPr wrap="square" lIns="0" tIns="0" rIns="0" bIns="0" rtlCol="0" anchor="ctr"/>
-          <a:lstStyle/>
-          <a:p>
-            <a:pPr marL="0" indent="0">
-              <a:lnSpc>
-                <a:spcPct val="118000"/>
-              </a:lnSpc>
-              <a:buNone/>
-            </a:pPr>
-            <a:r>
-              <a:rPr lang="en-US" sz="1200" dirty="0">
-                <a:solidFill>
-                  <a:srgbClr val="9AA6C4"/>
-                </a:solidFill>
-                <a:latin typeface="Calibri" pitchFamily="34" charset="0"/>
-                <a:ea typeface="Calibri" pitchFamily="34" charset="-122"/>
-                <a:cs typeface="Calibri" pitchFamily="34" charset="-120"/>
-              </a:rPr>
-              <a:t>Full history threads on every turn so the tutor genuinely remembers what it already said — no repetition, real Socratic back-and-forth.</a:t>
-            </a:r>
-            <a:endParaRPr lang="en-US" sz="1200" dirty="0"/>
-          </a:p>
-        </p:txBody>
-      </p:sp>
-      <p:sp>
-        <p:nvSpPr>
-          <p:cNvPr id="19" name="Shape 14"/>
-          <p:cNvSpPr/>
-          <p:nvPr/>
-        </p:nvSpPr>
-        <p:spPr>
-          <a:xfrm>
-            <a:off x="6263640" y="3977640"/>
-            <a:ext cx="5349240" cy="1965960"/>
-          </a:xfrm>
-          <a:prstGeom prst="roundRect">
-            <a:avLst>
-              <a:gd name="adj" fmla="val 5581"/>
-            </a:avLst>
-          </a:prstGeom>
-          <a:solidFill>
-            <a:srgbClr val="161D3F"/>
-          </a:solidFill>
-          <a:ln/>
-          <a:effectLst>
-            <a:outerShdw blurRad="127000" dist="50800" dir="5400000" algn="bl" rotWithShape="0">
-              <a:srgbClr val="000000">
-                <a:alpha val="35000"/>
-              </a:srgbClr>
-            </a:outerShdw>
-          </a:effectLst>
-        </p:spPr>
-        <p:txBody>
-          <a:bodyPr/>
-          <a:lstStyle/>
-          <a:p>
-            <a:endParaRPr lang="en-SG"/>
-          </a:p>
-        </p:txBody>
-      </p:sp>
-      <p:sp>
-        <p:nvSpPr>
-          <p:cNvPr id="20" name="Shape 15"/>
-          <p:cNvSpPr/>
-          <p:nvPr/>
-        </p:nvSpPr>
-        <p:spPr>
-          <a:xfrm>
-            <a:off x="6537960" y="4251960"/>
-            <a:ext cx="685800" cy="685800"/>
-          </a:xfrm>
-          <a:prstGeom prst="ellipse">
-            <a:avLst/>
-          </a:prstGeom>
-          <a:solidFill>
-            <a:srgbClr val="1A2350"/>
-          </a:solidFill>
-          <a:ln/>
-        </p:spPr>
-        <p:txBody>
-          <a:bodyPr/>
-          <a:lstStyle/>
-          <a:p>
-            <a:endParaRPr lang="en-SG"/>
-          </a:p>
-        </p:txBody>
-      </p:sp>
-      <p:pic>
-        <p:nvPicPr>
-          <p:cNvPr id="21" name="Image 3" descr="./icons/globe-indigo.png"/>
-          <p:cNvPicPr>
-            <a:picLocks noChangeAspect="1"/>
-          </p:cNvPicPr>
-          <p:nvPr/>
-        </p:nvPicPr>
-        <p:blipFill>
-          <a:blip r:embed="rId6"/>
-          <a:stretch>
-            <a:fillRect/>
-          </a:stretch>
-        </p:blipFill>
-        <p:spPr>
-          <a:xfrm>
             <a:off x="6627114" y="4341114"/>
             <a:ext cx="507492" cy="507492"/>
           </a:xfrm>
@@ -5130,7 +5202,7 @@
           <a:bodyPr wrap="square" lIns="0" tIns="0" rIns="0" bIns="0" rtlCol="0" anchor="ctr"/>
           <a:lstStyle/>
           <a:p>
-            <a:pPr marL="0" indent="0">
+            <a:pPr indent="0" marL="0">
               <a:buNone/>
             </a:pPr>
             <a:r>
@@ -5169,7 +5241,7 @@
           <a:bodyPr wrap="square" lIns="0" tIns="0" rIns="0" bIns="0" rtlCol="0" anchor="ctr"/>
           <a:lstStyle/>
           <a:p>
-            <a:pPr marL="0" indent="0">
+            <a:pPr indent="0" marL="0">
               <a:lnSpc>
                 <a:spcPct val="118000"/>
               </a:lnSpc>
@@ -5206,7 +5278,6 @@
         <a:solidFill>
           <a:srgbClr val="0B1020"/>
         </a:solidFill>
-        <a:effectLst/>
       </p:bgPr>
     </p:bg>
     <p:spTree>
@@ -5244,11 +5315,11 @@
           <a:bodyPr wrap="square" lIns="0" tIns="0" rIns="0" bIns="0" rtlCol="0" anchor="ctr"/>
           <a:lstStyle/>
           <a:p>
-            <a:pPr marL="0" indent="0" algn="l">
-              <a:buNone/>
-            </a:pPr>
-            <a:r>
-              <a:rPr lang="en-US" sz="1300" b="1" kern="0" spc="200" dirty="0">
+            <a:pPr algn="l" indent="0" marL="0">
+              <a:buNone/>
+            </a:pPr>
+            <a:r>
+              <a:rPr lang="en-US" sz="1300" b="1" spc="200" kern="0" dirty="0">
                 <a:solidFill>
                   <a:srgbClr val="22D3EE"/>
                 </a:solidFill>
@@ -5283,7 +5354,7 @@
           <a:bodyPr wrap="square" lIns="0" tIns="0" rIns="0" bIns="0" rtlCol="0" anchor="ctr"/>
           <a:lstStyle/>
           <a:p>
-            <a:pPr marL="0" indent="0">
+            <a:pPr indent="0" marL="0">
               <a:buNone/>
             </a:pPr>
             <a:r>
@@ -5322,20 +5393,13 @@
           </a:solidFill>
           <a:ln/>
           <a:effectLst>
-            <a:outerShdw blurRad="127000" dist="50800" dir="5400000" algn="bl" rotWithShape="0">
+            <a:outerShdw sx="100000" sy="100000" kx="0" ky="0" algn="bl" rotWithShape="0" blurRad="127000" dist="50800" dir="5400000">
               <a:srgbClr val="000000">
                 <a:alpha val="35000"/>
               </a:srgbClr>
             </a:outerShdw>
           </a:effectLst>
         </p:spPr>
-        <p:txBody>
-          <a:bodyPr/>
-          <a:lstStyle/>
-          <a:p>
-            <a:endParaRPr lang="en-SG"/>
-          </a:p>
-        </p:txBody>
       </p:sp>
       <p:sp>
         <p:nvSpPr>
@@ -5356,17 +5420,318 @@
           </a:solidFill>
           <a:ln/>
         </p:spPr>
-        <p:txBody>
-          <a:bodyPr/>
-          <a:lstStyle/>
-          <a:p>
-            <a:endParaRPr lang="en-SG"/>
-          </a:p>
-        </p:txBody>
       </p:sp>
       <p:pic>
         <p:nvPicPr>
-          <p:cNvPr id="6" name="Image 0" descr="./icons/user-cyan.png"/>
+          <p:cNvPr id="6" name="Image 0" descr="./icons/user-cyan.png">    </p:cNvPr>
+          <p:cNvPicPr>
+            <a:picLocks noChangeAspect="1"/>
+          </p:cNvPicPr>
+          <p:nvPr/>
+        </p:nvPicPr>
+        <p:blipFill>
+          <a:blip r:embed="rId1"/>
+          <a:stretch>
+            <a:fillRect/>
+          </a:stretch>
+        </p:blipFill>
+        <p:spPr>
+          <a:xfrm>
+            <a:off x="1547165" y="2392985"/>
+            <a:ext cx="608990" cy="608990"/>
+          </a:xfrm>
+          <a:prstGeom prst="rect">
+            <a:avLst/>
+          </a:prstGeom>
+        </p:spPr>
+      </p:pic>
+      <p:sp>
+        <p:nvSpPr>
+          <p:cNvPr id="7" name="Text 4"/>
+          <p:cNvSpPr/>
+          <p:nvPr/>
+        </p:nvSpPr>
+        <p:spPr>
+          <a:xfrm>
+            <a:off x="731520" y="3337560"/>
+            <a:ext cx="2240280" cy="411480"/>
+          </a:xfrm>
+          <a:prstGeom prst="rect">
+            <a:avLst/>
+          </a:prstGeom>
+          <a:noFill/>
+          <a:ln/>
+        </p:spPr>
+        <p:txBody>
+          <a:bodyPr wrap="square" lIns="0" tIns="0" rIns="0" bIns="0" rtlCol="0" anchor="ctr"/>
+          <a:lstStyle/>
+          <a:p>
+            <a:pPr algn="ctr" indent="0" marL="0">
+              <a:buNone/>
+            </a:pPr>
+            <a:r>
+              <a:rPr lang="en-US" sz="1800" b="1" dirty="0">
+                <a:solidFill>
+                  <a:srgbClr val="EEF2FF"/>
+                </a:solidFill>
+                <a:latin typeface="Calibri" pitchFamily="34" charset="0"/>
+                <a:ea typeface="Calibri" pitchFamily="34" charset="-122"/>
+                <a:cs typeface="Calibri" pitchFamily="34" charset="-120"/>
+              </a:rPr>
+              <a:t>Student</a:t>
+            </a:r>
+            <a:endParaRPr lang="en-US" sz="1800" dirty="0"/>
+          </a:p>
+        </p:txBody>
+      </p:sp>
+      <p:sp>
+        <p:nvSpPr>
+          <p:cNvPr id="8" name="Text 5"/>
+          <p:cNvSpPr/>
+          <p:nvPr/>
+        </p:nvSpPr>
+        <p:spPr>
+          <a:xfrm>
+            <a:off x="777240" y="3840480"/>
+            <a:ext cx="2148840" cy="1234440"/>
+          </a:xfrm>
+          <a:prstGeom prst="rect">
+            <a:avLst/>
+          </a:prstGeom>
+          <a:noFill/>
+          <a:ln/>
+        </p:spPr>
+        <p:txBody>
+          <a:bodyPr wrap="square" lIns="0" tIns="0" rIns="0" bIns="0" rtlCol="0" anchor="ctr"/>
+          <a:lstStyle/>
+          <a:p>
+            <a:pPr algn="ctr" indent="0" marL="0">
+              <a:lnSpc>
+                <a:spcPct val="120000"/>
+              </a:lnSpc>
+              <a:buNone/>
+            </a:pPr>
+            <a:r>
+              <a:rPr lang="en-US" sz="1250" dirty="0">
+                <a:solidFill>
+                  <a:srgbClr val="9AA6C4"/>
+                </a:solidFill>
+                <a:latin typeface="Calibri" pitchFamily="34" charset="0"/>
+                <a:ea typeface="Calibri" pitchFamily="34" charset="-122"/>
+                <a:cs typeface="Calibri" pitchFamily="34" charset="-120"/>
+              </a:rPr>
+              <a:t>Learns with a guided AI tutor, in their own language.</a:t>
+            </a:r>
+            <a:endParaRPr lang="en-US" sz="1250" dirty="0"/>
+          </a:p>
+        </p:txBody>
+      </p:sp>
+      <p:sp>
+        <p:nvSpPr>
+          <p:cNvPr id="9" name="Shape 6"/>
+          <p:cNvSpPr/>
+          <p:nvPr/>
+        </p:nvSpPr>
+        <p:spPr>
+          <a:xfrm>
+            <a:off x="3410712" y="1920240"/>
+            <a:ext cx="2606040" cy="3291840"/>
+          </a:xfrm>
+          <a:prstGeom prst="roundRect">
+            <a:avLst>
+              <a:gd name="adj" fmla="val 4211"/>
+            </a:avLst>
+          </a:prstGeom>
+          <a:solidFill>
+            <a:srgbClr val="161D3F"/>
+          </a:solidFill>
+          <a:ln/>
+          <a:effectLst>
+            <a:outerShdw sx="100000" sy="100000" kx="0" ky="0" algn="bl" rotWithShape="0" blurRad="127000" dist="50800" dir="5400000">
+              <a:srgbClr val="000000">
+                <a:alpha val="35000"/>
+              </a:srgbClr>
+            </a:outerShdw>
+          </a:effectLst>
+        </p:spPr>
+      </p:sp>
+      <p:sp>
+        <p:nvSpPr>
+          <p:cNvPr id="10" name="Shape 7"/>
+          <p:cNvSpPr/>
+          <p:nvPr/>
+        </p:nvSpPr>
+        <p:spPr>
+          <a:xfrm>
+            <a:off x="4302252" y="2286000"/>
+            <a:ext cx="822960" cy="822960"/>
+          </a:xfrm>
+          <a:prstGeom prst="ellipse">
+            <a:avLst/>
+          </a:prstGeom>
+          <a:solidFill>
+            <a:srgbClr val="1A2350"/>
+          </a:solidFill>
+          <a:ln/>
+        </p:spPr>
+      </p:sp>
+      <p:pic>
+        <p:nvPicPr>
+          <p:cNvPr id="11" name="Image 1" descr="./icons/users-cyan.png">    </p:cNvPr>
+          <p:cNvPicPr>
+            <a:picLocks noChangeAspect="1"/>
+          </p:cNvPicPr>
+          <p:nvPr/>
+        </p:nvPicPr>
+        <p:blipFill>
+          <a:blip r:embed="rId2"/>
+          <a:stretch>
+            <a:fillRect/>
+          </a:stretch>
+        </p:blipFill>
+        <p:spPr>
+          <a:xfrm>
+            <a:off x="4409237" y="2392985"/>
+            <a:ext cx="608990" cy="608990"/>
+          </a:xfrm>
+          <a:prstGeom prst="rect">
+            <a:avLst/>
+          </a:prstGeom>
+        </p:spPr>
+      </p:pic>
+      <p:sp>
+        <p:nvSpPr>
+          <p:cNvPr id="12" name="Text 8"/>
+          <p:cNvSpPr/>
+          <p:nvPr/>
+        </p:nvSpPr>
+        <p:spPr>
+          <a:xfrm>
+            <a:off x="3593592" y="3337560"/>
+            <a:ext cx="2240280" cy="411480"/>
+          </a:xfrm>
+          <a:prstGeom prst="rect">
+            <a:avLst/>
+          </a:prstGeom>
+          <a:noFill/>
+          <a:ln/>
+        </p:spPr>
+        <p:txBody>
+          <a:bodyPr wrap="square" lIns="0" tIns="0" rIns="0" bIns="0" rtlCol="0" anchor="ctr"/>
+          <a:lstStyle/>
+          <a:p>
+            <a:pPr algn="ctr" indent="0" marL="0">
+              <a:buNone/>
+            </a:pPr>
+            <a:r>
+              <a:rPr lang="en-US" sz="1800" b="1" dirty="0">
+                <a:solidFill>
+                  <a:srgbClr val="EEF2FF"/>
+                </a:solidFill>
+                <a:latin typeface="Calibri" pitchFamily="34" charset="0"/>
+                <a:ea typeface="Calibri" pitchFamily="34" charset="-122"/>
+                <a:cs typeface="Calibri" pitchFamily="34" charset="-120"/>
+              </a:rPr>
+              <a:t>Teacher</a:t>
+            </a:r>
+            <a:endParaRPr lang="en-US" sz="1800" dirty="0"/>
+          </a:p>
+        </p:txBody>
+      </p:sp>
+      <p:sp>
+        <p:nvSpPr>
+          <p:cNvPr id="13" name="Text 9"/>
+          <p:cNvSpPr/>
+          <p:nvPr/>
+        </p:nvSpPr>
+        <p:spPr>
+          <a:xfrm>
+            <a:off x="3639312" y="3840480"/>
+            <a:ext cx="2148840" cy="1234440"/>
+          </a:xfrm>
+          <a:prstGeom prst="rect">
+            <a:avLst/>
+          </a:prstGeom>
+          <a:noFill/>
+          <a:ln/>
+        </p:spPr>
+        <p:txBody>
+          <a:bodyPr wrap="square" lIns="0" tIns="0" rIns="0" bIns="0" rtlCol="0" anchor="ctr"/>
+          <a:lstStyle/>
+          <a:p>
+            <a:pPr algn="ctr" indent="0" marL="0">
+              <a:lnSpc>
+                <a:spcPct val="120000"/>
+              </a:lnSpc>
+              <a:buNone/>
+            </a:pPr>
+            <a:r>
+              <a:rPr lang="en-US" sz="1250" dirty="0">
+                <a:solidFill>
+                  <a:srgbClr val="9AA6C4"/>
+                </a:solidFill>
+                <a:latin typeface="Calibri" pitchFamily="34" charset="0"/>
+                <a:ea typeface="Calibri" pitchFamily="34" charset="-122"/>
+                <a:cs typeface="Calibri" pitchFamily="34" charset="-120"/>
+              </a:rPr>
+              <a:t>Full transparency into every AI conversation and class-wide progress.</a:t>
+            </a:r>
+            <a:endParaRPr lang="en-US" sz="1250" dirty="0"/>
+          </a:p>
+        </p:txBody>
+      </p:sp>
+      <p:sp>
+        <p:nvSpPr>
+          <p:cNvPr id="14" name="Shape 10"/>
+          <p:cNvSpPr/>
+          <p:nvPr/>
+        </p:nvSpPr>
+        <p:spPr>
+          <a:xfrm>
+            <a:off x="6272784" y="1920240"/>
+            <a:ext cx="2606040" cy="3291840"/>
+          </a:xfrm>
+          <a:prstGeom prst="roundRect">
+            <a:avLst>
+              <a:gd name="adj" fmla="val 4211"/>
+            </a:avLst>
+          </a:prstGeom>
+          <a:solidFill>
+            <a:srgbClr val="161D3F"/>
+          </a:solidFill>
+          <a:ln/>
+          <a:effectLst>
+            <a:outerShdw sx="100000" sy="100000" kx="0" ky="0" algn="bl" rotWithShape="0" blurRad="127000" dist="50800" dir="5400000">
+              <a:srgbClr val="000000">
+                <a:alpha val="35000"/>
+              </a:srgbClr>
+            </a:outerShdw>
+          </a:effectLst>
+        </p:spPr>
+      </p:sp>
+      <p:sp>
+        <p:nvSpPr>
+          <p:cNvPr id="15" name="Shape 11"/>
+          <p:cNvSpPr/>
+          <p:nvPr/>
+        </p:nvSpPr>
+        <p:spPr>
+          <a:xfrm>
+            <a:off x="7164324" y="2286000"/>
+            <a:ext cx="822960" cy="822960"/>
+          </a:xfrm>
+          <a:prstGeom prst="ellipse">
+            <a:avLst/>
+          </a:prstGeom>
+          <a:solidFill>
+            <a:srgbClr val="1A2350"/>
+          </a:solidFill>
+          <a:ln/>
+        </p:spPr>
+      </p:sp>
+      <p:pic>
+        <p:nvPicPr>
+          <p:cNvPr id="16" name="Image 2" descr="./icons/barchart-cyan.png">    </p:cNvPr>
           <p:cNvPicPr>
             <a:picLocks noChangeAspect="1"/>
           </p:cNvPicPr>
@@ -5380,7 +5745,7 @@
         </p:blipFill>
         <p:spPr>
           <a:xfrm>
-            <a:off x="1547165" y="2392985"/>
+            <a:off x="7271309" y="2392985"/>
             <a:ext cx="608990" cy="608990"/>
           </a:xfrm>
           <a:prstGeom prst="rect">
@@ -5390,13 +5755,13 @@
       </p:pic>
       <p:sp>
         <p:nvSpPr>
-          <p:cNvPr id="7" name="Text 4"/>
-          <p:cNvSpPr/>
-          <p:nvPr/>
-        </p:nvSpPr>
-        <p:spPr>
-          <a:xfrm>
-            <a:off x="731520" y="3337560"/>
+          <p:cNvPr id="17" name="Text 12"/>
+          <p:cNvSpPr/>
+          <p:nvPr/>
+        </p:nvSpPr>
+        <p:spPr>
+          <a:xfrm>
+            <a:off x="6455664" y="3337560"/>
             <a:ext cx="2240280" cy="411480"/>
           </a:xfrm>
           <a:prstGeom prst="rect">
@@ -5409,7 +5774,7 @@
           <a:bodyPr wrap="square" lIns="0" tIns="0" rIns="0" bIns="0" rtlCol="0" anchor="ctr"/>
           <a:lstStyle/>
           <a:p>
-            <a:pPr marL="0" indent="0" algn="ctr">
+            <a:pPr algn="ctr" indent="0" marL="0">
               <a:buNone/>
             </a:pPr>
             <a:r>
@@ -5421,7 +5786,7 @@
                 <a:ea typeface="Calibri" pitchFamily="34" charset="-122"/>
                 <a:cs typeface="Calibri" pitchFamily="34" charset="-120"/>
               </a:rPr>
-              <a:t>Student</a:t>
+              <a:t>HOD</a:t>
             </a:r>
             <a:endParaRPr lang="en-US" sz="1800" dirty="0"/>
           </a:p>
@@ -5429,13 +5794,13 @@
       </p:sp>
       <p:sp>
         <p:nvSpPr>
-          <p:cNvPr id="8" name="Text 5"/>
-          <p:cNvSpPr/>
-          <p:nvPr/>
-        </p:nvSpPr>
-        <p:spPr>
-          <a:xfrm>
-            <a:off x="777240" y="3840480"/>
+          <p:cNvPr id="18" name="Text 13"/>
+          <p:cNvSpPr/>
+          <p:nvPr/>
+        </p:nvSpPr>
+        <p:spPr>
+          <a:xfrm>
+            <a:off x="6501384" y="3840480"/>
             <a:ext cx="2148840" cy="1234440"/>
           </a:xfrm>
           <a:prstGeom prst="rect">
@@ -5448,7 +5813,7 @@
           <a:bodyPr wrap="square" lIns="0" tIns="0" rIns="0" bIns="0" rtlCol="0" anchor="ctr"/>
           <a:lstStyle/>
           <a:p>
-            <a:pPr marL="0" indent="0" algn="ctr">
+            <a:pPr algn="ctr" indent="0" marL="0">
               <a:lnSpc>
                 <a:spcPct val="120000"/>
               </a:lnSpc>
@@ -5463,7 +5828,7 @@
                 <a:ea typeface="Calibri" pitchFamily="34" charset="-122"/>
                 <a:cs typeface="Calibri" pitchFamily="34" charset="-120"/>
               </a:rPr>
-              <a:t>Learns with a guided AI tutor, in their own language.</a:t>
+              <a:t>Department-level rollups across sections and teachers.</a:t>
             </a:r>
             <a:endParaRPr lang="en-US" sz="1250" dirty="0"/>
           </a:p>
@@ -5471,13 +5836,13 @@
       </p:sp>
       <p:sp>
         <p:nvSpPr>
-          <p:cNvPr id="9" name="Shape 6"/>
-          <p:cNvSpPr/>
-          <p:nvPr/>
-        </p:nvSpPr>
-        <p:spPr>
-          <a:xfrm>
-            <a:off x="3410712" y="1920240"/>
+          <p:cNvPr id="19" name="Shape 14"/>
+          <p:cNvSpPr/>
+          <p:nvPr/>
+        </p:nvSpPr>
+        <p:spPr>
+          <a:xfrm>
+            <a:off x="9134856" y="1920240"/>
             <a:ext cx="2606040" cy="3291840"/>
           </a:xfrm>
           <a:prstGeom prst="roundRect">
@@ -5490,30 +5855,23 @@
           </a:solidFill>
           <a:ln/>
           <a:effectLst>
-            <a:outerShdw blurRad="127000" dist="50800" dir="5400000" algn="bl" rotWithShape="0">
+            <a:outerShdw sx="100000" sy="100000" kx="0" ky="0" algn="bl" rotWithShape="0" blurRad="127000" dist="50800" dir="5400000">
               <a:srgbClr val="000000">
                 <a:alpha val="35000"/>
               </a:srgbClr>
             </a:outerShdw>
           </a:effectLst>
         </p:spPr>
-        <p:txBody>
-          <a:bodyPr/>
-          <a:lstStyle/>
-          <a:p>
-            <a:endParaRPr lang="en-SG"/>
-          </a:p>
-        </p:txBody>
-      </p:sp>
-      <p:sp>
-        <p:nvSpPr>
-          <p:cNvPr id="10" name="Shape 7"/>
-          <p:cNvSpPr/>
-          <p:nvPr/>
-        </p:nvSpPr>
-        <p:spPr>
-          <a:xfrm>
-            <a:off x="4302252" y="2286000"/>
+      </p:sp>
+      <p:sp>
+        <p:nvSpPr>
+          <p:cNvPr id="20" name="Shape 15"/>
+          <p:cNvSpPr/>
+          <p:nvPr/>
+        </p:nvSpPr>
+        <p:spPr>
+          <a:xfrm>
+            <a:off x="10026396" y="2286000"/>
             <a:ext cx="822960" cy="822960"/>
           </a:xfrm>
           <a:prstGeom prst="ellipse">
@@ -5524,17 +5882,10 @@
           </a:solidFill>
           <a:ln/>
         </p:spPr>
-        <p:txBody>
-          <a:bodyPr/>
-          <a:lstStyle/>
-          <a:p>
-            <a:endParaRPr lang="en-SG"/>
-          </a:p>
-        </p:txBody>
       </p:sp>
       <p:pic>
         <p:nvPicPr>
-          <p:cNvPr id="11" name="Image 1" descr="./icons/users-cyan.png"/>
+          <p:cNvPr id="21" name="Image 3" descr="./icons/home-cyan.png">    </p:cNvPr>
           <p:cNvPicPr>
             <a:picLocks noChangeAspect="1"/>
           </p:cNvPicPr>
@@ -5548,342 +5899,6 @@
         </p:blipFill>
         <p:spPr>
           <a:xfrm>
-            <a:off x="4409237" y="2392985"/>
-            <a:ext cx="608990" cy="608990"/>
-          </a:xfrm>
-          <a:prstGeom prst="rect">
-            <a:avLst/>
-          </a:prstGeom>
-        </p:spPr>
-      </p:pic>
-      <p:sp>
-        <p:nvSpPr>
-          <p:cNvPr id="12" name="Text 8"/>
-          <p:cNvSpPr/>
-          <p:nvPr/>
-        </p:nvSpPr>
-        <p:spPr>
-          <a:xfrm>
-            <a:off x="3593592" y="3337560"/>
-            <a:ext cx="2240280" cy="411480"/>
-          </a:xfrm>
-          <a:prstGeom prst="rect">
-            <a:avLst/>
-          </a:prstGeom>
-          <a:noFill/>
-          <a:ln/>
-        </p:spPr>
-        <p:txBody>
-          <a:bodyPr wrap="square" lIns="0" tIns="0" rIns="0" bIns="0" rtlCol="0" anchor="ctr"/>
-          <a:lstStyle/>
-          <a:p>
-            <a:pPr marL="0" indent="0" algn="ctr">
-              <a:buNone/>
-            </a:pPr>
-            <a:r>
-              <a:rPr lang="en-US" sz="1800" b="1" dirty="0">
-                <a:solidFill>
-                  <a:srgbClr val="EEF2FF"/>
-                </a:solidFill>
-                <a:latin typeface="Calibri" pitchFamily="34" charset="0"/>
-                <a:ea typeface="Calibri" pitchFamily="34" charset="-122"/>
-                <a:cs typeface="Calibri" pitchFamily="34" charset="-120"/>
-              </a:rPr>
-              <a:t>Teacher</a:t>
-            </a:r>
-            <a:endParaRPr lang="en-US" sz="1800" dirty="0"/>
-          </a:p>
-        </p:txBody>
-      </p:sp>
-      <p:sp>
-        <p:nvSpPr>
-          <p:cNvPr id="13" name="Text 9"/>
-          <p:cNvSpPr/>
-          <p:nvPr/>
-        </p:nvSpPr>
-        <p:spPr>
-          <a:xfrm>
-            <a:off x="3639312" y="3840480"/>
-            <a:ext cx="2148840" cy="1234440"/>
-          </a:xfrm>
-          <a:prstGeom prst="rect">
-            <a:avLst/>
-          </a:prstGeom>
-          <a:noFill/>
-          <a:ln/>
-        </p:spPr>
-        <p:txBody>
-          <a:bodyPr wrap="square" lIns="0" tIns="0" rIns="0" bIns="0" rtlCol="0" anchor="ctr"/>
-          <a:lstStyle/>
-          <a:p>
-            <a:pPr marL="0" indent="0" algn="ctr">
-              <a:lnSpc>
-                <a:spcPct val="120000"/>
-              </a:lnSpc>
-              <a:buNone/>
-            </a:pPr>
-            <a:r>
-              <a:rPr lang="en-US" sz="1250" dirty="0">
-                <a:solidFill>
-                  <a:srgbClr val="9AA6C4"/>
-                </a:solidFill>
-                <a:latin typeface="Calibri" pitchFamily="34" charset="0"/>
-                <a:ea typeface="Calibri" pitchFamily="34" charset="-122"/>
-                <a:cs typeface="Calibri" pitchFamily="34" charset="-120"/>
-              </a:rPr>
-              <a:t>Full transparency into every AI conversation and class-wide progress.</a:t>
-            </a:r>
-            <a:endParaRPr lang="en-US" sz="1250" dirty="0"/>
-          </a:p>
-        </p:txBody>
-      </p:sp>
-      <p:sp>
-        <p:nvSpPr>
-          <p:cNvPr id="14" name="Shape 10"/>
-          <p:cNvSpPr/>
-          <p:nvPr/>
-        </p:nvSpPr>
-        <p:spPr>
-          <a:xfrm>
-            <a:off x="6272784" y="1920240"/>
-            <a:ext cx="2606040" cy="3291840"/>
-          </a:xfrm>
-          <a:prstGeom prst="roundRect">
-            <a:avLst>
-              <a:gd name="adj" fmla="val 4211"/>
-            </a:avLst>
-          </a:prstGeom>
-          <a:solidFill>
-            <a:srgbClr val="161D3F"/>
-          </a:solidFill>
-          <a:ln/>
-          <a:effectLst>
-            <a:outerShdw blurRad="127000" dist="50800" dir="5400000" algn="bl" rotWithShape="0">
-              <a:srgbClr val="000000">
-                <a:alpha val="35000"/>
-              </a:srgbClr>
-            </a:outerShdw>
-          </a:effectLst>
-        </p:spPr>
-        <p:txBody>
-          <a:bodyPr/>
-          <a:lstStyle/>
-          <a:p>
-            <a:endParaRPr lang="en-SG"/>
-          </a:p>
-        </p:txBody>
-      </p:sp>
-      <p:sp>
-        <p:nvSpPr>
-          <p:cNvPr id="15" name="Shape 11"/>
-          <p:cNvSpPr/>
-          <p:nvPr/>
-        </p:nvSpPr>
-        <p:spPr>
-          <a:xfrm>
-            <a:off x="7164324" y="2286000"/>
-            <a:ext cx="822960" cy="822960"/>
-          </a:xfrm>
-          <a:prstGeom prst="ellipse">
-            <a:avLst/>
-          </a:prstGeom>
-          <a:solidFill>
-            <a:srgbClr val="1A2350"/>
-          </a:solidFill>
-          <a:ln/>
-        </p:spPr>
-        <p:txBody>
-          <a:bodyPr/>
-          <a:lstStyle/>
-          <a:p>
-            <a:endParaRPr lang="en-SG"/>
-          </a:p>
-        </p:txBody>
-      </p:sp>
-      <p:pic>
-        <p:nvPicPr>
-          <p:cNvPr id="16" name="Image 2" descr="./icons/barchart-cyan.png"/>
-          <p:cNvPicPr>
-            <a:picLocks noChangeAspect="1"/>
-          </p:cNvPicPr>
-          <p:nvPr/>
-        </p:nvPicPr>
-        <p:blipFill>
-          <a:blip r:embed="rId5"/>
-          <a:stretch>
-            <a:fillRect/>
-          </a:stretch>
-        </p:blipFill>
-        <p:spPr>
-          <a:xfrm>
-            <a:off x="7271309" y="2392985"/>
-            <a:ext cx="608990" cy="608990"/>
-          </a:xfrm>
-          <a:prstGeom prst="rect">
-            <a:avLst/>
-          </a:prstGeom>
-        </p:spPr>
-      </p:pic>
-      <p:sp>
-        <p:nvSpPr>
-          <p:cNvPr id="17" name="Text 12"/>
-          <p:cNvSpPr/>
-          <p:nvPr/>
-        </p:nvSpPr>
-        <p:spPr>
-          <a:xfrm>
-            <a:off x="6455664" y="3337560"/>
-            <a:ext cx="2240280" cy="411480"/>
-          </a:xfrm>
-          <a:prstGeom prst="rect">
-            <a:avLst/>
-          </a:prstGeom>
-          <a:noFill/>
-          <a:ln/>
-        </p:spPr>
-        <p:txBody>
-          <a:bodyPr wrap="square" lIns="0" tIns="0" rIns="0" bIns="0" rtlCol="0" anchor="ctr"/>
-          <a:lstStyle/>
-          <a:p>
-            <a:pPr marL="0" indent="0" algn="ctr">
-              <a:buNone/>
-            </a:pPr>
-            <a:r>
-              <a:rPr lang="en-US" sz="1800" b="1" dirty="0">
-                <a:solidFill>
-                  <a:srgbClr val="EEF2FF"/>
-                </a:solidFill>
-                <a:latin typeface="Calibri" pitchFamily="34" charset="0"/>
-                <a:ea typeface="Calibri" pitchFamily="34" charset="-122"/>
-                <a:cs typeface="Calibri" pitchFamily="34" charset="-120"/>
-              </a:rPr>
-              <a:t>HOD</a:t>
-            </a:r>
-            <a:endParaRPr lang="en-US" sz="1800" dirty="0"/>
-          </a:p>
-        </p:txBody>
-      </p:sp>
-      <p:sp>
-        <p:nvSpPr>
-          <p:cNvPr id="18" name="Text 13"/>
-          <p:cNvSpPr/>
-          <p:nvPr/>
-        </p:nvSpPr>
-        <p:spPr>
-          <a:xfrm>
-            <a:off x="6501384" y="3840480"/>
-            <a:ext cx="2148840" cy="1234440"/>
-          </a:xfrm>
-          <a:prstGeom prst="rect">
-            <a:avLst/>
-          </a:prstGeom>
-          <a:noFill/>
-          <a:ln/>
-        </p:spPr>
-        <p:txBody>
-          <a:bodyPr wrap="square" lIns="0" tIns="0" rIns="0" bIns="0" rtlCol="0" anchor="ctr"/>
-          <a:lstStyle/>
-          <a:p>
-            <a:pPr marL="0" indent="0" algn="ctr">
-              <a:lnSpc>
-                <a:spcPct val="120000"/>
-              </a:lnSpc>
-              <a:buNone/>
-            </a:pPr>
-            <a:r>
-              <a:rPr lang="en-US" sz="1250" dirty="0">
-                <a:solidFill>
-                  <a:srgbClr val="9AA6C4"/>
-                </a:solidFill>
-                <a:latin typeface="Calibri" pitchFamily="34" charset="0"/>
-                <a:ea typeface="Calibri" pitchFamily="34" charset="-122"/>
-                <a:cs typeface="Calibri" pitchFamily="34" charset="-120"/>
-              </a:rPr>
-              <a:t>Department-level rollups across sections and teachers.</a:t>
-            </a:r>
-            <a:endParaRPr lang="en-US" sz="1250" dirty="0"/>
-          </a:p>
-        </p:txBody>
-      </p:sp>
-      <p:sp>
-        <p:nvSpPr>
-          <p:cNvPr id="19" name="Shape 14"/>
-          <p:cNvSpPr/>
-          <p:nvPr/>
-        </p:nvSpPr>
-        <p:spPr>
-          <a:xfrm>
-            <a:off x="9134856" y="1920240"/>
-            <a:ext cx="2606040" cy="3291840"/>
-          </a:xfrm>
-          <a:prstGeom prst="roundRect">
-            <a:avLst>
-              <a:gd name="adj" fmla="val 4211"/>
-            </a:avLst>
-          </a:prstGeom>
-          <a:solidFill>
-            <a:srgbClr val="161D3F"/>
-          </a:solidFill>
-          <a:ln/>
-          <a:effectLst>
-            <a:outerShdw blurRad="127000" dist="50800" dir="5400000" algn="bl" rotWithShape="0">
-              <a:srgbClr val="000000">
-                <a:alpha val="35000"/>
-              </a:srgbClr>
-            </a:outerShdw>
-          </a:effectLst>
-        </p:spPr>
-        <p:txBody>
-          <a:bodyPr/>
-          <a:lstStyle/>
-          <a:p>
-            <a:endParaRPr lang="en-SG"/>
-          </a:p>
-        </p:txBody>
-      </p:sp>
-      <p:sp>
-        <p:nvSpPr>
-          <p:cNvPr id="20" name="Shape 15"/>
-          <p:cNvSpPr/>
-          <p:nvPr/>
-        </p:nvSpPr>
-        <p:spPr>
-          <a:xfrm>
-            <a:off x="10026396" y="2286000"/>
-            <a:ext cx="822960" cy="822960"/>
-          </a:xfrm>
-          <a:prstGeom prst="ellipse">
-            <a:avLst/>
-          </a:prstGeom>
-          <a:solidFill>
-            <a:srgbClr val="1A2350"/>
-          </a:solidFill>
-          <a:ln/>
-        </p:spPr>
-        <p:txBody>
-          <a:bodyPr/>
-          <a:lstStyle/>
-          <a:p>
-            <a:endParaRPr lang="en-SG"/>
-          </a:p>
-        </p:txBody>
-      </p:sp>
-      <p:pic>
-        <p:nvPicPr>
-          <p:cNvPr id="21" name="Image 3" descr="./icons/home-cyan.png"/>
-          <p:cNvPicPr>
-            <a:picLocks noChangeAspect="1"/>
-          </p:cNvPicPr>
-          <p:nvPr/>
-        </p:nvPicPr>
-        <p:blipFill>
-          <a:blip r:embed="rId6"/>
-          <a:stretch>
-            <a:fillRect/>
-          </a:stretch>
-        </p:blipFill>
-        <p:spPr>
-          <a:xfrm>
             <a:off x="10133381" y="2392985"/>
             <a:ext cx="608990" cy="608990"/>
           </a:xfrm>
@@ -5913,7 +5928,7 @@
           <a:bodyPr wrap="square" lIns="0" tIns="0" rIns="0" bIns="0" rtlCol="0" anchor="ctr"/>
           <a:lstStyle/>
           <a:p>
-            <a:pPr marL="0" indent="0" algn="ctr">
+            <a:pPr algn="ctr" indent="0" marL="0">
               <a:buNone/>
             </a:pPr>
             <a:r>
@@ -5952,7 +5967,7 @@
           <a:bodyPr wrap="square" lIns="0" tIns="0" rIns="0" bIns="0" rtlCol="0" anchor="ctr"/>
           <a:lstStyle/>
           <a:p>
-            <a:pPr marL="0" indent="0" algn="ctr">
+            <a:pPr algn="ctr" indent="0" marL="0">
               <a:lnSpc>
                 <a:spcPct val="120000"/>
               </a:lnSpc>
@@ -5989,7 +6004,6 @@
         <a:solidFill>
           <a:srgbClr val="0B1020"/>
         </a:solidFill>
-        <a:effectLst/>
       </p:bgPr>
     </p:bg>
     <p:spTree>
@@ -6027,11 +6041,11 @@
           <a:bodyPr wrap="square" lIns="0" tIns="0" rIns="0" bIns="0" rtlCol="0" anchor="ctr"/>
           <a:lstStyle/>
           <a:p>
-            <a:pPr marL="0" indent="0" algn="l">
-              <a:buNone/>
-            </a:pPr>
-            <a:r>
-              <a:rPr lang="en-US" sz="1300" b="1" kern="0" spc="200" dirty="0">
+            <a:pPr algn="l" indent="0" marL="0">
+              <a:buNone/>
+            </a:pPr>
+            <a:r>
+              <a:rPr lang="en-US" sz="1300" b="1" spc="200" kern="0" dirty="0">
                 <a:solidFill>
                   <a:srgbClr val="22D3EE"/>
                 </a:solidFill>
@@ -6066,7 +6080,7 @@
           <a:bodyPr wrap="square" lIns="0" tIns="0" rIns="0" bIns="0" rtlCol="0" anchor="ctr"/>
           <a:lstStyle/>
           <a:p>
-            <a:pPr marL="0" indent="0">
+            <a:pPr indent="0" marL="0">
               <a:buNone/>
             </a:pPr>
             <a:r>
@@ -6106,13 +6120,6 @@
             <a:prstDash val="dash"/>
           </a:ln>
         </p:spPr>
-        <p:txBody>
-          <a:bodyPr/>
-          <a:lstStyle/>
-          <a:p>
-            <a:endParaRPr lang="en-SG"/>
-          </a:p>
-        </p:txBody>
       </p:sp>
       <p:sp>
         <p:nvSpPr>
@@ -6133,13 +6140,6 @@
           </a:solidFill>
           <a:ln/>
         </p:spPr>
-        <p:txBody>
-          <a:bodyPr/>
-          <a:lstStyle/>
-          <a:p>
-            <a:endParaRPr lang="en-SG"/>
-          </a:p>
-        </p:txBody>
       </p:sp>
       <p:sp>
         <p:nvSpPr>
@@ -6162,7 +6162,7 @@
           <a:bodyPr wrap="square" lIns="0" tIns="0" rIns="0" bIns="0" rtlCol="0" anchor="ctr"/>
           <a:lstStyle/>
           <a:p>
-            <a:pPr marL="0" indent="0" algn="ctr">
+            <a:pPr algn="ctr" indent="0" marL="0">
               <a:buNone/>
             </a:pPr>
             <a:r>
@@ -6201,7 +6201,7 @@
           <a:bodyPr wrap="square" lIns="0" tIns="0" rIns="0" bIns="0" rtlCol="0" anchor="ctr"/>
           <a:lstStyle/>
           <a:p>
-            <a:pPr marL="0" indent="0" algn="ctr">
+            <a:pPr algn="ctr" indent="0" marL="0">
               <a:buNone/>
             </a:pPr>
             <a:r>
@@ -6240,11 +6240,11 @@
           <a:bodyPr wrap="square" lIns="0" tIns="0" rIns="0" bIns="0" rtlCol="0" anchor="ctr"/>
           <a:lstStyle/>
           <a:p>
-            <a:pPr marL="0" indent="0" algn="ctr">
-              <a:buNone/>
-            </a:pPr>
-            <a:r>
-              <a:rPr lang="en-US" sz="1100" b="1" kern="0" spc="100" dirty="0">
+            <a:pPr algn="ctr" indent="0" marL="0">
+              <a:buNone/>
+            </a:pPr>
+            <a:r>
+              <a:rPr lang="en-US" sz="1100" b="1" spc="100" kern="0" dirty="0">
                 <a:solidFill>
                   <a:srgbClr val="34D399"/>
                 </a:solidFill>
@@ -6277,13 +6277,6 @@
           </a:solidFill>
           <a:ln/>
         </p:spPr>
-        <p:txBody>
-          <a:bodyPr/>
-          <a:lstStyle/>
-          <a:p>
-            <a:endParaRPr lang="en-SG"/>
-          </a:p>
-        </p:txBody>
       </p:sp>
       <p:sp>
         <p:nvSpPr>
@@ -6306,7 +6299,7 @@
           <a:bodyPr wrap="square" lIns="0" tIns="0" rIns="0" bIns="0" rtlCol="0" anchor="ctr"/>
           <a:lstStyle/>
           <a:p>
-            <a:pPr marL="0" indent="0" algn="ctr">
+            <a:pPr algn="ctr" indent="0" marL="0">
               <a:buNone/>
             </a:pPr>
             <a:r>
@@ -6345,11 +6338,11 @@
           <a:bodyPr wrap="square" lIns="0" tIns="0" rIns="0" bIns="0" rtlCol="0" anchor="ctr"/>
           <a:lstStyle/>
           <a:p>
-            <a:pPr marL="0" indent="0" algn="ctr">
-              <a:buNone/>
-            </a:pPr>
-            <a:r>
-              <a:rPr lang="en-US" sz="1100" b="1" kern="0" spc="100" dirty="0">
+            <a:pPr algn="ctr" indent="0" marL="0">
+              <a:buNone/>
+            </a:pPr>
+            <a:r>
+              <a:rPr lang="en-US" sz="1100" b="1" spc="100" kern="0" dirty="0">
                 <a:solidFill>
                   <a:srgbClr val="9AA6C4"/>
                 </a:solidFill>
@@ -6382,13 +6375,6 @@
           </a:solidFill>
           <a:ln/>
         </p:spPr>
-        <p:txBody>
-          <a:bodyPr/>
-          <a:lstStyle/>
-          <a:p>
-            <a:endParaRPr lang="en-SG"/>
-          </a:p>
-        </p:txBody>
       </p:sp>
       <p:sp>
         <p:nvSpPr>
@@ -6411,7 +6397,7 @@
           <a:bodyPr wrap="square" lIns="0" tIns="0" rIns="0" bIns="0" rtlCol="0" anchor="ctr"/>
           <a:lstStyle/>
           <a:p>
-            <a:pPr marL="0" indent="0" algn="ctr">
+            <a:pPr algn="ctr" indent="0" marL="0">
               <a:buNone/>
             </a:pPr>
             <a:r>
@@ -6450,11 +6436,11 @@
           <a:bodyPr wrap="square" lIns="0" tIns="0" rIns="0" bIns="0" rtlCol="0" anchor="ctr"/>
           <a:lstStyle/>
           <a:p>
-            <a:pPr marL="0" indent="0" algn="ctr">
-              <a:buNone/>
-            </a:pPr>
-            <a:r>
-              <a:rPr lang="en-US" sz="1100" b="1" kern="0" spc="100" dirty="0">
+            <a:pPr algn="ctr" indent="0" marL="0">
+              <a:buNone/>
+            </a:pPr>
+            <a:r>
+              <a:rPr lang="en-US" sz="1100" b="1" spc="100" kern="0" dirty="0">
                 <a:solidFill>
                   <a:srgbClr val="9AA6C4"/>
                 </a:solidFill>
@@ -6487,13 +6473,6 @@
           </a:solidFill>
           <a:ln/>
         </p:spPr>
-        <p:txBody>
-          <a:bodyPr/>
-          <a:lstStyle/>
-          <a:p>
-            <a:endParaRPr lang="en-SG"/>
-          </a:p>
-        </p:txBody>
       </p:sp>
       <p:sp>
         <p:nvSpPr>
@@ -6516,7 +6495,7 @@
           <a:bodyPr wrap="square" lIns="0" tIns="0" rIns="0" bIns="0" rtlCol="0" anchor="ctr"/>
           <a:lstStyle/>
           <a:p>
-            <a:pPr marL="0" indent="0" algn="ctr">
+            <a:pPr algn="ctr" indent="0" marL="0">
               <a:buNone/>
             </a:pPr>
             <a:r>
@@ -6555,11 +6534,11 @@
           <a:bodyPr wrap="square" lIns="0" tIns="0" rIns="0" bIns="0" rtlCol="0" anchor="ctr"/>
           <a:lstStyle/>
           <a:p>
-            <a:pPr marL="0" indent="0" algn="ctr">
-              <a:buNone/>
-            </a:pPr>
-            <a:r>
-              <a:rPr lang="en-US" sz="1100" b="1" kern="0" spc="100" dirty="0">
+            <a:pPr algn="ctr" indent="0" marL="0">
+              <a:buNone/>
+            </a:pPr>
+            <a:r>
+              <a:rPr lang="en-US" sz="1100" b="1" spc="100" kern="0" dirty="0">
                 <a:solidFill>
                   <a:srgbClr val="9AA6C4"/>
                 </a:solidFill>
@@ -6594,20 +6573,13 @@
           </a:solidFill>
           <a:ln/>
           <a:effectLst>
-            <a:outerShdw blurRad="127000" dist="50800" dir="5400000" algn="bl" rotWithShape="0">
+            <a:outerShdw sx="100000" sy="100000" kx="0" ky="0" algn="bl" rotWithShape="0" blurRad="127000" dist="50800" dir="5400000">
               <a:srgbClr val="000000">
                 <a:alpha val="35000"/>
               </a:srgbClr>
             </a:outerShdw>
           </a:effectLst>
         </p:spPr>
-        <p:txBody>
-          <a:bodyPr/>
-          <a:lstStyle/>
-          <a:p>
-            <a:endParaRPr lang="en-SG"/>
-          </a:p>
-        </p:txBody>
       </p:sp>
       <p:sp>
         <p:nvSpPr>
@@ -6630,7 +6602,7 @@
           <a:bodyPr wrap="square" lIns="0" tIns="0" rIns="0" bIns="0" rtlCol="0" anchor="ctr"/>
           <a:lstStyle/>
           <a:p>
-            <a:pPr marL="0" indent="0" algn="ctr">
+            <a:pPr algn="ctr" indent="0" marL="0">
               <a:buNone/>
             </a:pPr>
             <a:r>
@@ -6669,7 +6641,7 @@
           <a:bodyPr wrap="square" lIns="0" tIns="0" rIns="0" bIns="0" rtlCol="0" anchor="ctr"/>
           <a:lstStyle/>
           <a:p>
-            <a:pPr marL="0" indent="0" algn="ctr">
+            <a:pPr algn="ctr" indent="0" marL="0">
               <a:buNone/>
             </a:pPr>
             <a:r>
@@ -6708,20 +6680,13 @@
           </a:solidFill>
           <a:ln/>
           <a:effectLst>
-            <a:outerShdw blurRad="127000" dist="50800" dir="5400000" algn="bl" rotWithShape="0">
+            <a:outerShdw sx="100000" sy="100000" kx="0" ky="0" algn="bl" rotWithShape="0" blurRad="127000" dist="50800" dir="5400000">
               <a:srgbClr val="000000">
                 <a:alpha val="35000"/>
               </a:srgbClr>
             </a:outerShdw>
           </a:effectLst>
         </p:spPr>
-        <p:txBody>
-          <a:bodyPr/>
-          <a:lstStyle/>
-          <a:p>
-            <a:endParaRPr lang="en-SG"/>
-          </a:p>
-        </p:txBody>
       </p:sp>
       <p:sp>
         <p:nvSpPr>
@@ -6744,7 +6709,7 @@
           <a:bodyPr wrap="square" lIns="0" tIns="0" rIns="0" bIns="0" rtlCol="0" anchor="ctr"/>
           <a:lstStyle/>
           <a:p>
-            <a:pPr marL="0" indent="0" algn="ctr">
+            <a:pPr algn="ctr" indent="0" marL="0">
               <a:buNone/>
             </a:pPr>
             <a:r>
@@ -6783,7 +6748,7 @@
           <a:bodyPr wrap="square" lIns="0" tIns="0" rIns="0" bIns="0" rtlCol="0" anchor="ctr"/>
           <a:lstStyle/>
           <a:p>
-            <a:pPr marL="0" indent="0" algn="ctr">
+            <a:pPr algn="ctr" indent="0" marL="0">
               <a:buNone/>
             </a:pPr>
             <a:r>
@@ -6822,20 +6787,13 @@
           </a:solidFill>
           <a:ln/>
           <a:effectLst>
-            <a:outerShdw blurRad="127000" dist="50800" dir="5400000" algn="bl" rotWithShape="0">
+            <a:outerShdw sx="100000" sy="100000" kx="0" ky="0" algn="bl" rotWithShape="0" blurRad="127000" dist="50800" dir="5400000">
               <a:srgbClr val="000000">
                 <a:alpha val="35000"/>
               </a:srgbClr>
             </a:outerShdw>
           </a:effectLst>
         </p:spPr>
-        <p:txBody>
-          <a:bodyPr/>
-          <a:lstStyle/>
-          <a:p>
-            <a:endParaRPr lang="en-SG"/>
-          </a:p>
-        </p:txBody>
       </p:sp>
       <p:sp>
         <p:nvSpPr>
@@ -6858,7 +6816,7 @@
           <a:bodyPr wrap="square" lIns="0" tIns="0" rIns="0" bIns="0" rtlCol="0" anchor="ctr"/>
           <a:lstStyle/>
           <a:p>
-            <a:pPr marL="0" indent="0" algn="ctr">
+            <a:pPr algn="ctr" indent="0" marL="0">
               <a:buNone/>
             </a:pPr>
             <a:r>
@@ -6897,7 +6855,7 @@
           <a:bodyPr wrap="square" lIns="0" tIns="0" rIns="0" bIns="0" rtlCol="0" anchor="ctr"/>
           <a:lstStyle/>
           <a:p>
-            <a:pPr marL="0" indent="0" algn="ctr">
+            <a:pPr algn="ctr" indent="0" marL="0">
               <a:buNone/>
             </a:pPr>
             <a:r>
@@ -6936,20 +6894,13 @@
           </a:solidFill>
           <a:ln/>
           <a:effectLst>
-            <a:outerShdw blurRad="127000" dist="50800" dir="5400000" algn="bl" rotWithShape="0">
+            <a:outerShdw sx="100000" sy="100000" kx="0" ky="0" algn="bl" rotWithShape="0" blurRad="127000" dist="50800" dir="5400000">
               <a:srgbClr val="000000">
                 <a:alpha val="35000"/>
               </a:srgbClr>
             </a:outerShdw>
           </a:effectLst>
         </p:spPr>
-        <p:txBody>
-          <a:bodyPr/>
-          <a:lstStyle/>
-          <a:p>
-            <a:endParaRPr lang="en-SG"/>
-          </a:p>
-        </p:txBody>
       </p:sp>
       <p:sp>
         <p:nvSpPr>
@@ -6972,7 +6923,7 @@
           <a:bodyPr wrap="square" lIns="0" tIns="0" rIns="0" bIns="0" rtlCol="0" anchor="ctr"/>
           <a:lstStyle/>
           <a:p>
-            <a:pPr marL="0" indent="0" algn="ctr">
+            <a:pPr algn="ctr" indent="0" marL="0">
               <a:buNone/>
             </a:pPr>
             <a:r>
@@ -7011,7 +6962,7 @@
           <a:bodyPr wrap="square" lIns="0" tIns="0" rIns="0" bIns="0" rtlCol="0" anchor="ctr"/>
           <a:lstStyle/>
           <a:p>
-            <a:pPr marL="0" indent="0" algn="ctr">
+            <a:pPr algn="ctr" indent="0" marL="0">
               <a:buNone/>
             </a:pPr>
             <a:r>
@@ -7050,7 +7001,7 @@
           <a:bodyPr wrap="square" lIns="0" tIns="0" rIns="0" bIns="0" rtlCol="0" anchor="ctr"/>
           <a:lstStyle/>
           <a:p>
-            <a:pPr marL="0" indent="0">
+            <a:pPr indent="0" marL="0">
               <a:buNone/>
             </a:pPr>
             <a:r>
@@ -7084,7 +7035,6 @@
         <a:solidFill>
           <a:srgbClr val="0B1020"/>
         </a:solidFill>
-        <a:effectLst/>
       </p:bgPr>
     </p:bg>
     <p:spTree>
@@ -7122,11 +7072,11 @@
           <a:bodyPr wrap="square" lIns="0" tIns="0" rIns="0" bIns="0" rtlCol="0" anchor="ctr"/>
           <a:lstStyle/>
           <a:p>
-            <a:pPr marL="0" indent="0" algn="l">
-              <a:buNone/>
-            </a:pPr>
-            <a:r>
-              <a:rPr lang="en-US" sz="1300" b="1" kern="0" spc="200" dirty="0">
+            <a:pPr algn="l" indent="0" marL="0">
+              <a:buNone/>
+            </a:pPr>
+            <a:r>
+              <a:rPr lang="en-US" sz="1300" b="1" spc="200" kern="0" dirty="0">
                 <a:solidFill>
                   <a:srgbClr val="22D3EE"/>
                 </a:solidFill>
@@ -7161,7 +7111,7 @@
           <a:bodyPr wrap="square" lIns="0" tIns="0" rIns="0" bIns="0" rtlCol="0" anchor="ctr"/>
           <a:lstStyle/>
           <a:p>
-            <a:pPr marL="0" indent="0">
+            <a:pPr indent="0" marL="0">
               <a:buNone/>
             </a:pPr>
             <a:r>
@@ -7200,20 +7150,13 @@
           </a:solidFill>
           <a:ln/>
           <a:effectLst>
-            <a:outerShdw blurRad="127000" dist="50800" dir="5400000" algn="bl" rotWithShape="0">
+            <a:outerShdw sx="100000" sy="100000" kx="0" ky="0" algn="bl" rotWithShape="0" blurRad="127000" dist="50800" dir="5400000">
               <a:srgbClr val="000000">
                 <a:alpha val="35000"/>
               </a:srgbClr>
             </a:outerShdw>
           </a:effectLst>
         </p:spPr>
-        <p:txBody>
-          <a:bodyPr/>
-          <a:lstStyle/>
-          <a:p>
-            <a:endParaRPr lang="en-SG"/>
-          </a:p>
-        </p:txBody>
       </p:sp>
       <p:sp>
         <p:nvSpPr>
@@ -7236,7 +7179,7 @@
           <a:bodyPr wrap="square" lIns="0" tIns="0" rIns="0" bIns="0" rtlCol="0" anchor="ctr"/>
           <a:lstStyle/>
           <a:p>
-            <a:pPr marL="0" indent="0">
+            <a:pPr indent="0" marL="0">
               <a:buNone/>
             </a:pPr>
             <a:r>
@@ -7273,17 +7216,260 @@
           </a:solidFill>
           <a:ln/>
         </p:spPr>
-        <p:txBody>
-          <a:bodyPr/>
-          <a:lstStyle/>
-          <a:p>
-            <a:endParaRPr lang="en-SG"/>
-          </a:p>
-        </p:txBody>
       </p:sp>
       <p:pic>
         <p:nvPicPr>
-          <p:cNvPr id="7" name="Image 0" descr="./icons/dollar-cyan.png"/>
+          <p:cNvPr id="7" name="Image 0" descr="./icons/dollar-cyan.png">    </p:cNvPr>
+          <p:cNvPicPr>
+            <a:picLocks noChangeAspect="1"/>
+          </p:cNvPicPr>
+          <p:nvPr/>
+        </p:nvPicPr>
+        <p:blipFill>
+          <a:blip r:embed="rId1"/>
+          <a:stretch>
+            <a:fillRect/>
+          </a:stretch>
+        </p:blipFill>
+        <p:spPr>
+          <a:xfrm>
+            <a:off x="945947" y="2500427"/>
+            <a:ext cx="439826" cy="439826"/>
+          </a:xfrm>
+          <a:prstGeom prst="rect">
+            <a:avLst/>
+          </a:prstGeom>
+        </p:spPr>
+      </p:pic>
+      <p:sp>
+        <p:nvSpPr>
+          <p:cNvPr id="8" name="Text 5"/>
+          <p:cNvSpPr/>
+          <p:nvPr/>
+        </p:nvSpPr>
+        <p:spPr>
+          <a:xfrm>
+            <a:off x="1600200" y="2404872"/>
+            <a:ext cx="4709160" cy="320040"/>
+          </a:xfrm>
+          <a:prstGeom prst="rect">
+            <a:avLst/>
+          </a:prstGeom>
+          <a:noFill/>
+          <a:ln/>
+        </p:spPr>
+        <p:txBody>
+          <a:bodyPr wrap="square" lIns="0" tIns="0" rIns="0" bIns="0" rtlCol="0" anchor="ctr"/>
+          <a:lstStyle/>
+          <a:p>
+            <a:pPr indent="0" marL="0">
+              <a:buNone/>
+            </a:pPr>
+            <a:r>
+              <a:rPr lang="en-US" sz="1350" b="1" dirty="0">
+                <a:solidFill>
+                  <a:srgbClr val="EEF2FF"/>
+                </a:solidFill>
+                <a:latin typeface="Calibri" pitchFamily="34" charset="0"/>
+                <a:ea typeface="Calibri" pitchFamily="34" charset="-122"/>
+                <a:cs typeface="Calibri" pitchFamily="34" charset="-120"/>
+              </a:rPr>
+              <a:t>Per-student site license</a:t>
+            </a:r>
+            <a:endParaRPr lang="en-US" sz="1350" dirty="0"/>
+          </a:p>
+        </p:txBody>
+      </p:sp>
+      <p:sp>
+        <p:nvSpPr>
+          <p:cNvPr id="9" name="Text 6"/>
+          <p:cNvSpPr/>
+          <p:nvPr/>
+        </p:nvSpPr>
+        <p:spPr>
+          <a:xfrm>
+            <a:off x="1600200" y="2715768"/>
+            <a:ext cx="4709160" cy="685800"/>
+          </a:xfrm>
+          <a:prstGeom prst="rect">
+            <a:avLst/>
+          </a:prstGeom>
+          <a:noFill/>
+          <a:ln/>
+        </p:spPr>
+        <p:txBody>
+          <a:bodyPr wrap="square" lIns="0" tIns="0" rIns="0" bIns="0" rtlCol="0" anchor="ctr"/>
+          <a:lstStyle/>
+          <a:p>
+            <a:pPr indent="0" marL="0">
+              <a:lnSpc>
+                <a:spcPct val="115000"/>
+              </a:lnSpc>
+              <a:buNone/>
+            </a:pPr>
+            <a:r>
+              <a:rPr lang="en-US" sz="1150" dirty="0">
+                <a:solidFill>
+                  <a:srgbClr val="9AA6C4"/>
+                </a:solidFill>
+                <a:latin typeface="Calibri" pitchFamily="34" charset="0"/>
+                <a:ea typeface="Calibri" pitchFamily="34" charset="-122"/>
+                <a:cs typeface="Calibri" pitchFamily="34" charset="-120"/>
+              </a:rPr>
+              <a:t>B2B annual license sold to schools, $15–40 per student/year — tiered Student / Teacher / School-wide.</a:t>
+            </a:r>
+            <a:endParaRPr lang="en-US" sz="1150" dirty="0"/>
+          </a:p>
+        </p:txBody>
+      </p:sp>
+      <p:sp>
+        <p:nvSpPr>
+          <p:cNvPr id="10" name="Shape 7"/>
+          <p:cNvSpPr/>
+          <p:nvPr/>
+        </p:nvSpPr>
+        <p:spPr>
+          <a:xfrm>
+            <a:off x="868680" y="3474720"/>
+            <a:ext cx="594360" cy="594360"/>
+          </a:xfrm>
+          <a:prstGeom prst="ellipse">
+            <a:avLst/>
+          </a:prstGeom>
+          <a:solidFill>
+            <a:srgbClr val="1A2350"/>
+          </a:solidFill>
+          <a:ln/>
+        </p:spPr>
+      </p:sp>
+      <p:pic>
+        <p:nvPicPr>
+          <p:cNvPr id="11" name="Image 1" descr="./icons/trending-cyan.png">    </p:cNvPr>
+          <p:cNvPicPr>
+            <a:picLocks noChangeAspect="1"/>
+          </p:cNvPicPr>
+          <p:nvPr/>
+        </p:nvPicPr>
+        <p:blipFill>
+          <a:blip r:embed="rId2"/>
+          <a:stretch>
+            <a:fillRect/>
+          </a:stretch>
+        </p:blipFill>
+        <p:spPr>
+          <a:xfrm>
+            <a:off x="945947" y="3551987"/>
+            <a:ext cx="439826" cy="439826"/>
+          </a:xfrm>
+          <a:prstGeom prst="rect">
+            <a:avLst/>
+          </a:prstGeom>
+        </p:spPr>
+      </p:pic>
+      <p:sp>
+        <p:nvSpPr>
+          <p:cNvPr id="12" name="Text 8"/>
+          <p:cNvSpPr/>
+          <p:nvPr/>
+        </p:nvSpPr>
+        <p:spPr>
+          <a:xfrm>
+            <a:off x="1600200" y="3456432"/>
+            <a:ext cx="4709160" cy="320040"/>
+          </a:xfrm>
+          <a:prstGeom prst="rect">
+            <a:avLst/>
+          </a:prstGeom>
+          <a:noFill/>
+          <a:ln/>
+        </p:spPr>
+        <p:txBody>
+          <a:bodyPr wrap="square" lIns="0" tIns="0" rIns="0" bIns="0" rtlCol="0" anchor="ctr"/>
+          <a:lstStyle/>
+          <a:p>
+            <a:pPr indent="0" marL="0">
+              <a:buNone/>
+            </a:pPr>
+            <a:r>
+              <a:rPr lang="en-US" sz="1350" b="1" dirty="0">
+                <a:solidFill>
+                  <a:srgbClr val="EEF2FF"/>
+                </a:solidFill>
+                <a:latin typeface="Calibri" pitchFamily="34" charset="0"/>
+                <a:ea typeface="Calibri" pitchFamily="34" charset="-122"/>
+                <a:cs typeface="Calibri" pitchFamily="34" charset="-120"/>
+              </a:rPr>
+              <a:t>Expansion packs</a:t>
+            </a:r>
+            <a:endParaRPr lang="en-US" sz="1350" dirty="0"/>
+          </a:p>
+        </p:txBody>
+      </p:sp>
+      <p:sp>
+        <p:nvSpPr>
+          <p:cNvPr id="13" name="Text 9"/>
+          <p:cNvSpPr/>
+          <p:nvPr/>
+        </p:nvSpPr>
+        <p:spPr>
+          <a:xfrm>
+            <a:off x="1600200" y="3767328"/>
+            <a:ext cx="4709160" cy="685800"/>
+          </a:xfrm>
+          <a:prstGeom prst="rect">
+            <a:avLst/>
+          </a:prstGeom>
+          <a:noFill/>
+          <a:ln/>
+        </p:spPr>
+        <p:txBody>
+          <a:bodyPr wrap="square" lIns="0" tIns="0" rIns="0" bIns="0" rtlCol="0" anchor="ctr"/>
+          <a:lstStyle/>
+          <a:p>
+            <a:pPr indent="0" marL="0">
+              <a:lnSpc>
+                <a:spcPct val="115000"/>
+              </a:lnSpc>
+              <a:buNone/>
+            </a:pPr>
+            <a:r>
+              <a:rPr lang="en-US" sz="1150" dirty="0">
+                <a:solidFill>
+                  <a:srgbClr val="9AA6C4"/>
+                </a:solidFill>
+                <a:latin typeface="Calibri" pitchFamily="34" charset="0"/>
+                <a:ea typeface="Calibri" pitchFamily="34" charset="-122"/>
+                <a:cs typeface="Calibri" pitchFamily="34" charset="-120"/>
+              </a:rPr>
+              <a:t>Additional language packs (Korean, Malay, Tamil+) and subject packs beyond Physics, sold as premium add-ons.</a:t>
+            </a:r>
+            <a:endParaRPr lang="en-US" sz="1150" dirty="0"/>
+          </a:p>
+        </p:txBody>
+      </p:sp>
+      <p:sp>
+        <p:nvSpPr>
+          <p:cNvPr id="14" name="Shape 10"/>
+          <p:cNvSpPr/>
+          <p:nvPr/>
+        </p:nvSpPr>
+        <p:spPr>
+          <a:xfrm>
+            <a:off x="868680" y="4526280"/>
+            <a:ext cx="594360" cy="594360"/>
+          </a:xfrm>
+          <a:prstGeom prst="ellipse">
+            <a:avLst/>
+          </a:prstGeom>
+          <a:solidFill>
+            <a:srgbClr val="1A2350"/>
+          </a:solidFill>
+          <a:ln/>
+        </p:spPr>
+      </p:sp>
+      <p:pic>
+        <p:nvPicPr>
+          <p:cNvPr id="15" name="Image 2" descr="./icons/briefcase-cyan.png">    </p:cNvPr>
           <p:cNvPicPr>
             <a:picLocks noChangeAspect="1"/>
           </p:cNvPicPr>
@@ -7297,7 +7483,7 @@
         </p:blipFill>
         <p:spPr>
           <a:xfrm>
-            <a:off x="945947" y="2500427"/>
+            <a:off x="945947" y="4603547"/>
             <a:ext cx="439826" cy="439826"/>
           </a:xfrm>
           <a:prstGeom prst="rect">
@@ -7307,13 +7493,13 @@
       </p:pic>
       <p:sp>
         <p:nvSpPr>
-          <p:cNvPr id="8" name="Text 5"/>
-          <p:cNvSpPr/>
-          <p:nvPr/>
-        </p:nvSpPr>
-        <p:spPr>
-          <a:xfrm>
-            <a:off x="1600200" y="2404872"/>
+          <p:cNvPr id="16" name="Text 11"/>
+          <p:cNvSpPr/>
+          <p:nvPr/>
+        </p:nvSpPr>
+        <p:spPr>
+          <a:xfrm>
+            <a:off x="1600200" y="4507992"/>
             <a:ext cx="4709160" cy="320040"/>
           </a:xfrm>
           <a:prstGeom prst="rect">
@@ -7326,7 +7512,7 @@
           <a:bodyPr wrap="square" lIns="0" tIns="0" rIns="0" bIns="0" rtlCol="0" anchor="ctr"/>
           <a:lstStyle/>
           <a:p>
-            <a:pPr marL="0" indent="0">
+            <a:pPr indent="0" marL="0">
               <a:buNone/>
             </a:pPr>
             <a:r>
@@ -7338,7 +7524,7 @@
                 <a:ea typeface="Calibri" pitchFamily="34" charset="-122"/>
                 <a:cs typeface="Calibri" pitchFamily="34" charset="-120"/>
               </a:rPr>
-              <a:t>Per-student site license</a:t>
+              <a:t>Complementary revenue</a:t>
             </a:r>
             <a:endParaRPr lang="en-US" sz="1350" dirty="0"/>
           </a:p>
@@ -7346,13 +7532,13 @@
       </p:sp>
       <p:sp>
         <p:nvSpPr>
-          <p:cNvPr id="9" name="Text 6"/>
-          <p:cNvSpPr/>
-          <p:nvPr/>
-        </p:nvSpPr>
-        <p:spPr>
-          <a:xfrm>
-            <a:off x="1600200" y="2715768"/>
+          <p:cNvPr id="17" name="Text 12"/>
+          <p:cNvSpPr/>
+          <p:nvPr/>
+        </p:nvSpPr>
+        <p:spPr>
+          <a:xfrm>
+            <a:off x="1600200" y="4818888"/>
             <a:ext cx="4709160" cy="685800"/>
           </a:xfrm>
           <a:prstGeom prst="rect">
@@ -7365,7 +7551,7 @@
           <a:bodyPr wrap="square" lIns="0" tIns="0" rIns="0" bIns="0" rtlCol="0" anchor="ctr"/>
           <a:lstStyle/>
           <a:p>
-            <a:pPr marL="0" indent="0">
+            <a:pPr indent="0" marL="0">
               <a:lnSpc>
                 <a:spcPct val="115000"/>
               </a:lnSpc>
@@ -7380,7 +7566,7 @@
                 <a:ea typeface="Calibri" pitchFamily="34" charset="-122"/>
                 <a:cs typeface="Calibri" pitchFamily="34" charset="-120"/>
               </a:rPr>
-              <a:t>B2B annual license sold to schools, $15–40 per student/year — tiered Student / Teacher / School-wide.</a:t>
+              <a:t>Teacher PD workshops on AI-assisted ESL instruction; anonymized benchmarking insights for school networks.</a:t>
             </a:r>
             <a:endParaRPr lang="en-US" sz="1150" dirty="0"/>
           </a:p>
@@ -7388,34 +7574,56 @@
       </p:sp>
       <p:sp>
         <p:nvSpPr>
-          <p:cNvPr id="10" name="Shape 7"/>
-          <p:cNvSpPr/>
-          <p:nvPr/>
-        </p:nvSpPr>
-        <p:spPr>
-          <a:xfrm>
-            <a:off x="868680" y="3474720"/>
-            <a:ext cx="594360" cy="594360"/>
-          </a:xfrm>
-          <a:prstGeom prst="ellipse">
-            <a:avLst/>
+          <p:cNvPr id="18" name="Shape 13"/>
+          <p:cNvSpPr/>
+          <p:nvPr/>
+        </p:nvSpPr>
+        <p:spPr>
+          <a:xfrm>
+            <a:off x="6720840" y="1691640"/>
+            <a:ext cx="4937760" cy="4114800"/>
+          </a:xfrm>
+          <a:prstGeom prst="roundRect">
+            <a:avLst>
+              <a:gd name="adj" fmla="val 2667"/>
+            </a:avLst>
           </a:prstGeom>
           <a:solidFill>
             <a:srgbClr val="1A2350"/>
           </a:solidFill>
           <a:ln/>
-        </p:spPr>
-        <p:txBody>
-          <a:bodyPr/>
-          <a:lstStyle/>
-          <a:p>
-            <a:endParaRPr lang="en-SG"/>
-          </a:p>
-        </p:txBody>
+          <a:effectLst>
+            <a:outerShdw sx="100000" sy="100000" kx="0" ky="0" algn="bl" rotWithShape="0" blurRad="127000" dist="50800" dir="5400000">
+              <a:srgbClr val="000000">
+                <a:alpha val="35000"/>
+              </a:srgbClr>
+            </a:outerShdw>
+          </a:effectLst>
+        </p:spPr>
+      </p:sp>
+      <p:sp>
+        <p:nvSpPr>
+          <p:cNvPr id="19" name="Shape 14"/>
+          <p:cNvSpPr/>
+          <p:nvPr/>
+        </p:nvSpPr>
+        <p:spPr>
+          <a:xfrm>
+            <a:off x="7040880" y="2011680"/>
+            <a:ext cx="685800" cy="685800"/>
+          </a:xfrm>
+          <a:prstGeom prst="ellipse">
+            <a:avLst/>
+          </a:prstGeom>
+          <a:solidFill>
+            <a:srgbClr val="161D3F"/>
+          </a:solidFill>
+          <a:ln/>
+        </p:spPr>
       </p:sp>
       <p:pic>
         <p:nvPicPr>
-          <p:cNvPr id="11" name="Image 1" descr="./icons/trending-cyan.png"/>
+          <p:cNvPr id="20" name="Image 3" descr="./icons/layers-pink.png">    </p:cNvPr>
           <p:cNvPicPr>
             <a:picLocks noChangeAspect="1"/>
           </p:cNvPicPr>
@@ -7429,306 +7637,6 @@
         </p:blipFill>
         <p:spPr>
           <a:xfrm>
-            <a:off x="945947" y="3551987"/>
-            <a:ext cx="439826" cy="439826"/>
-          </a:xfrm>
-          <a:prstGeom prst="rect">
-            <a:avLst/>
-          </a:prstGeom>
-        </p:spPr>
-      </p:pic>
-      <p:sp>
-        <p:nvSpPr>
-          <p:cNvPr id="12" name="Text 8"/>
-          <p:cNvSpPr/>
-          <p:nvPr/>
-        </p:nvSpPr>
-        <p:spPr>
-          <a:xfrm>
-            <a:off x="1600200" y="3456432"/>
-            <a:ext cx="4709160" cy="320040"/>
-          </a:xfrm>
-          <a:prstGeom prst="rect">
-            <a:avLst/>
-          </a:prstGeom>
-          <a:noFill/>
-          <a:ln/>
-        </p:spPr>
-        <p:txBody>
-          <a:bodyPr wrap="square" lIns="0" tIns="0" rIns="0" bIns="0" rtlCol="0" anchor="ctr"/>
-          <a:lstStyle/>
-          <a:p>
-            <a:pPr marL="0" indent="0">
-              <a:buNone/>
-            </a:pPr>
-            <a:r>
-              <a:rPr lang="en-US" sz="1350" b="1" dirty="0">
-                <a:solidFill>
-                  <a:srgbClr val="EEF2FF"/>
-                </a:solidFill>
-                <a:latin typeface="Calibri" pitchFamily="34" charset="0"/>
-                <a:ea typeface="Calibri" pitchFamily="34" charset="-122"/>
-                <a:cs typeface="Calibri" pitchFamily="34" charset="-120"/>
-              </a:rPr>
-              <a:t>Expansion packs</a:t>
-            </a:r>
-            <a:endParaRPr lang="en-US" sz="1350" dirty="0"/>
-          </a:p>
-        </p:txBody>
-      </p:sp>
-      <p:sp>
-        <p:nvSpPr>
-          <p:cNvPr id="13" name="Text 9"/>
-          <p:cNvSpPr/>
-          <p:nvPr/>
-        </p:nvSpPr>
-        <p:spPr>
-          <a:xfrm>
-            <a:off x="1600200" y="3767328"/>
-            <a:ext cx="4709160" cy="685800"/>
-          </a:xfrm>
-          <a:prstGeom prst="rect">
-            <a:avLst/>
-          </a:prstGeom>
-          <a:noFill/>
-          <a:ln/>
-        </p:spPr>
-        <p:txBody>
-          <a:bodyPr wrap="square" lIns="0" tIns="0" rIns="0" bIns="0" rtlCol="0" anchor="ctr"/>
-          <a:lstStyle/>
-          <a:p>
-            <a:pPr marL="0" indent="0">
-              <a:lnSpc>
-                <a:spcPct val="115000"/>
-              </a:lnSpc>
-              <a:buNone/>
-            </a:pPr>
-            <a:r>
-              <a:rPr lang="en-US" sz="1150" dirty="0">
-                <a:solidFill>
-                  <a:srgbClr val="9AA6C4"/>
-                </a:solidFill>
-                <a:latin typeface="Calibri" pitchFamily="34" charset="0"/>
-                <a:ea typeface="Calibri" pitchFamily="34" charset="-122"/>
-                <a:cs typeface="Calibri" pitchFamily="34" charset="-120"/>
-              </a:rPr>
-              <a:t>Additional language packs (Korean, Malay, Tamil+) and subject packs beyond Physics, sold as premium add-ons.</a:t>
-            </a:r>
-            <a:endParaRPr lang="en-US" sz="1150" dirty="0"/>
-          </a:p>
-        </p:txBody>
-      </p:sp>
-      <p:sp>
-        <p:nvSpPr>
-          <p:cNvPr id="14" name="Shape 10"/>
-          <p:cNvSpPr/>
-          <p:nvPr/>
-        </p:nvSpPr>
-        <p:spPr>
-          <a:xfrm>
-            <a:off x="868680" y="4526280"/>
-            <a:ext cx="594360" cy="594360"/>
-          </a:xfrm>
-          <a:prstGeom prst="ellipse">
-            <a:avLst/>
-          </a:prstGeom>
-          <a:solidFill>
-            <a:srgbClr val="1A2350"/>
-          </a:solidFill>
-          <a:ln/>
-        </p:spPr>
-        <p:txBody>
-          <a:bodyPr/>
-          <a:lstStyle/>
-          <a:p>
-            <a:endParaRPr lang="en-SG"/>
-          </a:p>
-        </p:txBody>
-      </p:sp>
-      <p:pic>
-        <p:nvPicPr>
-          <p:cNvPr id="15" name="Image 2" descr="./icons/briefcase-cyan.png"/>
-          <p:cNvPicPr>
-            <a:picLocks noChangeAspect="1"/>
-          </p:cNvPicPr>
-          <p:nvPr/>
-        </p:nvPicPr>
-        <p:blipFill>
-          <a:blip r:embed="rId5"/>
-          <a:stretch>
-            <a:fillRect/>
-          </a:stretch>
-        </p:blipFill>
-        <p:spPr>
-          <a:xfrm>
-            <a:off x="945947" y="4603547"/>
-            <a:ext cx="439826" cy="439826"/>
-          </a:xfrm>
-          <a:prstGeom prst="rect">
-            <a:avLst/>
-          </a:prstGeom>
-        </p:spPr>
-      </p:pic>
-      <p:sp>
-        <p:nvSpPr>
-          <p:cNvPr id="16" name="Text 11"/>
-          <p:cNvSpPr/>
-          <p:nvPr/>
-        </p:nvSpPr>
-        <p:spPr>
-          <a:xfrm>
-            <a:off x="1600200" y="4507992"/>
-            <a:ext cx="4709160" cy="320040"/>
-          </a:xfrm>
-          <a:prstGeom prst="rect">
-            <a:avLst/>
-          </a:prstGeom>
-          <a:noFill/>
-          <a:ln/>
-        </p:spPr>
-        <p:txBody>
-          <a:bodyPr wrap="square" lIns="0" tIns="0" rIns="0" bIns="0" rtlCol="0" anchor="ctr"/>
-          <a:lstStyle/>
-          <a:p>
-            <a:pPr marL="0" indent="0">
-              <a:buNone/>
-            </a:pPr>
-            <a:r>
-              <a:rPr lang="en-US" sz="1350" b="1" dirty="0">
-                <a:solidFill>
-                  <a:srgbClr val="EEF2FF"/>
-                </a:solidFill>
-                <a:latin typeface="Calibri" pitchFamily="34" charset="0"/>
-                <a:ea typeface="Calibri" pitchFamily="34" charset="-122"/>
-                <a:cs typeface="Calibri" pitchFamily="34" charset="-120"/>
-              </a:rPr>
-              <a:t>Complementary revenue</a:t>
-            </a:r>
-            <a:endParaRPr lang="en-US" sz="1350" dirty="0"/>
-          </a:p>
-        </p:txBody>
-      </p:sp>
-      <p:sp>
-        <p:nvSpPr>
-          <p:cNvPr id="17" name="Text 12"/>
-          <p:cNvSpPr/>
-          <p:nvPr/>
-        </p:nvSpPr>
-        <p:spPr>
-          <a:xfrm>
-            <a:off x="1600200" y="4818888"/>
-            <a:ext cx="4709160" cy="685800"/>
-          </a:xfrm>
-          <a:prstGeom prst="rect">
-            <a:avLst/>
-          </a:prstGeom>
-          <a:noFill/>
-          <a:ln/>
-        </p:spPr>
-        <p:txBody>
-          <a:bodyPr wrap="square" lIns="0" tIns="0" rIns="0" bIns="0" rtlCol="0" anchor="ctr"/>
-          <a:lstStyle/>
-          <a:p>
-            <a:pPr marL="0" indent="0">
-              <a:lnSpc>
-                <a:spcPct val="115000"/>
-              </a:lnSpc>
-              <a:buNone/>
-            </a:pPr>
-            <a:r>
-              <a:rPr lang="en-US" sz="1150" dirty="0">
-                <a:solidFill>
-                  <a:srgbClr val="9AA6C4"/>
-                </a:solidFill>
-                <a:latin typeface="Calibri" pitchFamily="34" charset="0"/>
-                <a:ea typeface="Calibri" pitchFamily="34" charset="-122"/>
-                <a:cs typeface="Calibri" pitchFamily="34" charset="-120"/>
-              </a:rPr>
-              <a:t>Teacher PD workshops on AI-assisted ESL instruction; anonymized benchmarking insights for school networks.</a:t>
-            </a:r>
-            <a:endParaRPr lang="en-US" sz="1150" dirty="0"/>
-          </a:p>
-        </p:txBody>
-      </p:sp>
-      <p:sp>
-        <p:nvSpPr>
-          <p:cNvPr id="18" name="Shape 13"/>
-          <p:cNvSpPr/>
-          <p:nvPr/>
-        </p:nvSpPr>
-        <p:spPr>
-          <a:xfrm>
-            <a:off x="6720840" y="1691640"/>
-            <a:ext cx="4937760" cy="4114800"/>
-          </a:xfrm>
-          <a:prstGeom prst="roundRect">
-            <a:avLst>
-              <a:gd name="adj" fmla="val 2667"/>
-            </a:avLst>
-          </a:prstGeom>
-          <a:solidFill>
-            <a:srgbClr val="1A2350"/>
-          </a:solidFill>
-          <a:ln/>
-          <a:effectLst>
-            <a:outerShdw blurRad="127000" dist="50800" dir="5400000" algn="bl" rotWithShape="0">
-              <a:srgbClr val="000000">
-                <a:alpha val="35000"/>
-              </a:srgbClr>
-            </a:outerShdw>
-          </a:effectLst>
-        </p:spPr>
-        <p:txBody>
-          <a:bodyPr/>
-          <a:lstStyle/>
-          <a:p>
-            <a:endParaRPr lang="en-SG"/>
-          </a:p>
-        </p:txBody>
-      </p:sp>
-      <p:sp>
-        <p:nvSpPr>
-          <p:cNvPr id="19" name="Shape 14"/>
-          <p:cNvSpPr/>
-          <p:nvPr/>
-        </p:nvSpPr>
-        <p:spPr>
-          <a:xfrm>
-            <a:off x="7040880" y="2011680"/>
-            <a:ext cx="685800" cy="685800"/>
-          </a:xfrm>
-          <a:prstGeom prst="ellipse">
-            <a:avLst/>
-          </a:prstGeom>
-          <a:solidFill>
-            <a:srgbClr val="161D3F"/>
-          </a:solidFill>
-          <a:ln/>
-        </p:spPr>
-        <p:txBody>
-          <a:bodyPr/>
-          <a:lstStyle/>
-          <a:p>
-            <a:endParaRPr lang="en-SG"/>
-          </a:p>
-        </p:txBody>
-      </p:sp>
-      <p:pic>
-        <p:nvPicPr>
-          <p:cNvPr id="20" name="Image 3" descr="./icons/layers-pink.png"/>
-          <p:cNvPicPr>
-            <a:picLocks noChangeAspect="1"/>
-          </p:cNvPicPr>
-          <p:nvPr/>
-        </p:nvPicPr>
-        <p:blipFill>
-          <a:blip r:embed="rId6"/>
-          <a:stretch>
-            <a:fillRect/>
-          </a:stretch>
-        </p:blipFill>
-        <p:spPr>
-          <a:xfrm>
             <a:off x="7130034" y="2100834"/>
             <a:ext cx="507492" cy="507492"/>
           </a:xfrm>
@@ -7758,7 +7666,7 @@
           <a:bodyPr wrap="square" lIns="0" tIns="0" rIns="0" bIns="0" rtlCol="0" anchor="ctr"/>
           <a:lstStyle/>
           <a:p>
-            <a:pPr marL="0" indent="0">
+            <a:pPr indent="0" marL="0">
               <a:buNone/>
             </a:pPr>
             <a:r>
@@ -7797,7 +7705,7 @@
           <a:bodyPr wrap="square" lIns="0" tIns="0" rIns="0" bIns="0" rtlCol="0" anchor="ctr"/>
           <a:lstStyle/>
           <a:p>
-            <a:pPr marL="0" indent="0">
+            <a:pPr indent="0" marL="0">
               <a:lnSpc>
                 <a:spcPct val="125000"/>
               </a:lnSpc>
@@ -7839,7 +7747,7 @@
           <a:bodyPr wrap="square" lIns="0" tIns="0" rIns="0" bIns="0" rtlCol="0" anchor="ctr"/>
           <a:lstStyle/>
           <a:p>
-            <a:pPr marL="0" indent="0" algn="ctr">
+            <a:pPr algn="ctr" indent="0" marL="0">
               <a:buNone/>
             </a:pPr>
             <a:r>
@@ -7878,7 +7786,7 @@
           <a:bodyPr wrap="square" lIns="0" tIns="0" rIns="0" bIns="0" rtlCol="0" anchor="ctr"/>
           <a:lstStyle/>
           <a:p>
-            <a:pPr marL="0" indent="0" algn="ctr">
+            <a:pPr algn="ctr" indent="0" marL="0">
               <a:buNone/>
             </a:pPr>
             <a:r>
@@ -7912,7 +7820,6 @@
         <a:solidFill>
           <a:srgbClr val="0B1020"/>
         </a:solidFill>
-        <a:effectLst/>
       </p:bgPr>
     </p:bg>
     <p:spTree>
@@ -7950,11 +7857,11 @@
           <a:bodyPr wrap="square" lIns="0" tIns="0" rIns="0" bIns="0" rtlCol="0" anchor="ctr"/>
           <a:lstStyle/>
           <a:p>
-            <a:pPr marL="0" indent="0" algn="l">
-              <a:buNone/>
-            </a:pPr>
-            <a:r>
-              <a:rPr lang="en-US" sz="1300" b="1" kern="0" spc="200" dirty="0">
+            <a:pPr algn="l" indent="0" marL="0">
+              <a:buNone/>
+            </a:pPr>
+            <a:r>
+              <a:rPr lang="en-US" sz="1300" b="1" spc="200" kern="0" dirty="0">
                 <a:solidFill>
                   <a:srgbClr val="22D3EE"/>
                 </a:solidFill>
@@ -7989,7 +7896,7 @@
           <a:bodyPr wrap="square" lIns="0" tIns="0" rIns="0" bIns="0" rtlCol="0" anchor="ctr"/>
           <a:lstStyle/>
           <a:p>
-            <a:pPr marL="0" indent="0">
+            <a:pPr indent="0" marL="0">
               <a:lnSpc>
                 <a:spcPct val="110000"/>
               </a:lnSpc>
@@ -8004,34 +7911,12 @@
                 <a:ea typeface="Calibri" pitchFamily="34" charset="-122"/>
                 <a:cs typeface="Calibri" pitchFamily="34" charset="-120"/>
               </a:rPr>
-              <a:t>Built by a founder who has </a:t>
-            </a:r>
-            <a:r>
-              <a:rPr lang="en-US" sz="2800" b="1">
-                <a:solidFill>
-                  <a:srgbClr val="EEF2FF"/>
-                </a:solidFill>
-                <a:latin typeface="Calibri" pitchFamily="34" charset="0"/>
-                <a:ea typeface="Calibri" pitchFamily="34" charset="-122"/>
-                <a:cs typeface="Calibri" pitchFamily="34" charset="-120"/>
-              </a:rPr>
-              <a:t>spent 25+ </a:t>
-            </a:r>
-            <a:r>
-              <a:rPr lang="en-US" sz="2800" b="1" dirty="0">
-                <a:solidFill>
-                  <a:srgbClr val="EEF2FF"/>
-                </a:solidFill>
-                <a:latin typeface="Calibri" pitchFamily="34" charset="0"/>
-                <a:ea typeface="Calibri" pitchFamily="34" charset="-122"/>
-                <a:cs typeface="Calibri" pitchFamily="34" charset="-120"/>
-              </a:rPr>
-              <a:t>years</a:t>
+              <a:t>Built by a founder who has spent 20 years</a:t>
             </a:r>
             <a:endParaRPr lang="en-US" sz="2800" dirty="0"/>
           </a:p>
           <a:p>
-            <a:pPr marL="0" indent="0">
+            <a:pPr indent="0" marL="0">
               <a:lnSpc>
                 <a:spcPct val="110000"/>
               </a:lnSpc>
@@ -8073,20 +7958,13 @@
           </a:solidFill>
           <a:ln/>
           <a:effectLst>
-            <a:outerShdw blurRad="127000" dist="50800" dir="5400000" algn="bl" rotWithShape="0">
+            <a:outerShdw sx="100000" sy="100000" kx="0" ky="0" algn="bl" rotWithShape="0" blurRad="127000" dist="50800" dir="5400000">
               <a:srgbClr val="000000">
                 <a:alpha val="35000"/>
               </a:srgbClr>
             </a:outerShdw>
           </a:effectLst>
         </p:spPr>
-        <p:txBody>
-          <a:bodyPr/>
-          <a:lstStyle/>
-          <a:p>
-            <a:endParaRPr lang="en-SG"/>
-          </a:p>
-        </p:txBody>
       </p:sp>
       <p:sp>
         <p:nvSpPr>
@@ -8107,24 +7985,17 @@
           </a:solidFill>
           <a:ln/>
         </p:spPr>
-        <p:txBody>
-          <a:bodyPr/>
-          <a:lstStyle/>
-          <a:p>
-            <a:endParaRPr lang="en-SG"/>
-          </a:p>
-        </p:txBody>
       </p:sp>
       <p:pic>
         <p:nvPicPr>
-          <p:cNvPr id="6" name="Image 0" descr="./icons/briefcase-indigo.png"/>
+          <p:cNvPr id="6" name="Image 0" descr="./icons/briefcase-indigo.png">    </p:cNvPr>
           <p:cNvPicPr>
             <a:picLocks noChangeAspect="1"/>
           </p:cNvPicPr>
           <p:nvPr/>
         </p:nvPicPr>
         <p:blipFill>
-          <a:blip r:embed="rId3"/>
+          <a:blip r:embed="rId1"/>
           <a:stretch>
             <a:fillRect/>
           </a:stretch>
@@ -8160,7 +8031,7 @@
           <a:bodyPr wrap="square" lIns="0" tIns="0" rIns="0" bIns="0" rtlCol="0" anchor="ctr"/>
           <a:lstStyle/>
           <a:p>
-            <a:pPr marL="0" indent="0">
+            <a:pPr indent="0" marL="0">
               <a:buNone/>
             </a:pPr>
             <a:r>
@@ -8199,7 +8070,7 @@
           <a:bodyPr wrap="square" lIns="0" tIns="0" rIns="0" bIns="0" rtlCol="0" anchor="ctr"/>
           <a:lstStyle/>
           <a:p>
-            <a:pPr marL="0" indent="0">
+            <a:pPr indent="0" marL="0">
               <a:buNone/>
             </a:pPr>
             <a:r>
@@ -8238,7 +8109,7 @@
           <a:bodyPr wrap="square" lIns="0" tIns="0" rIns="0" bIns="0" rtlCol="0" anchor="ctr"/>
           <a:lstStyle/>
           <a:p>
-            <a:pPr marL="0" indent="0">
+            <a:pPr indent="0" marL="0">
               <a:lnSpc>
                 <a:spcPct val="125000"/>
               </a:lnSpc>
@@ -8280,7 +8151,7 @@
           <a:bodyPr wrap="square" lIns="0" tIns="0" rIns="0" bIns="0" rtlCol="0" anchor="ctr"/>
           <a:lstStyle/>
           <a:p>
-            <a:pPr marL="0" indent="0">
+            <a:pPr indent="0" marL="0">
               <a:lnSpc>
                 <a:spcPct val="125000"/>
               </a:lnSpc>
@@ -8297,6 +8168,12 @@
               </a:rPr>
               <a:t>Currently founder of </a:t>
             </a:r>
+            <a:pPr indent="0" marL="0">
+              <a:lnSpc>
+                <a:spcPct val="125000"/>
+              </a:lnSpc>
+              <a:buNone/>
+            </a:pPr>
             <a:r>
               <a:rPr lang="en-US" sz="1400" b="1" dirty="0">
                 <a:solidFill>
@@ -8308,6 +8185,12 @@
               </a:rPr>
               <a:t>Dhari AI</a:t>
             </a:r>
+            <a:pPr indent="0" marL="0">
+              <a:lnSpc>
+                <a:spcPct val="125000"/>
+              </a:lnSpc>
+              <a:buNone/>
+            </a:pPr>
             <a:r>
               <a:rPr lang="en-US" sz="1400" dirty="0">
                 <a:solidFill>
@@ -8624,319 +8507,4 @@
     </a:ext>
   </a:extLst>
 </a:theme>
-</file>
-
-<file path=ppt/theme/theme2.xml><?xml version="1.0" encoding="utf-8"?>
-<a:theme xmlns:a="http://schemas.openxmlformats.org/drawingml/2006/main" name="Office Theme">
-  <a:themeElements>
-    <a:clrScheme name="Office">
-      <a:dk1>
-        <a:sysClr val="windowText" lastClr="000000"/>
-      </a:dk1>
-      <a:lt1>
-        <a:sysClr val="window" lastClr="FFFFFF"/>
-      </a:lt1>
-      <a:dk2>
-        <a:srgbClr val="0E2841"/>
-      </a:dk2>
-      <a:lt2>
-        <a:srgbClr val="E8E8E8"/>
-      </a:lt2>
-      <a:accent1>
-        <a:srgbClr val="156082"/>
-      </a:accent1>
-      <a:accent2>
-        <a:srgbClr val="E97132"/>
-      </a:accent2>
-      <a:accent3>
-        <a:srgbClr val="196B24"/>
-      </a:accent3>
-      <a:accent4>
-        <a:srgbClr val="0F9ED5"/>
-      </a:accent4>
-      <a:accent5>
-        <a:srgbClr val="A02B93"/>
-      </a:accent5>
-      <a:accent6>
-        <a:srgbClr val="4EA72E"/>
-      </a:accent6>
-      <a:hlink>
-        <a:srgbClr val="467886"/>
-      </a:hlink>
-      <a:folHlink>
-        <a:srgbClr val="96607D"/>
-      </a:folHlink>
-    </a:clrScheme>
-    <a:fontScheme name="Office">
-      <a:majorFont>
-        <a:latin typeface="Aptos Display" panose="02110004020202020204"/>
-        <a:ea typeface=""/>
-        <a:cs typeface=""/>
-        <a:font script="Jpan" typeface="游ゴシック Light"/>
-        <a:font script="Hang" typeface="맑은 고딕"/>
-        <a:font script="Hans" typeface="等线 Light"/>
-        <a:font script="Hant" typeface="新細明體"/>
-        <a:font script="Arab" typeface="Times New Roman"/>
-        <a:font script="Hebr" typeface="Times New Roman"/>
-        <a:font script="Thai" typeface="Angsana New"/>
-        <a:font script="Ethi" typeface="Nyala"/>
-        <a:font script="Beng" typeface="Vrinda"/>
-        <a:font script="Gujr" typeface="Shruti"/>
-        <a:font script="Khmr" typeface="MoolBoran"/>
-        <a:font script="Knda" typeface="Tunga"/>
-        <a:font script="Guru" typeface="Raavi"/>
-        <a:font script="Cans" typeface="Euphemia"/>
-        <a:font script="Cher" typeface="Plantagenet Cherokee"/>
-        <a:font script="Yiii" typeface="Microsoft Yi Baiti"/>
-        <a:font script="Tibt" typeface="Microsoft Himalaya"/>
-        <a:font script="Thaa" typeface="MV Boli"/>
-        <a:font script="Deva" typeface="Mangal"/>
-        <a:font script="Telu" typeface="Gautami"/>
-        <a:font script="Taml" typeface="Latha"/>
-        <a:font script="Syrc" typeface="Estrangelo Edessa"/>
-        <a:font script="Orya" typeface="Kalinga"/>
-        <a:font script="Mlym" typeface="Kartika"/>
-        <a:font script="Laoo" typeface="DokChampa"/>
-        <a:font script="Sinh" typeface="Iskoola Pota"/>
-        <a:font script="Mong" typeface="Mongolian Baiti"/>
-        <a:font script="Viet" typeface="Times New Roman"/>
-        <a:font script="Uigh" typeface="Microsoft Uighur"/>
-        <a:font script="Geor" typeface="Sylfaen"/>
-        <a:font script="Armn" typeface="Arial"/>
-        <a:font script="Bugi" typeface="Leelawadee UI"/>
-        <a:font script="Bopo" typeface="Microsoft JhengHei"/>
-        <a:font script="Java" typeface="Javanese Text"/>
-        <a:font script="Lisu" typeface="Segoe UI"/>
-        <a:font script="Mymr" typeface="Myanmar Text"/>
-        <a:font script="Nkoo" typeface="Ebrima"/>
-        <a:font script="Olck" typeface="Nirmala UI"/>
-        <a:font script="Osma" typeface="Ebrima"/>
-        <a:font script="Phag" typeface="Phagspa"/>
-        <a:font script="Syrn" typeface="Estrangelo Edessa"/>
-        <a:font script="Syrj" typeface="Estrangelo Edessa"/>
-        <a:font script="Syre" typeface="Estrangelo Edessa"/>
-        <a:font script="Sora" typeface="Nirmala UI"/>
-        <a:font script="Tale" typeface="Microsoft Tai Le"/>
-        <a:font script="Talu" typeface="Microsoft New Tai Lue"/>
-        <a:font script="Tfng" typeface="Ebrima"/>
-      </a:majorFont>
-      <a:minorFont>
-        <a:latin typeface="Aptos" panose="02110004020202020204"/>
-        <a:ea typeface=""/>
-        <a:cs typeface=""/>
-        <a:font script="Jpan" typeface="游ゴシック"/>
-        <a:font script="Hang" typeface="맑은 고딕"/>
-        <a:font script="Hans" typeface="等线"/>
-        <a:font script="Hant" typeface="新細明體"/>
-        <a:font script="Arab" typeface="Arial"/>
-        <a:font script="Hebr" typeface="Arial"/>
-        <a:font script="Thai" typeface="Cordia New"/>
-        <a:font script="Ethi" typeface="Nyala"/>
-        <a:font script="Beng" typeface="Vrinda"/>
-        <a:font script="Gujr" typeface="Shruti"/>
-        <a:font script="Khmr" typeface="DaunPenh"/>
-        <a:font script="Knda" typeface="Tunga"/>
-        <a:font script="Guru" typeface="Raavi"/>
-        <a:font script="Cans" typeface="Euphemia"/>
-        <a:font script="Cher" typeface="Plantagenet Cherokee"/>
-        <a:font script="Yiii" typeface="Microsoft Yi Baiti"/>
-        <a:font script="Tibt" typeface="Microsoft Himalaya"/>
-        <a:font script="Thaa" typeface="MV Boli"/>
-        <a:font script="Deva" typeface="Mangal"/>
-        <a:font script="Telu" typeface="Gautami"/>
-        <a:font script="Taml" typeface="Latha"/>
-        <a:font script="Syrc" typeface="Estrangelo Edessa"/>
-        <a:font script="Orya" typeface="Kalinga"/>
-        <a:font script="Mlym" typeface="Kartika"/>
-        <a:font script="Laoo" typeface="DokChampa"/>
-        <a:font script="Sinh" typeface="Iskoola Pota"/>
-        <a:font script="Mong" typeface="Mongolian Baiti"/>
-        <a:font script="Viet" typeface="Arial"/>
-        <a:font script="Uigh" typeface="Microsoft Uighur"/>
-        <a:font script="Geor" typeface="Sylfaen"/>
-        <a:font script="Armn" typeface="Arial"/>
-        <a:font script="Bugi" typeface="Leelawadee UI"/>
-        <a:font script="Bopo" typeface="Microsoft JhengHei"/>
-        <a:font script="Java" typeface="Javanese Text"/>
-        <a:font script="Lisu" typeface="Segoe UI"/>
-        <a:font script="Mymr" typeface="Myanmar Text"/>
-        <a:font script="Nkoo" typeface="Ebrima"/>
-        <a:font script="Olck" typeface="Nirmala UI"/>
-        <a:font script="Osma" typeface="Ebrima"/>
-        <a:font script="Phag" typeface="Phagspa"/>
-        <a:font script="Syrn" typeface="Estrangelo Edessa"/>
-        <a:font script="Syrj" typeface="Estrangelo Edessa"/>
-        <a:font script="Syre" typeface="Estrangelo Edessa"/>
-        <a:font script="Sora" typeface="Nirmala UI"/>
-        <a:font script="Tale" typeface="Microsoft Tai Le"/>
-        <a:font script="Talu" typeface="Microsoft New Tai Lue"/>
-        <a:font script="Tfng" typeface="Ebrima"/>
-      </a:minorFont>
-    </a:fontScheme>
-    <a:fmtScheme name="Office">
-      <a:fillStyleLst>
-        <a:solidFill>
-          <a:schemeClr val="phClr"/>
-        </a:solidFill>
-        <a:gradFill rotWithShape="1">
-          <a:gsLst>
-            <a:gs pos="0">
-              <a:schemeClr val="phClr">
-                <a:lumMod val="110000"/>
-                <a:satMod val="105000"/>
-                <a:tint val="67000"/>
-              </a:schemeClr>
-            </a:gs>
-            <a:gs pos="50000">
-              <a:schemeClr val="phClr">
-                <a:lumMod val="105000"/>
-                <a:satMod val="103000"/>
-                <a:tint val="73000"/>
-              </a:schemeClr>
-            </a:gs>
-            <a:gs pos="100000">
-              <a:schemeClr val="phClr">
-                <a:lumMod val="105000"/>
-                <a:satMod val="109000"/>
-                <a:tint val="81000"/>
-              </a:schemeClr>
-            </a:gs>
-          </a:gsLst>
-          <a:lin ang="5400000" scaled="0"/>
-        </a:gradFill>
-        <a:gradFill rotWithShape="1">
-          <a:gsLst>
-            <a:gs pos="0">
-              <a:schemeClr val="phClr">
-                <a:satMod val="103000"/>
-                <a:lumMod val="102000"/>
-                <a:tint val="94000"/>
-              </a:schemeClr>
-            </a:gs>
-            <a:gs pos="50000">
-              <a:schemeClr val="phClr">
-                <a:satMod val="110000"/>
-                <a:lumMod val="100000"/>
-                <a:shade val="100000"/>
-              </a:schemeClr>
-            </a:gs>
-            <a:gs pos="100000">
-              <a:schemeClr val="phClr">
-                <a:lumMod val="99000"/>
-                <a:satMod val="120000"/>
-                <a:shade val="78000"/>
-              </a:schemeClr>
-            </a:gs>
-          </a:gsLst>
-          <a:lin ang="5400000" scaled="0"/>
-        </a:gradFill>
-      </a:fillStyleLst>
-      <a:lnStyleLst>
-        <a:ln w="12700" cap="flat" cmpd="sng" algn="ctr">
-          <a:solidFill>
-            <a:schemeClr val="phClr"/>
-          </a:solidFill>
-          <a:prstDash val="solid"/>
-          <a:miter lim="800000"/>
-        </a:ln>
-        <a:ln w="19050" cap="flat" cmpd="sng" algn="ctr">
-          <a:solidFill>
-            <a:schemeClr val="phClr"/>
-          </a:solidFill>
-          <a:prstDash val="solid"/>
-          <a:miter lim="800000"/>
-        </a:ln>
-        <a:ln w="25400" cap="flat" cmpd="sng" algn="ctr">
-          <a:solidFill>
-            <a:schemeClr val="phClr"/>
-          </a:solidFill>
-          <a:prstDash val="solid"/>
-          <a:miter lim="800000"/>
-        </a:ln>
-      </a:lnStyleLst>
-      <a:effectStyleLst>
-        <a:effectStyle>
-          <a:effectLst/>
-        </a:effectStyle>
-        <a:effectStyle>
-          <a:effectLst/>
-        </a:effectStyle>
-        <a:effectStyle>
-          <a:effectLst>
-            <a:outerShdw blurRad="57150" dist="19050" dir="5400000" algn="ctr" rotWithShape="0">
-              <a:srgbClr val="000000">
-                <a:alpha val="63000"/>
-              </a:srgbClr>
-            </a:outerShdw>
-          </a:effectLst>
-        </a:effectStyle>
-      </a:effectStyleLst>
-      <a:bgFillStyleLst>
-        <a:solidFill>
-          <a:schemeClr val="phClr"/>
-        </a:solidFill>
-        <a:solidFill>
-          <a:schemeClr val="phClr">
-            <a:tint val="95000"/>
-            <a:satMod val="170000"/>
-          </a:schemeClr>
-        </a:solidFill>
-        <a:gradFill rotWithShape="1">
-          <a:gsLst>
-            <a:gs pos="0">
-              <a:schemeClr val="phClr">
-                <a:tint val="93000"/>
-                <a:satMod val="150000"/>
-                <a:shade val="98000"/>
-                <a:lumMod val="102000"/>
-              </a:schemeClr>
-            </a:gs>
-            <a:gs pos="50000">
-              <a:schemeClr val="phClr">
-                <a:tint val="98000"/>
-                <a:satMod val="130000"/>
-                <a:shade val="90000"/>
-                <a:lumMod val="103000"/>
-              </a:schemeClr>
-            </a:gs>
-            <a:gs pos="100000">
-              <a:schemeClr val="phClr">
-                <a:shade val="63000"/>
-                <a:satMod val="120000"/>
-              </a:schemeClr>
-            </a:gs>
-          </a:gsLst>
-          <a:lin ang="5400000" scaled="0"/>
-        </a:gradFill>
-      </a:bgFillStyleLst>
-    </a:fmtScheme>
-  </a:themeElements>
-  <a:objectDefaults>
-    <a:lnDef>
-      <a:spPr/>
-      <a:bodyPr/>
-      <a:lstStyle/>
-      <a:style>
-        <a:lnRef idx="2">
-          <a:schemeClr val="accent1"/>
-        </a:lnRef>
-        <a:fillRef idx="0">
-          <a:schemeClr val="accent1"/>
-        </a:fillRef>
-        <a:effectRef idx="1">
-          <a:schemeClr val="accent1"/>
-        </a:effectRef>
-        <a:fontRef idx="minor">
-          <a:schemeClr val="tx1"/>
-        </a:fontRef>
-      </a:style>
-    </a:lnDef>
-  </a:objectDefaults>
-  <a:extraClrSchemeLst/>
-  <a:extLst>
-    <a:ext uri="{05A4C25C-085E-4340-85A3-A5531E510DB2}">
-      <thm15:themeFamily xmlns:thm15="http://schemas.microsoft.com/office/thememl/2012/main" name="Office Theme" id="{2E142A2C-CD16-42D6-873A-C26D2A0506FA}" vid="{1BDDFF52-6CD6-40A5-AB3C-68EB2F1E4D0A}"/>
-    </a:ext>
-  </a:extLst>
-</a:theme>
 </file>
--- a/docs/Verity-AI-Pitch-Deck.pptx
+++ b/docs/Verity-AI-Pitch-Deck.pptx
@@ -3471,7 +3471,7 @@
                 <a:ea typeface="Calibri" pitchFamily="34" charset="-122"/>
                 <a:cs typeface="Calibri" pitchFamily="34" charset="-120"/>
               </a:rPr>
-              <a:t>One tutor, five ways to learn — no prompting required</a:t>
+              <a:t>One AI, five ways to learn — no prompting required</a:t>
             </a:r>
             <a:endParaRPr lang="en-US" sz="2800" dirty="0"/>
           </a:p>
@@ -4280,7 +4280,7 @@
                 <a:ea typeface="Calibri" pitchFamily="34" charset="-122"/>
                 <a:cs typeface="Calibri" pitchFamily="34" charset="-120"/>
               </a:rPr>
-              <a:t>Real conversational memory: the tutor threads full history so it genuinely remembers what it already explained — no repetition, real back-and-forth.</a:t>
+              <a:t>Real conversational memory: the AI threads full history so it genuinely remembers what it already explained — no repetition, real back-and-forth.</a:t>
             </a:r>
             <a:endParaRPr lang="en-US" sz="1400" dirty="0"/>
           </a:p>
@@ -5102,7 +5102,7 @@
                 <a:ea typeface="Calibri" pitchFamily="34" charset="-122"/>
                 <a:cs typeface="Calibri" pitchFamily="34" charset="-120"/>
               </a:rPr>
-              <a:t>Full history threads on every turn so the tutor genuinely remembers what it already said — no repetition, real Socratic back-and-forth.</a:t>
+              <a:t>Full history threads on every turn so the AI genuinely remembers what it already said — no repetition, real Socratic back-and-forth.</a:t>
             </a:r>
             <a:endParaRPr lang="en-US" sz="1200" dirty="0"/>
           </a:p>
@@ -5520,7 +5520,7 @@
                 <a:ea typeface="Calibri" pitchFamily="34" charset="-122"/>
                 <a:cs typeface="Calibri" pitchFamily="34" charset="-120"/>
               </a:rPr>
-              <a:t>Learns with a guided AI tutor, in their own language.</a:t>
+              <a:t>Learns with an AI learning assistant, in their own language.</a:t>
             </a:r>
             <a:endParaRPr lang="en-US" sz="1250" dirty="0"/>
           </a:p>
